--- a/ppt/AnjaneyaReddyGurram_24288853_aquaculture-fish-farm.pptx
+++ b/ppt/AnjaneyaReddyGurram_24288853_aquaculture-fish-farm.pptx
@@ -1150,20 +1150,20 @@
         </p:nvSpPr>
         <p:spPr>
           <a:xfrm>
-            <a:off x="640080" y="914400"/>
-            <a:ext cx="10972800" cy="1280160"/>
-          </a:xfrm>
-          <a:prstGeom prst="rect">
-            <a:avLst/>
-          </a:prstGeom>
-          <a:noFill/>
-          <a:ln/>
-        </p:spPr>
-        <p:txBody>
-          <a:bodyPr wrap="square" rtlCol="0" anchor="t"/>
-          <a:lstStyle/>
-          <a:p>
-            <a:pPr algn="l" indent="0" marL="0">
+            <a:off x="548640" y="1051560"/>
+            <a:ext cx="11064240" cy="1188720"/>
+          </a:xfrm>
+          <a:prstGeom prst="rect">
+            <a:avLst/>
+          </a:prstGeom>
+          <a:noFill/>
+          <a:ln/>
+        </p:spPr>
+        <p:txBody>
+          <a:bodyPr wrap="square" rtlCol="0" anchor="ctr"/>
+          <a:lstStyle/>
+          <a:p>
+            <a:pPr algn="ctr" indent="0" marL="0">
               <a:buNone/>
             </a:pPr>
             <a:r>
@@ -1189,8 +1189,8 @@
         </p:nvSpPr>
         <p:spPr>
           <a:xfrm>
-            <a:off x="658368" y="2148840"/>
-            <a:ext cx="10972800" cy="365760"/>
+            <a:off x="548640" y="2286000"/>
+            <a:ext cx="11064240" cy="365760"/>
           </a:xfrm>
           <a:prstGeom prst="rect">
             <a:avLst/>
@@ -1202,7 +1202,7 @@
           <a:bodyPr wrap="square" rtlCol="0" anchor="ctr"/>
           <a:lstStyle/>
           <a:p>
-            <a:pPr indent="0" marL="0">
+            <a:pPr algn="ctr" indent="0" marL="0">
               <a:buNone/>
             </a:pPr>
             <a:r>
@@ -1228,8 +1228,8 @@
         </p:nvSpPr>
         <p:spPr>
           <a:xfrm>
-            <a:off x="658368" y="2697480"/>
-            <a:ext cx="10424160" cy="1371600"/>
+            <a:off x="1463040" y="2926080"/>
+            <a:ext cx="9235440" cy="1371600"/>
           </a:xfrm>
           <a:prstGeom prst="rect">
             <a:avLst/>
@@ -1241,7 +1241,7 @@
           <a:bodyPr wrap="square" rtlCol="0" anchor="ctr"/>
           <a:lstStyle/>
           <a:p>
-            <a:pPr indent="0" marL="0">
+            <a:pPr algn="ctr" indent="0" marL="0">
               <a:lnSpc>
                 <a:spcPct val="110000"/>
               </a:lnSpc>
@@ -1270,7 +1270,7 @@
         </p:nvSpPr>
         <p:spPr>
           <a:xfrm>
-            <a:off x="658368" y="4206240"/>
+            <a:off x="1889608" y="4526280"/>
             <a:ext cx="2651760" cy="566928"/>
           </a:xfrm>
           <a:prstGeom prst="roundRect">
@@ -1297,7 +1297,7 @@
         </p:nvSpPr>
         <p:spPr>
           <a:xfrm>
-            <a:off x="658368" y="4206240"/>
+            <a:off x="1889608" y="4526280"/>
             <a:ext cx="2651760" cy="566928"/>
           </a:xfrm>
           <a:prstGeom prst="rect">
@@ -1314,7 +1314,7 @@
               <a:buNone/>
             </a:pPr>
             <a:r>
-              <a:rPr lang="en-US" sz="1400" b="1" dirty="0">
+              <a:rPr lang="en-US" sz="1350" b="1" dirty="0">
                 <a:solidFill>
                   <a:srgbClr val="E7A93C"/>
                 </a:solidFill>
@@ -1324,7 +1324,7 @@
               </a:rPr>
               <a:t>1–2 checks / day today</a:t>
             </a:r>
-            <a:endParaRPr lang="en-US" sz="1400" dirty="0"/>
+            <a:endParaRPr lang="en-US" sz="1350" dirty="0"/>
           </a:p>
         </p:txBody>
       </p:sp>
@@ -1336,7 +1336,7 @@
         </p:nvSpPr>
         <p:spPr>
           <a:xfrm>
-            <a:off x="3538728" y="4206240"/>
+            <a:off x="4769968" y="4526280"/>
             <a:ext cx="2651760" cy="566928"/>
           </a:xfrm>
           <a:prstGeom prst="roundRect">
@@ -1363,7 +1363,7 @@
         </p:nvSpPr>
         <p:spPr>
           <a:xfrm>
-            <a:off x="3538728" y="4206240"/>
+            <a:off x="4769968" y="4526280"/>
             <a:ext cx="2651760" cy="566928"/>
           </a:xfrm>
           <a:prstGeom prst="rect">
@@ -1380,7 +1380,7 @@
               <a:buNone/>
             </a:pPr>
             <a:r>
-              <a:rPr lang="en-US" sz="1400" b="1" dirty="0">
+              <a:rPr lang="en-US" sz="1350" b="1" dirty="0">
                 <a:solidFill>
                   <a:srgbClr val="E7A93C"/>
                 </a:solidFill>
@@ -1390,7 +1390,7 @@
               </a:rPr>
               <a:t>10 sensors · 2 ponds</a:t>
             </a:r>
-            <a:endParaRPr lang="en-US" sz="1400" dirty="0"/>
+            <a:endParaRPr lang="en-US" sz="1350" dirty="0"/>
           </a:p>
         </p:txBody>
       </p:sp>
@@ -1402,7 +1402,7 @@
         </p:nvSpPr>
         <p:spPr>
           <a:xfrm>
-            <a:off x="6419088" y="4206240"/>
+            <a:off x="7650328" y="4526280"/>
             <a:ext cx="2651760" cy="566928"/>
           </a:xfrm>
           <a:prstGeom prst="roundRect">
@@ -1429,7 +1429,7 @@
         </p:nvSpPr>
         <p:spPr>
           <a:xfrm>
-            <a:off x="6419088" y="4206240"/>
+            <a:off x="7650328" y="4526280"/>
             <a:ext cx="2651760" cy="566928"/>
           </a:xfrm>
           <a:prstGeom prst="rect">
@@ -1446,7 +1446,7 @@
               <a:buNone/>
             </a:pPr>
             <a:r>
-              <a:rPr lang="en-US" sz="1400" b="1" dirty="0">
+              <a:rPr lang="en-US" sz="1350" b="1" dirty="0">
                 <a:solidFill>
                   <a:srgbClr val="E7A93C"/>
                 </a:solidFill>
@@ -1456,7 +1456,7 @@
               </a:rPr>
               <a:t>10 s edge rules</a:t>
             </a:r>
-            <a:endParaRPr lang="en-US" sz="1400" dirty="0"/>
+            <a:endParaRPr lang="en-US" sz="1350" dirty="0"/>
           </a:p>
         </p:txBody>
       </p:sp>
@@ -1468,8 +1468,8 @@
         </p:nvSpPr>
         <p:spPr>
           <a:xfrm>
-            <a:off x="658368" y="6126480"/>
-            <a:ext cx="10972800" cy="365760"/>
+            <a:off x="548640" y="6126480"/>
+            <a:ext cx="11064240" cy="365760"/>
           </a:xfrm>
           <a:prstGeom prst="rect">
             <a:avLst/>
@@ -1481,7 +1481,7 @@
           <a:bodyPr wrap="square" rtlCol="0" anchor="ctr"/>
           <a:lstStyle/>
           <a:p>
-            <a:pPr indent="0" marL="0">
+            <a:pPr algn="ctr" indent="0" marL="0">
               <a:buNone/>
             </a:pPr>
             <a:r>
@@ -1578,12 +1578,12 @@
         </p:nvSpPr>
         <p:spPr>
           <a:xfrm>
-            <a:off x="640080" y="2468880"/>
-            <a:ext cx="1572768" cy="1371600"/>
+            <a:off x="640080" y="1874520"/>
+            <a:ext cx="2286000" cy="1280160"/>
           </a:xfrm>
           <a:prstGeom prst="roundRect">
             <a:avLst>
-              <a:gd name="adj" fmla="val 6667"/>
+              <a:gd name="adj" fmla="val 7143"/>
             </a:avLst>
           </a:prstGeom>
           <a:solidFill>
@@ -1605,8 +1605,8 @@
         </p:nvSpPr>
         <p:spPr>
           <a:xfrm>
-            <a:off x="1325880" y="2670048"/>
-            <a:ext cx="201168" cy="201168"/>
+            <a:off x="1691640" y="2039112"/>
+            <a:ext cx="182880" cy="182880"/>
           </a:xfrm>
           <a:prstGeom prst="ellipse">
             <a:avLst/>
@@ -1625,8 +1625,8 @@
         </p:nvSpPr>
         <p:spPr>
           <a:xfrm>
-            <a:off x="594360" y="2926080"/>
-            <a:ext cx="1664208" cy="411480"/>
+            <a:off x="612648" y="2258568"/>
+            <a:ext cx="2340864" cy="365760"/>
           </a:xfrm>
           <a:prstGeom prst="rect">
             <a:avLst/>
@@ -1664,8 +1664,8 @@
         </p:nvSpPr>
         <p:spPr>
           <a:xfrm>
-            <a:off x="621792" y="3310128"/>
-            <a:ext cx="1609344" cy="457200"/>
+            <a:off x="640080" y="2606040"/>
+            <a:ext cx="2286000" cy="411480"/>
           </a:xfrm>
           <a:prstGeom prst="rect">
             <a:avLst/>
@@ -1703,8 +1703,8 @@
         </p:nvSpPr>
         <p:spPr>
           <a:xfrm>
-            <a:off x="2231136" y="3154680"/>
-            <a:ext cx="258409" cy="0"/>
+            <a:off x="2944368" y="2514600"/>
+            <a:ext cx="1975104" cy="0"/>
           </a:xfrm>
           <a:prstGeom prst="line">
             <a:avLst/>
@@ -1715,6 +1715,7 @@
               <a:srgbClr val="4FB0A6"/>
             </a:solidFill>
             <a:prstDash val="solid"/>
+            <a:headEnd type="none"/>
             <a:tailEnd type="triangle"/>
           </a:ln>
         </p:spPr>
@@ -1727,12 +1728,12 @@
         </p:nvSpPr>
         <p:spPr>
           <a:xfrm>
-            <a:off x="2507833" y="2468880"/>
-            <a:ext cx="1572768" cy="1371600"/>
+            <a:off x="4937760" y="1874520"/>
+            <a:ext cx="2286000" cy="1280160"/>
           </a:xfrm>
           <a:prstGeom prst="roundRect">
             <a:avLst>
-              <a:gd name="adj" fmla="val 6667"/>
+              <a:gd name="adj" fmla="val 7143"/>
             </a:avLst>
           </a:prstGeom>
           <a:solidFill>
@@ -1754,8 +1755,8 @@
         </p:nvSpPr>
         <p:spPr>
           <a:xfrm>
-            <a:off x="3193633" y="2670048"/>
-            <a:ext cx="201168" cy="201168"/>
+            <a:off x="5989320" y="2039112"/>
+            <a:ext cx="182880" cy="182880"/>
           </a:xfrm>
           <a:prstGeom prst="ellipse">
             <a:avLst/>
@@ -1774,8 +1775,8 @@
         </p:nvSpPr>
         <p:spPr>
           <a:xfrm>
-            <a:off x="2462113" y="2926080"/>
-            <a:ext cx="1664208" cy="411480"/>
+            <a:off x="4910328" y="2258568"/>
+            <a:ext cx="2340864" cy="365760"/>
           </a:xfrm>
           <a:prstGeom prst="rect">
             <a:avLst/>
@@ -1813,8 +1814,8 @@
         </p:nvSpPr>
         <p:spPr>
           <a:xfrm>
-            <a:off x="2489545" y="3310128"/>
-            <a:ext cx="1609344" cy="457200"/>
+            <a:off x="4937760" y="2606040"/>
+            <a:ext cx="2286000" cy="411480"/>
           </a:xfrm>
           <a:prstGeom prst="rect">
             <a:avLst/>
@@ -1852,8 +1853,8 @@
         </p:nvSpPr>
         <p:spPr>
           <a:xfrm>
-            <a:off x="4098889" y="3154680"/>
-            <a:ext cx="258409" cy="0"/>
+            <a:off x="7242048" y="2514600"/>
+            <a:ext cx="1975104" cy="0"/>
           </a:xfrm>
           <a:prstGeom prst="line">
             <a:avLst/>
@@ -1864,6 +1865,7 @@
               <a:srgbClr val="4FB0A6"/>
             </a:solidFill>
             <a:prstDash val="solid"/>
+            <a:headEnd type="none"/>
             <a:tailEnd type="triangle"/>
           </a:ln>
         </p:spPr>
@@ -1876,12 +1878,12 @@
         </p:nvSpPr>
         <p:spPr>
           <a:xfrm>
-            <a:off x="4375587" y="2468880"/>
-            <a:ext cx="1572768" cy="1371600"/>
+            <a:off x="9235440" y="1874520"/>
+            <a:ext cx="2286000" cy="1280160"/>
           </a:xfrm>
           <a:prstGeom prst="roundRect">
             <a:avLst>
-              <a:gd name="adj" fmla="val 6667"/>
+              <a:gd name="adj" fmla="val 7143"/>
             </a:avLst>
           </a:prstGeom>
           <a:solidFill>
@@ -1903,8 +1905,8 @@
         </p:nvSpPr>
         <p:spPr>
           <a:xfrm>
-            <a:off x="5061387" y="2670048"/>
-            <a:ext cx="201168" cy="201168"/>
+            <a:off x="10287000" y="2039112"/>
+            <a:ext cx="182880" cy="182880"/>
           </a:xfrm>
           <a:prstGeom prst="ellipse">
             <a:avLst/>
@@ -1923,8 +1925,8 @@
         </p:nvSpPr>
         <p:spPr>
           <a:xfrm>
-            <a:off x="4329867" y="2926080"/>
-            <a:ext cx="1664208" cy="411480"/>
+            <a:off x="9208008" y="2258568"/>
+            <a:ext cx="2340864" cy="365760"/>
           </a:xfrm>
           <a:prstGeom prst="rect">
             <a:avLst/>
@@ -1962,8 +1964,8 @@
         </p:nvSpPr>
         <p:spPr>
           <a:xfrm>
-            <a:off x="4357299" y="3310128"/>
-            <a:ext cx="1609344" cy="457200"/>
+            <a:off x="9235440" y="2606040"/>
+            <a:ext cx="2286000" cy="411480"/>
           </a:xfrm>
           <a:prstGeom prst="rect">
             <a:avLst/>
@@ -2001,36 +2003,12 @@
         </p:nvSpPr>
         <p:spPr>
           <a:xfrm>
-            <a:off x="5966643" y="3154680"/>
-            <a:ext cx="258409" cy="0"/>
-          </a:xfrm>
-          <a:prstGeom prst="line">
-            <a:avLst/>
-          </a:prstGeom>
-          <a:noFill/>
-          <a:ln w="25400">
-            <a:solidFill>
-              <a:srgbClr val="4FB0A6"/>
-            </a:solidFill>
-            <a:prstDash val="solid"/>
-            <a:tailEnd type="triangle"/>
-          </a:ln>
-        </p:spPr>
-      </p:sp>
-      <p:sp>
-        <p:nvSpPr>
-          <p:cNvPr id="18" name="Shape 16"/>
-          <p:cNvSpPr/>
-          <p:nvPr/>
-        </p:nvSpPr>
-        <p:spPr>
-          <a:xfrm>
-            <a:off x="6243340" y="2468880"/>
-            <a:ext cx="1572768" cy="1371600"/>
+            <a:off x="9235440" y="3520440"/>
+            <a:ext cx="2286000" cy="1280160"/>
           </a:xfrm>
           <a:prstGeom prst="roundRect">
             <a:avLst>
-              <a:gd name="adj" fmla="val 6667"/>
+              <a:gd name="adj" fmla="val 7143"/>
             </a:avLst>
           </a:prstGeom>
           <a:solidFill>
@@ -2046,14 +2024,14 @@
       </p:sp>
       <p:sp>
         <p:nvSpPr>
-          <p:cNvPr id="19" name="Shape 17"/>
-          <p:cNvSpPr/>
-          <p:nvPr/>
-        </p:nvSpPr>
-        <p:spPr>
-          <a:xfrm>
-            <a:off x="6929140" y="2670048"/>
-            <a:ext cx="201168" cy="201168"/>
+          <p:cNvPr id="18" name="Shape 16"/>
+          <p:cNvSpPr/>
+          <p:nvPr/>
+        </p:nvSpPr>
+        <p:spPr>
+          <a:xfrm>
+            <a:off x="10287000" y="3685032"/>
+            <a:ext cx="182880" cy="182880"/>
           </a:xfrm>
           <a:prstGeom prst="ellipse">
             <a:avLst/>
@@ -2066,14 +2044,14 @@
       </p:sp>
       <p:sp>
         <p:nvSpPr>
-          <p:cNvPr id="20" name="Text 18"/>
-          <p:cNvSpPr/>
-          <p:nvPr/>
-        </p:nvSpPr>
-        <p:spPr>
-          <a:xfrm>
-            <a:off x="6197620" y="2926080"/>
-            <a:ext cx="1664208" cy="411480"/>
+          <p:cNvPr id="19" name="Text 17"/>
+          <p:cNvSpPr/>
+          <p:nvPr/>
+        </p:nvSpPr>
+        <p:spPr>
+          <a:xfrm>
+            <a:off x="9208008" y="3904488"/>
+            <a:ext cx="2340864" cy="365760"/>
           </a:xfrm>
           <a:prstGeom prst="rect">
             <a:avLst/>
@@ -2105,14 +2083,14 @@
       </p:sp>
       <p:sp>
         <p:nvSpPr>
-          <p:cNvPr id="21" name="Text 19"/>
-          <p:cNvSpPr/>
-          <p:nvPr/>
-        </p:nvSpPr>
-        <p:spPr>
-          <a:xfrm>
-            <a:off x="6225052" y="3310128"/>
-            <a:ext cx="1609344" cy="457200"/>
+          <p:cNvPr id="20" name="Text 18"/>
+          <p:cNvSpPr/>
+          <p:nvPr/>
+        </p:nvSpPr>
+        <p:spPr>
+          <a:xfrm>
+            <a:off x="9235440" y="4251960"/>
+            <a:ext cx="2286000" cy="411480"/>
           </a:xfrm>
           <a:prstGeom prst="rect">
             <a:avLst/>
@@ -2144,14 +2122,14 @@
       </p:sp>
       <p:sp>
         <p:nvSpPr>
-          <p:cNvPr id="22" name="Shape 20"/>
-          <p:cNvSpPr/>
-          <p:nvPr/>
-        </p:nvSpPr>
-        <p:spPr>
-          <a:xfrm>
-            <a:off x="7834396" y="3154680"/>
-            <a:ext cx="258409" cy="0"/>
+          <p:cNvPr id="21" name="Shape 19"/>
+          <p:cNvSpPr/>
+          <p:nvPr/>
+        </p:nvSpPr>
+        <p:spPr>
+          <a:xfrm>
+            <a:off x="7242048" y="4160520"/>
+            <a:ext cx="1975104" cy="0"/>
           </a:xfrm>
           <a:prstGeom prst="line">
             <a:avLst/>
@@ -2162,24 +2140,25 @@
               <a:srgbClr val="4FB0A6"/>
             </a:solidFill>
             <a:prstDash val="solid"/>
-            <a:tailEnd type="triangle"/>
+            <a:headEnd type="triangle"/>
+            <a:tailEnd type="oval"/>
           </a:ln>
         </p:spPr>
       </p:sp>
       <p:sp>
         <p:nvSpPr>
-          <p:cNvPr id="23" name="Shape 21"/>
-          <p:cNvSpPr/>
-          <p:nvPr/>
-        </p:nvSpPr>
-        <p:spPr>
-          <a:xfrm>
-            <a:off x="8111094" y="2468880"/>
-            <a:ext cx="1572768" cy="1371600"/>
+          <p:cNvPr id="22" name="Shape 20"/>
+          <p:cNvSpPr/>
+          <p:nvPr/>
+        </p:nvSpPr>
+        <p:spPr>
+          <a:xfrm>
+            <a:off x="4937760" y="3520440"/>
+            <a:ext cx="2286000" cy="1280160"/>
           </a:xfrm>
           <a:prstGeom prst="roundRect">
             <a:avLst>
-              <a:gd name="adj" fmla="val 6667"/>
+              <a:gd name="adj" fmla="val 7143"/>
             </a:avLst>
           </a:prstGeom>
           <a:solidFill>
@@ -2195,14 +2174,14 @@
       </p:sp>
       <p:sp>
         <p:nvSpPr>
-          <p:cNvPr id="24" name="Shape 22"/>
-          <p:cNvSpPr/>
-          <p:nvPr/>
-        </p:nvSpPr>
-        <p:spPr>
-          <a:xfrm>
-            <a:off x="8796894" y="2670048"/>
-            <a:ext cx="201168" cy="201168"/>
+          <p:cNvPr id="23" name="Shape 21"/>
+          <p:cNvSpPr/>
+          <p:nvPr/>
+        </p:nvSpPr>
+        <p:spPr>
+          <a:xfrm>
+            <a:off x="5989320" y="3685032"/>
+            <a:ext cx="182880" cy="182880"/>
           </a:xfrm>
           <a:prstGeom prst="ellipse">
             <a:avLst/>
@@ -2215,14 +2194,14 @@
       </p:sp>
       <p:sp>
         <p:nvSpPr>
-          <p:cNvPr id="25" name="Text 23"/>
-          <p:cNvSpPr/>
-          <p:nvPr/>
-        </p:nvSpPr>
-        <p:spPr>
-          <a:xfrm>
-            <a:off x="8065374" y="2926080"/>
-            <a:ext cx="1664208" cy="411480"/>
+          <p:cNvPr id="24" name="Text 22"/>
+          <p:cNvSpPr/>
+          <p:nvPr/>
+        </p:nvSpPr>
+        <p:spPr>
+          <a:xfrm>
+            <a:off x="4910328" y="3904488"/>
+            <a:ext cx="2340864" cy="365760"/>
           </a:xfrm>
           <a:prstGeom prst="rect">
             <a:avLst/>
@@ -2254,14 +2233,14 @@
       </p:sp>
       <p:sp>
         <p:nvSpPr>
-          <p:cNvPr id="26" name="Text 24"/>
-          <p:cNvSpPr/>
-          <p:nvPr/>
-        </p:nvSpPr>
-        <p:spPr>
-          <a:xfrm>
-            <a:off x="8092806" y="3310128"/>
-            <a:ext cx="1609344" cy="457200"/>
+          <p:cNvPr id="25" name="Text 23"/>
+          <p:cNvSpPr/>
+          <p:nvPr/>
+        </p:nvSpPr>
+        <p:spPr>
+          <a:xfrm>
+            <a:off x="4937760" y="4251960"/>
+            <a:ext cx="2286000" cy="411480"/>
           </a:xfrm>
           <a:prstGeom prst="rect">
             <a:avLst/>
@@ -2293,14 +2272,14 @@
       </p:sp>
       <p:sp>
         <p:nvSpPr>
-          <p:cNvPr id="27" name="Shape 25"/>
-          <p:cNvSpPr/>
-          <p:nvPr/>
-        </p:nvSpPr>
-        <p:spPr>
-          <a:xfrm>
-            <a:off x="9702150" y="3154680"/>
-            <a:ext cx="258409" cy="0"/>
+          <p:cNvPr id="26" name="Shape 24"/>
+          <p:cNvSpPr/>
+          <p:nvPr/>
+        </p:nvSpPr>
+        <p:spPr>
+          <a:xfrm>
+            <a:off x="2944368" y="4160520"/>
+            <a:ext cx="1975104" cy="0"/>
           </a:xfrm>
           <a:prstGeom prst="line">
             <a:avLst/>
@@ -2311,24 +2290,25 @@
               <a:srgbClr val="4FB0A6"/>
             </a:solidFill>
             <a:prstDash val="solid"/>
-            <a:tailEnd type="triangle"/>
+            <a:headEnd type="triangle"/>
+            <a:tailEnd type="oval"/>
           </a:ln>
         </p:spPr>
       </p:sp>
       <p:sp>
         <p:nvSpPr>
-          <p:cNvPr id="28" name="Shape 26"/>
-          <p:cNvSpPr/>
-          <p:nvPr/>
-        </p:nvSpPr>
-        <p:spPr>
-          <a:xfrm>
-            <a:off x="9978847" y="2468880"/>
-            <a:ext cx="1572768" cy="1371600"/>
+          <p:cNvPr id="27" name="Shape 25"/>
+          <p:cNvSpPr/>
+          <p:nvPr/>
+        </p:nvSpPr>
+        <p:spPr>
+          <a:xfrm>
+            <a:off x="640080" y="3520440"/>
+            <a:ext cx="2286000" cy="1280160"/>
           </a:xfrm>
           <a:prstGeom prst="roundRect">
             <a:avLst>
-              <a:gd name="adj" fmla="val 6667"/>
+              <a:gd name="adj" fmla="val 7143"/>
             </a:avLst>
           </a:prstGeom>
           <a:solidFill>
@@ -2344,14 +2324,14 @@
       </p:sp>
       <p:sp>
         <p:nvSpPr>
-          <p:cNvPr id="29" name="Shape 27"/>
-          <p:cNvSpPr/>
-          <p:nvPr/>
-        </p:nvSpPr>
-        <p:spPr>
-          <a:xfrm>
-            <a:off x="10664647" y="2670048"/>
-            <a:ext cx="201168" cy="201168"/>
+          <p:cNvPr id="28" name="Shape 26"/>
+          <p:cNvSpPr/>
+          <p:nvPr/>
+        </p:nvSpPr>
+        <p:spPr>
+          <a:xfrm>
+            <a:off x="1691640" y="3685032"/>
+            <a:ext cx="182880" cy="182880"/>
           </a:xfrm>
           <a:prstGeom prst="ellipse">
             <a:avLst/>
@@ -2364,14 +2344,14 @@
       </p:sp>
       <p:sp>
         <p:nvSpPr>
-          <p:cNvPr id="30" name="Text 28"/>
-          <p:cNvSpPr/>
-          <p:nvPr/>
-        </p:nvSpPr>
-        <p:spPr>
-          <a:xfrm>
-            <a:off x="9933127" y="2926080"/>
-            <a:ext cx="1664208" cy="411480"/>
+          <p:cNvPr id="29" name="Text 27"/>
+          <p:cNvSpPr/>
+          <p:nvPr/>
+        </p:nvSpPr>
+        <p:spPr>
+          <a:xfrm>
+            <a:off x="612648" y="3904488"/>
+            <a:ext cx="2340864" cy="365760"/>
           </a:xfrm>
           <a:prstGeom prst="rect">
             <a:avLst/>
@@ -2403,14 +2383,14 @@
       </p:sp>
       <p:sp>
         <p:nvSpPr>
-          <p:cNvPr id="31" name="Text 29"/>
-          <p:cNvSpPr/>
-          <p:nvPr/>
-        </p:nvSpPr>
-        <p:spPr>
-          <a:xfrm>
-            <a:off x="9960559" y="3310128"/>
-            <a:ext cx="1609344" cy="457200"/>
+          <p:cNvPr id="30" name="Text 28"/>
+          <p:cNvSpPr/>
+          <p:nvPr/>
+        </p:nvSpPr>
+        <p:spPr>
+          <a:xfrm>
+            <a:off x="640080" y="4251960"/>
+            <a:ext cx="2286000" cy="411480"/>
           </a:xfrm>
           <a:prstGeom prst="rect">
             <a:avLst/>
@@ -2442,92 +2422,38 @@
       </p:sp>
       <p:sp>
         <p:nvSpPr>
+          <p:cNvPr id="31" name="Shape 29"/>
+          <p:cNvSpPr/>
+          <p:nvPr/>
+        </p:nvSpPr>
+        <p:spPr>
+          <a:xfrm>
+            <a:off x="10378440" y="3154680"/>
+            <a:ext cx="0" cy="365760"/>
+          </a:xfrm>
+          <a:prstGeom prst="line">
+            <a:avLst/>
+          </a:prstGeom>
+          <a:noFill/>
+          <a:ln w="25400">
+            <a:solidFill>
+              <a:srgbClr val="4FB0A6"/>
+            </a:solidFill>
+            <a:prstDash val="solid"/>
+            <a:tailEnd type="triangle"/>
+          </a:ln>
+        </p:spPr>
+      </p:sp>
+      <p:sp>
+        <p:nvSpPr>
           <p:cNvPr id="32" name="Text 30"/>
           <p:cNvSpPr/>
           <p:nvPr/>
         </p:nvSpPr>
         <p:spPr>
           <a:xfrm>
-            <a:off x="640080" y="3977640"/>
-            <a:ext cx="3440521" cy="274320"/>
-          </a:xfrm>
-          <a:prstGeom prst="rect">
-            <a:avLst/>
-          </a:prstGeom>
-          <a:noFill/>
-          <a:ln/>
-        </p:spPr>
-        <p:txBody>
-          <a:bodyPr wrap="square" rtlCol="0" anchor="ctr"/>
-          <a:lstStyle/>
-          <a:p>
-            <a:pPr algn="ctr" indent="0" marL="0">
-              <a:buNone/>
-            </a:pPr>
-            <a:r>
-              <a:rPr lang="en-US" sz="1100" b="1" spc="200" kern="0" dirty="0">
-                <a:solidFill>
-                  <a:srgbClr val="4FB0A6"/>
-                </a:solidFill>
-                <a:latin typeface="Calibri" pitchFamily="34" charset="0"/>
-                <a:ea typeface="Calibri" pitchFamily="34" charset="-122"/>
-                <a:cs typeface="Calibri" pitchFamily="34" charset="-120"/>
-              </a:rPr>
-              <a:t>EDGE</a:t>
-            </a:r>
-            <a:endParaRPr lang="en-US" sz="1100" dirty="0"/>
-          </a:p>
-        </p:txBody>
-      </p:sp>
-      <p:sp>
-        <p:nvSpPr>
-          <p:cNvPr id="33" name="Text 31"/>
-          <p:cNvSpPr/>
-          <p:nvPr/>
-        </p:nvSpPr>
-        <p:spPr>
-          <a:xfrm>
-            <a:off x="4375587" y="3977640"/>
-            <a:ext cx="7176028" cy="274320"/>
-          </a:xfrm>
-          <a:prstGeom prst="rect">
-            <a:avLst/>
-          </a:prstGeom>
-          <a:noFill/>
-          <a:ln/>
-        </p:spPr>
-        <p:txBody>
-          <a:bodyPr wrap="square" rtlCol="0" anchor="ctr"/>
-          <a:lstStyle/>
-          <a:p>
-            <a:pPr algn="ctr" indent="0" marL="0">
-              <a:buNone/>
-            </a:pPr>
-            <a:r>
-              <a:rPr lang="en-US" sz="1100" b="1" spc="200" kern="0" dirty="0">
-                <a:solidFill>
-                  <a:srgbClr val="0F6E6A"/>
-                </a:solidFill>
-                <a:latin typeface="Calibri" pitchFamily="34" charset="0"/>
-                <a:ea typeface="Calibri" pitchFamily="34" charset="-122"/>
-                <a:cs typeface="Calibri" pitchFamily="34" charset="-120"/>
-              </a:rPr>
-              <a:t>CLOUD</a:t>
-            </a:r>
-            <a:endParaRPr lang="en-US" sz="1100" dirty="0"/>
-          </a:p>
-        </p:txBody>
-      </p:sp>
-      <p:sp>
-        <p:nvSpPr>
-          <p:cNvPr id="34" name="Text 32"/>
-          <p:cNvSpPr/>
-          <p:nvPr/>
-        </p:nvSpPr>
-        <p:spPr>
-          <a:xfrm>
-            <a:off x="640080" y="5212080"/>
-            <a:ext cx="10972800" cy="640080"/>
+            <a:off x="640080" y="5257800"/>
+            <a:ext cx="10972800" cy="731520"/>
           </a:xfrm>
           <a:prstGeom prst="rect">
             <a:avLst/>
@@ -2675,8 +2601,35 @@
         </p:nvSpPr>
         <p:spPr>
           <a:xfrm>
-            <a:off x="731520" y="1965960"/>
-            <a:ext cx="685800" cy="685800"/>
+            <a:off x="640080" y="1874520"/>
+            <a:ext cx="3502152" cy="3657600"/>
+          </a:xfrm>
+          <a:prstGeom prst="roundRect">
+            <a:avLst>
+              <a:gd name="adj" fmla="val 2611"/>
+            </a:avLst>
+          </a:prstGeom>
+          <a:solidFill>
+            <a:srgbClr val="EDF6F5"/>
+          </a:solidFill>
+          <a:ln w="15240">
+            <a:solidFill>
+              <a:srgbClr val="1E9188"/>
+            </a:solidFill>
+            <a:prstDash val="solid"/>
+          </a:ln>
+        </p:spPr>
+      </p:sp>
+      <p:sp>
+        <p:nvSpPr>
+          <p:cNvPr id="5" name="Shape 3"/>
+          <p:cNvSpPr/>
+          <p:nvPr/>
+        </p:nvSpPr>
+        <p:spPr>
+          <a:xfrm>
+            <a:off x="914400" y="2194560"/>
+            <a:ext cx="640080" cy="640080"/>
           </a:xfrm>
           <a:prstGeom prst="ellipse">
             <a:avLst/>
@@ -2689,14 +2642,14 @@
       </p:sp>
       <p:sp>
         <p:nvSpPr>
-          <p:cNvPr id="5" name="Text 3"/>
-          <p:cNvSpPr/>
-          <p:nvPr/>
-        </p:nvSpPr>
-        <p:spPr>
-          <a:xfrm>
-            <a:off x="731520" y="1965960"/>
-            <a:ext cx="685800" cy="685800"/>
+          <p:cNvPr id="6" name="Text 4"/>
+          <p:cNvSpPr/>
+          <p:nvPr/>
+        </p:nvSpPr>
+        <p:spPr>
+          <a:xfrm>
+            <a:off x="914400" y="2194560"/>
+            <a:ext cx="640080" cy="640080"/>
           </a:xfrm>
           <a:prstGeom prst="rect">
             <a:avLst/>
@@ -2712,7 +2665,7 @@
               <a:buNone/>
             </a:pPr>
             <a:r>
-              <a:rPr lang="en-US" sz="2600" b="1" dirty="0">
+              <a:rPr lang="en-US" sz="2400" b="1" dirty="0">
                 <a:solidFill>
                   <a:srgbClr val="FFFFFF"/>
                 </a:solidFill>
@@ -2722,20 +2675,20 @@
               </a:rPr>
               <a:t>1</a:t>
             </a:r>
-            <a:endParaRPr lang="en-US" sz="2600" dirty="0"/>
-          </a:p>
-        </p:txBody>
-      </p:sp>
-      <p:sp>
-        <p:nvSpPr>
-          <p:cNvPr id="6" name="Text 4"/>
-          <p:cNvSpPr/>
-          <p:nvPr/>
-        </p:nvSpPr>
-        <p:spPr>
-          <a:xfrm>
-            <a:off x="1691640" y="1920240"/>
-            <a:ext cx="9875520" cy="411480"/>
+            <a:endParaRPr lang="en-US" sz="2400" dirty="0"/>
+          </a:p>
+        </p:txBody>
+      </p:sp>
+      <p:sp>
+        <p:nvSpPr>
+          <p:cNvPr id="7" name="Text 5"/>
+          <p:cNvSpPr/>
+          <p:nvPr/>
+        </p:nvSpPr>
+        <p:spPr>
+          <a:xfrm>
+            <a:off x="914400" y="3017520"/>
+            <a:ext cx="2953512" cy="822960"/>
           </a:xfrm>
           <a:prstGeom prst="rect">
             <a:avLst/>
@@ -2751,7 +2704,7 @@
               <a:buNone/>
             </a:pPr>
             <a:r>
-              <a:rPr lang="en-US" sz="1800" b="1" dirty="0">
+              <a:rPr lang="en-US" sz="1700" b="1" dirty="0">
                 <a:solidFill>
                   <a:srgbClr val="0F2E31"/>
                 </a:solidFill>
@@ -2759,22 +2712,22 @@
                 <a:ea typeface="Calibri" pitchFamily="34" charset="-122"/>
                 <a:cs typeface="Calibri" pitchFamily="34" charset="-120"/>
               </a:rPr>
-              <a:t>Pipeline health, all green</a:t>
-            </a:r>
-            <a:endParaRPr lang="en-US" sz="1800" dirty="0"/>
-          </a:p>
-        </p:txBody>
-      </p:sp>
-      <p:sp>
-        <p:nvSpPr>
-          <p:cNvPr id="7" name="Text 5"/>
-          <p:cNvSpPr/>
-          <p:nvPr/>
-        </p:nvSpPr>
-        <p:spPr>
-          <a:xfrm>
-            <a:off x="1691640" y="2340864"/>
-            <a:ext cx="9875520" cy="640080"/>
+              <a:t>Two ponds, five water metrics</a:t>
+            </a:r>
+            <a:endParaRPr lang="en-US" sz="1700" dirty="0"/>
+          </a:p>
+        </p:txBody>
+      </p:sp>
+      <p:sp>
+        <p:nvSpPr>
+          <p:cNvPr id="8" name="Text 6"/>
+          <p:cNvSpPr/>
+          <p:nvPr/>
+        </p:nvSpPr>
+        <p:spPr>
+          <a:xfrm>
+            <a:off x="914400" y="3794760"/>
+            <a:ext cx="2953512" cy="1554480"/>
           </a:xfrm>
           <a:prstGeom prst="rect">
             <a:avLst/>
@@ -2787,10 +2740,13 @@
           <a:lstStyle/>
           <a:p>
             <a:pPr indent="0" marL="0">
+              <a:lnSpc>
+                <a:spcPct val="105000"/>
+              </a:lnSpc>
               <a:buNone/>
             </a:pPr>
             <a:r>
-              <a:rPr lang="en-US" sz="1350" dirty="0">
+              <a:rPr lang="en-US" sz="1300" dirty="0">
                 <a:solidFill>
                   <a:srgbClr val="557370"/>
                 </a:solidFill>
@@ -2798,22 +2754,49 @@
                 <a:ea typeface="Calibri" pitchFamily="34" charset="-122"/>
                 <a:cs typeface="Calibri" pitchFamily="34" charset="-120"/>
               </a:rPr>
-              <a:t>Four of four checks green within a minute of boot; the freshest reading under two seconds old.</a:t>
-            </a:r>
-            <a:endParaRPr lang="en-US" sz="1350" dirty="0"/>
-          </a:p>
-        </p:txBody>
-      </p:sp>
-      <p:sp>
-        <p:nvSpPr>
-          <p:cNvPr id="8" name="Shape 6"/>
-          <p:cNvSpPr/>
-          <p:nvPr/>
-        </p:nvSpPr>
-        <p:spPr>
-          <a:xfrm>
-            <a:off x="731520" y="3383280"/>
-            <a:ext cx="685800" cy="685800"/>
+              <a:t>Temperature, dissolved oxygen, pH, ammonia and feed live for both ponds, freshest reading under two seconds old.</a:t>
+            </a:r>
+            <a:endParaRPr lang="en-US" sz="1300" dirty="0"/>
+          </a:p>
+        </p:txBody>
+      </p:sp>
+      <p:sp>
+        <p:nvSpPr>
+          <p:cNvPr id="9" name="Shape 7"/>
+          <p:cNvSpPr/>
+          <p:nvPr/>
+        </p:nvSpPr>
+        <p:spPr>
+          <a:xfrm>
+            <a:off x="4416552" y="1874520"/>
+            <a:ext cx="3502152" cy="3657600"/>
+          </a:xfrm>
+          <a:prstGeom prst="roundRect">
+            <a:avLst>
+              <a:gd name="adj" fmla="val 2611"/>
+            </a:avLst>
+          </a:prstGeom>
+          <a:solidFill>
+            <a:srgbClr val="EDF6F5"/>
+          </a:solidFill>
+          <a:ln w="15240">
+            <a:solidFill>
+              <a:srgbClr val="1E9188"/>
+            </a:solidFill>
+            <a:prstDash val="solid"/>
+          </a:ln>
+        </p:spPr>
+      </p:sp>
+      <p:sp>
+        <p:nvSpPr>
+          <p:cNvPr id="10" name="Shape 8"/>
+          <p:cNvSpPr/>
+          <p:nvPr/>
+        </p:nvSpPr>
+        <p:spPr>
+          <a:xfrm>
+            <a:off x="4690872" y="2194560"/>
+            <a:ext cx="640080" cy="640080"/>
           </a:xfrm>
           <a:prstGeom prst="ellipse">
             <a:avLst/>
@@ -2826,14 +2809,14 @@
       </p:sp>
       <p:sp>
         <p:nvSpPr>
-          <p:cNvPr id="9" name="Text 7"/>
-          <p:cNvSpPr/>
-          <p:nvPr/>
-        </p:nvSpPr>
-        <p:spPr>
-          <a:xfrm>
-            <a:off x="731520" y="3383280"/>
-            <a:ext cx="685800" cy="685800"/>
+          <p:cNvPr id="11" name="Text 9"/>
+          <p:cNvSpPr/>
+          <p:nvPr/>
+        </p:nvSpPr>
+        <p:spPr>
+          <a:xfrm>
+            <a:off x="4690872" y="2194560"/>
+            <a:ext cx="640080" cy="640080"/>
           </a:xfrm>
           <a:prstGeom prst="rect">
             <a:avLst/>
@@ -2849,7 +2832,7 @@
               <a:buNone/>
             </a:pPr>
             <a:r>
-              <a:rPr lang="en-US" sz="2600" b="1" dirty="0">
+              <a:rPr lang="en-US" sz="2400" b="1" dirty="0">
                 <a:solidFill>
                   <a:srgbClr val="FFFFFF"/>
                 </a:solidFill>
@@ -2859,20 +2842,20 @@
               </a:rPr>
               <a:t>2</a:t>
             </a:r>
-            <a:endParaRPr lang="en-US" sz="2600" dirty="0"/>
-          </a:p>
-        </p:txBody>
-      </p:sp>
-      <p:sp>
-        <p:nvSpPr>
-          <p:cNvPr id="10" name="Text 8"/>
-          <p:cNvSpPr/>
-          <p:nvPr/>
-        </p:nvSpPr>
-        <p:spPr>
-          <a:xfrm>
-            <a:off x="1691640" y="3337560"/>
-            <a:ext cx="9875520" cy="411480"/>
+            <a:endParaRPr lang="en-US" sz="2400" dirty="0"/>
+          </a:p>
+        </p:txBody>
+      </p:sp>
+      <p:sp>
+        <p:nvSpPr>
+          <p:cNvPr id="12" name="Text 10"/>
+          <p:cNvSpPr/>
+          <p:nvPr/>
+        </p:nvSpPr>
+        <p:spPr>
+          <a:xfrm>
+            <a:off x="4690872" y="3017520"/>
+            <a:ext cx="2953512" cy="822960"/>
           </a:xfrm>
           <a:prstGeom prst="rect">
             <a:avLst/>
@@ -2888,7 +2871,7 @@
               <a:buNone/>
             </a:pPr>
             <a:r>
-              <a:rPr lang="en-US" sz="1800" b="1" dirty="0">
+              <a:rPr lang="en-US" sz="1700" b="1" dirty="0">
                 <a:solidFill>
                   <a:srgbClr val="0F2E31"/>
                 </a:solidFill>
@@ -2896,22 +2879,22 @@
                 <a:ea typeface="Calibri" pitchFamily="34" charset="-122"/>
                 <a:cs typeface="Calibri" pitchFamily="34" charset="-120"/>
               </a:rPr>
-              <a:t>Live alerts firing</a:t>
-            </a:r>
-            <a:endParaRPr lang="en-US" sz="1800" dirty="0"/>
-          </a:p>
-        </p:txBody>
-      </p:sp>
-      <p:sp>
-        <p:nvSpPr>
-          <p:cNvPr id="11" name="Text 9"/>
-          <p:cNvSpPr/>
-          <p:nvPr/>
-        </p:nvSpPr>
-        <p:spPr>
-          <a:xfrm>
-            <a:off x="1691640" y="3758184"/>
-            <a:ext cx="9875520" cy="640080"/>
+              <a:t>Four alerts firing at once</a:t>
+            </a:r>
+            <a:endParaRPr lang="en-US" sz="1700" dirty="0"/>
+          </a:p>
+        </p:txBody>
+      </p:sp>
+      <p:sp>
+        <p:nvSpPr>
+          <p:cNvPr id="13" name="Text 11"/>
+          <p:cNvSpPr/>
+          <p:nvPr/>
+        </p:nvSpPr>
+        <p:spPr>
+          <a:xfrm>
+            <a:off x="4690872" y="3794760"/>
+            <a:ext cx="2953512" cy="1554480"/>
           </a:xfrm>
           <a:prstGeom prst="rect">
             <a:avLst/>
@@ -2924,10 +2907,13 @@
           <a:lstStyle/>
           <a:p>
             <a:pPr indent="0" marL="0">
+              <a:lnSpc>
+                <a:spcPct val="105000"/>
+              </a:lnSpc>
               <a:buNone/>
             </a:pPr>
             <a:r>
-              <a:rPr lang="en-US" sz="1350" dirty="0">
+              <a:rPr lang="en-US" sz="1300" dirty="0">
                 <a:solidFill>
                   <a:srgbClr val="557370"/>
                 </a:solidFill>
@@ -2935,22 +2921,49 @@
                 <a:ea typeface="Calibri" pitchFamily="34" charset="-122"/>
                 <a:cs typeface="Calibri" pitchFamily="34" charset="-120"/>
               </a:rPr>
-              <a:t>Heat stress, hypoxia and acidic risk on pond-1 and alkaline risk on pond-2, with 590 records stored and climbing.</a:t>
-            </a:r>
-            <a:endParaRPr lang="en-US" sz="1350" dirty="0"/>
-          </a:p>
-        </p:txBody>
-      </p:sp>
-      <p:sp>
-        <p:nvSpPr>
-          <p:cNvPr id="12" name="Shape 10"/>
-          <p:cNvSpPr/>
-          <p:nvPr/>
-        </p:nvSpPr>
-        <p:spPr>
-          <a:xfrm>
-            <a:off x="731520" y="4800600"/>
-            <a:ext cx="685800" cy="685800"/>
+              <a:t>Heat stress, hypoxia and acidic risk on pond-1 and alkaline risk on pond-2 are all live on the board right now.</a:t>
+            </a:r>
+            <a:endParaRPr lang="en-US" sz="1300" dirty="0"/>
+          </a:p>
+        </p:txBody>
+      </p:sp>
+      <p:sp>
+        <p:nvSpPr>
+          <p:cNvPr id="14" name="Shape 12"/>
+          <p:cNvSpPr/>
+          <p:nvPr/>
+        </p:nvSpPr>
+        <p:spPr>
+          <a:xfrm>
+            <a:off x="8193024" y="1874520"/>
+            <a:ext cx="3502152" cy="3657600"/>
+          </a:xfrm>
+          <a:prstGeom prst="roundRect">
+            <a:avLst>
+              <a:gd name="adj" fmla="val 2611"/>
+            </a:avLst>
+          </a:prstGeom>
+          <a:solidFill>
+            <a:srgbClr val="EDF6F5"/>
+          </a:solidFill>
+          <a:ln w="15240">
+            <a:solidFill>
+              <a:srgbClr val="1E9188"/>
+            </a:solidFill>
+            <a:prstDash val="solid"/>
+          </a:ln>
+        </p:spPr>
+      </p:sp>
+      <p:sp>
+        <p:nvSpPr>
+          <p:cNvPr id="15" name="Shape 13"/>
+          <p:cNvSpPr/>
+          <p:nvPr/>
+        </p:nvSpPr>
+        <p:spPr>
+          <a:xfrm>
+            <a:off x="8467344" y="2194560"/>
+            <a:ext cx="640080" cy="640080"/>
           </a:xfrm>
           <a:prstGeom prst="ellipse">
             <a:avLst/>
@@ -2963,14 +2976,14 @@
       </p:sp>
       <p:sp>
         <p:nvSpPr>
-          <p:cNvPr id="13" name="Text 11"/>
-          <p:cNvSpPr/>
-          <p:nvPr/>
-        </p:nvSpPr>
-        <p:spPr>
-          <a:xfrm>
-            <a:off x="731520" y="4800600"/>
-            <a:ext cx="685800" cy="685800"/>
+          <p:cNvPr id="16" name="Text 14"/>
+          <p:cNvSpPr/>
+          <p:nvPr/>
+        </p:nvSpPr>
+        <p:spPr>
+          <a:xfrm>
+            <a:off x="8467344" y="2194560"/>
+            <a:ext cx="640080" cy="640080"/>
           </a:xfrm>
           <a:prstGeom prst="rect">
             <a:avLst/>
@@ -2986,7 +2999,7 @@
               <a:buNone/>
             </a:pPr>
             <a:r>
-              <a:rPr lang="en-US" sz="2600" b="1" dirty="0">
+              <a:rPr lang="en-US" sz="2400" b="1" dirty="0">
                 <a:solidFill>
                   <a:srgbClr val="FFFFFF"/>
                 </a:solidFill>
@@ -2996,20 +3009,20 @@
               </a:rPr>
               <a:t>3</a:t>
             </a:r>
-            <a:endParaRPr lang="en-US" sz="2600" dirty="0"/>
-          </a:p>
-        </p:txBody>
-      </p:sp>
-      <p:sp>
-        <p:nvSpPr>
-          <p:cNvPr id="14" name="Text 12"/>
-          <p:cNvSpPr/>
-          <p:nvPr/>
-        </p:nvSpPr>
-        <p:spPr>
-          <a:xfrm>
-            <a:off x="1691640" y="4754880"/>
-            <a:ext cx="9875520" cy="411480"/>
+            <a:endParaRPr lang="en-US" sz="2400" dirty="0"/>
+          </a:p>
+        </p:txBody>
+      </p:sp>
+      <p:sp>
+        <p:nvSpPr>
+          <p:cNvPr id="17" name="Text 15"/>
+          <p:cNvSpPr/>
+          <p:nvPr/>
+        </p:nvSpPr>
+        <p:spPr>
+          <a:xfrm>
+            <a:off x="8467344" y="3017520"/>
+            <a:ext cx="2953512" cy="822960"/>
           </a:xfrm>
           <a:prstGeom prst="rect">
             <a:avLst/>
@@ -3025,7 +3038,7 @@
               <a:buNone/>
             </a:pPr>
             <a:r>
-              <a:rPr lang="en-US" sz="1800" b="1" dirty="0">
+              <a:rPr lang="en-US" sz="1700" b="1" dirty="0">
                 <a:solidFill>
                   <a:srgbClr val="0F2E31"/>
                 </a:solidFill>
@@ -3033,22 +3046,22 @@
                 <a:ea typeface="Calibri" pitchFamily="34" charset="-122"/>
                 <a:cs typeface="Calibri" pitchFamily="34" charset="-120"/>
               </a:rPr>
-              <a:t>Tested end to end</a:t>
-            </a:r>
-            <a:endParaRPr lang="en-US" sz="1800" dirty="0"/>
-          </a:p>
-        </p:txBody>
-      </p:sp>
-      <p:sp>
-        <p:nvSpPr>
-          <p:cNvPr id="15" name="Text 13"/>
-          <p:cNvSpPr/>
-          <p:nvPr/>
-        </p:nvSpPr>
-        <p:spPr>
-          <a:xfrm>
-            <a:off x="1691640" y="5175504"/>
-            <a:ext cx="9875520" cy="640080"/>
+              <a:t>Real data, climbing</a:t>
+            </a:r>
+            <a:endParaRPr lang="en-US" sz="1700" dirty="0"/>
+          </a:p>
+        </p:txBody>
+      </p:sp>
+      <p:sp>
+        <p:nvSpPr>
+          <p:cNvPr id="18" name="Text 16"/>
+          <p:cNvSpPr/>
+          <p:nvPr/>
+        </p:nvSpPr>
+        <p:spPr>
+          <a:xfrm>
+            <a:off x="8467344" y="3794760"/>
+            <a:ext cx="2953512" cy="1554480"/>
           </a:xfrm>
           <a:prstGeom prst="rect">
             <a:avLst/>
@@ -3061,10 +3074,13 @@
           <a:lstStyle/>
           <a:p>
             <a:pPr indent="0" marL="0">
+              <a:lnSpc>
+                <a:spcPct val="105000"/>
+              </a:lnSpc>
               <a:buNone/>
             </a:pPr>
             <a:r>
-              <a:rPr lang="en-US" sz="1350" dirty="0">
+              <a:rPr lang="en-US" sz="1300" dirty="0">
                 <a:solidFill>
                   <a:srgbClr val="557370"/>
                 </a:solidFill>
@@ -3072,15 +3088,15 @@
                 <a:ea typeface="Calibri" pitchFamily="34" charset="-122"/>
                 <a:cs typeface="Calibri" pitchFamily="34" charset="-120"/>
               </a:rPr>
-              <a:t>156 automated tests pass across the sensor, fog, processor and dashboard modules.</a:t>
-            </a:r>
-            <a:endParaRPr lang="en-US" sz="1350" dirty="0"/>
-          </a:p>
-        </p:txBody>
-      </p:sp>
-      <p:sp>
-        <p:nvSpPr>
-          <p:cNvPr id="16" name="Text 14"/>
+              <a:t>The stored-record count reads 590 and keeps rising as new windows land, so the board is reading live data, not a snapshot.</a:t>
+            </a:r>
+            <a:endParaRPr lang="en-US" sz="1300" dirty="0"/>
+          </a:p>
+        </p:txBody>
+      </p:sp>
+      <p:sp>
+        <p:nvSpPr>
+          <p:cNvPr id="19" name="Text 17"/>
           <p:cNvSpPr/>
           <p:nvPr/>
         </p:nvSpPr>
@@ -3157,24 +3173,24 @@
         </p:nvSpPr>
         <p:spPr>
           <a:xfrm>
-            <a:off x="640080" y="640080"/>
-            <a:ext cx="10972800" cy="640080"/>
-          </a:xfrm>
-          <a:prstGeom prst="rect">
-            <a:avLst/>
-          </a:prstGeom>
-          <a:noFill/>
-          <a:ln/>
-        </p:spPr>
-        <p:txBody>
-          <a:bodyPr wrap="square" rtlCol="0" anchor="ctr"/>
+            <a:off x="640080" y="594360"/>
+            <a:ext cx="10972800" cy="822960"/>
+          </a:xfrm>
+          <a:prstGeom prst="rect">
+            <a:avLst/>
+          </a:prstGeom>
+          <a:noFill/>
+          <a:ln/>
+        </p:spPr>
+        <p:txBody>
+          <a:bodyPr wrap="square" rtlCol="0" anchor="t"/>
           <a:lstStyle/>
           <a:p>
             <a:pPr indent="0" marL="0">
               <a:buNone/>
             </a:pPr>
             <a:r>
-              <a:rPr lang="en-US" sz="3000" b="1" dirty="0">
+              <a:rPr lang="en-US" sz="2800" b="1" dirty="0">
                 <a:solidFill>
                   <a:srgbClr val="FFFFFF"/>
                 </a:solidFill>
@@ -3184,7 +3200,7 @@
               </a:rPr>
               <a:t>Hardest Part — a hidden concurrency race</a:t>
             </a:r>
-            <a:endParaRPr lang="en-US" sz="3000" dirty="0"/>
+            <a:endParaRPr lang="en-US" sz="2800" dirty="0"/>
           </a:p>
         </p:txBody>
       </p:sp>

--- a/ppt/AnjaneyaReddyGurram_24288853_aquaculture-fish-farm.pptx
+++ b/ppt/AnjaneyaReddyGurram_24288853_aquaculture-fish-farm.pptx
@@ -3147,7 +3147,7 @@
     <p:bg>
       <p:bgPr>
         <a:solidFill>
-          <a:srgbClr val="0C2E32"/>
+          <a:srgbClr val="FFFFFF"/>
         </a:solidFill>
       </p:bgPr>
     </p:bg>
@@ -3173,7 +3173,7 @@
         </p:nvSpPr>
         <p:spPr>
           <a:xfrm>
-            <a:off x="640080" y="594360"/>
+            <a:off x="640080" y="502920"/>
             <a:ext cx="10972800" cy="822960"/>
           </a:xfrm>
           <a:prstGeom prst="rect">
@@ -3192,7 +3192,7 @@
             <a:r>
               <a:rPr lang="en-US" sz="2800" b="1" dirty="0">
                 <a:solidFill>
-                  <a:srgbClr val="FFFFFF"/>
+                  <a:srgbClr val="0F2E31"/>
                 </a:solidFill>
                 <a:latin typeface="Cambria" pitchFamily="34" charset="0"/>
                 <a:ea typeface="Cambria" pitchFamily="34" charset="-122"/>
@@ -3221,9 +3221,9 @@
             </a:avLst>
           </a:prstGeom>
           <a:solidFill>
-            <a:srgbClr val="153F42"/>
-          </a:solidFill>
-          <a:ln w="15875">
+            <a:srgbClr val="EDF6F5"/>
+          </a:solidFill>
+          <a:ln w="19050">
             <a:solidFill>
               <a:srgbClr val="E7A93C"/>
             </a:solidFill>
@@ -3300,7 +3300,7 @@
             <a:r>
               <a:rPr lang="en-US" sz="1300" dirty="0">
                 <a:solidFill>
-                  <a:srgbClr val="CDE7E4"/>
+                  <a:srgbClr val="0F2E31"/>
                 </a:solidFill>
                 <a:latin typeface="Calibri" pitchFamily="34" charset="0"/>
                 <a:ea typeface="Calibri" pitchFamily="34" charset="-122"/>
@@ -3329,11 +3329,11 @@
             </a:avLst>
           </a:prstGeom>
           <a:solidFill>
-            <a:srgbClr val="153F42"/>
-          </a:solidFill>
-          <a:ln w="15875">
+            <a:srgbClr val="EDF6F5"/>
+          </a:solidFill>
+          <a:ln w="19050">
             <a:solidFill>
-              <a:srgbClr val="4FB0A6"/>
+              <a:srgbClr val="1E9188"/>
             </a:solidFill>
             <a:prstDash val="solid"/>
           </a:ln>
@@ -3366,7 +3366,7 @@
             <a:r>
               <a:rPr lang="en-US" sz="1900" b="1" dirty="0">
                 <a:solidFill>
-                  <a:srgbClr val="4FB0A6"/>
+                  <a:srgbClr val="1E9188"/>
                 </a:solidFill>
                 <a:latin typeface="Cambria" pitchFamily="34" charset="0"/>
                 <a:ea typeface="Cambria" pitchFamily="34" charset="-122"/>
@@ -3408,7 +3408,7 @@
             <a:r>
               <a:rPr lang="en-US" sz="1300" dirty="0">
                 <a:solidFill>
-                  <a:srgbClr val="CDE7E4"/>
+                  <a:srgbClr val="0F2E31"/>
                 </a:solidFill>
                 <a:latin typeface="Calibri" pitchFamily="34" charset="0"/>
                 <a:ea typeface="Calibri" pitchFamily="34" charset="-122"/>

--- a/ppt/AnjaneyaReddyGurram_24288853_aquaculture-fish-farm.pptx
+++ b/ppt/AnjaneyaReddyGurram_24288853_aquaculture-fish-farm.pptx
@@ -2601,12 +2601,12 @@
         </p:nvSpPr>
         <p:spPr>
           <a:xfrm>
-            <a:off x="640080" y="1874520"/>
-            <a:ext cx="3502152" cy="3657600"/>
+            <a:off x="640080" y="1828800"/>
+            <a:ext cx="10881360" cy="1371600"/>
           </a:xfrm>
           <a:prstGeom prst="roundRect">
             <a:avLst>
-              <a:gd name="adj" fmla="val 2611"/>
+              <a:gd name="adj" fmla="val 6667"/>
             </a:avLst>
           </a:prstGeom>
           <a:solidFill>
@@ -2628,8 +2628,8 @@
         </p:nvSpPr>
         <p:spPr>
           <a:xfrm>
-            <a:off x="914400" y="2194560"/>
-            <a:ext cx="640080" cy="640080"/>
+            <a:off x="960120" y="2203704"/>
+            <a:ext cx="621792" cy="621792"/>
           </a:xfrm>
           <a:prstGeom prst="ellipse">
             <a:avLst/>
@@ -2648,8 +2648,8 @@
         </p:nvSpPr>
         <p:spPr>
           <a:xfrm>
-            <a:off x="914400" y="2194560"/>
-            <a:ext cx="640080" cy="640080"/>
+            <a:off x="960120" y="2203704"/>
+            <a:ext cx="621792" cy="621792"/>
           </a:xfrm>
           <a:prstGeom prst="rect">
             <a:avLst/>
@@ -2665,7 +2665,7 @@
               <a:buNone/>
             </a:pPr>
             <a:r>
-              <a:rPr lang="en-US" sz="2400" b="1" dirty="0">
+              <a:rPr lang="en-US" sz="2200" b="1" dirty="0">
                 <a:solidFill>
                   <a:srgbClr val="FFFFFF"/>
                 </a:solidFill>
@@ -2675,7 +2675,7 @@
               </a:rPr>
               <a:t>1</a:t>
             </a:r>
-            <a:endParaRPr lang="en-US" sz="2400" dirty="0"/>
+            <a:endParaRPr lang="en-US" sz="2200" dirty="0"/>
           </a:p>
         </p:txBody>
       </p:sp>
@@ -2687,8 +2687,8 @@
         </p:nvSpPr>
         <p:spPr>
           <a:xfrm>
-            <a:off x="914400" y="3017520"/>
-            <a:ext cx="2953512" cy="822960"/>
+            <a:off x="1828800" y="2029968"/>
+            <a:ext cx="9418320" cy="411480"/>
           </a:xfrm>
           <a:prstGeom prst="rect">
             <a:avLst/>
@@ -2726,8 +2726,8 @@
         </p:nvSpPr>
         <p:spPr>
           <a:xfrm>
-            <a:off x="914400" y="3794760"/>
-            <a:ext cx="2953512" cy="1554480"/>
+            <a:off x="1828800" y="2450592"/>
+            <a:ext cx="9418320" cy="594360"/>
           </a:xfrm>
           <a:prstGeom prst="rect">
             <a:avLst/>
@@ -2768,12 +2768,12 @@
         </p:nvSpPr>
         <p:spPr>
           <a:xfrm>
-            <a:off x="4416552" y="1874520"/>
-            <a:ext cx="3502152" cy="3657600"/>
+            <a:off x="640080" y="3346704"/>
+            <a:ext cx="10881360" cy="1371600"/>
           </a:xfrm>
           <a:prstGeom prst="roundRect">
             <a:avLst>
-              <a:gd name="adj" fmla="val 2611"/>
+              <a:gd name="adj" fmla="val 6667"/>
             </a:avLst>
           </a:prstGeom>
           <a:solidFill>
@@ -2795,8 +2795,8 @@
         </p:nvSpPr>
         <p:spPr>
           <a:xfrm>
-            <a:off x="4690872" y="2194560"/>
-            <a:ext cx="640080" cy="640080"/>
+            <a:off x="960120" y="3721608"/>
+            <a:ext cx="621792" cy="621792"/>
           </a:xfrm>
           <a:prstGeom prst="ellipse">
             <a:avLst/>
@@ -2815,8 +2815,8 @@
         </p:nvSpPr>
         <p:spPr>
           <a:xfrm>
-            <a:off x="4690872" y="2194560"/>
-            <a:ext cx="640080" cy="640080"/>
+            <a:off x="960120" y="3721608"/>
+            <a:ext cx="621792" cy="621792"/>
           </a:xfrm>
           <a:prstGeom prst="rect">
             <a:avLst/>
@@ -2832,7 +2832,7 @@
               <a:buNone/>
             </a:pPr>
             <a:r>
-              <a:rPr lang="en-US" sz="2400" b="1" dirty="0">
+              <a:rPr lang="en-US" sz="2200" b="1" dirty="0">
                 <a:solidFill>
                   <a:srgbClr val="FFFFFF"/>
                 </a:solidFill>
@@ -2842,7 +2842,7 @@
               </a:rPr>
               <a:t>2</a:t>
             </a:r>
-            <a:endParaRPr lang="en-US" sz="2400" dirty="0"/>
+            <a:endParaRPr lang="en-US" sz="2200" dirty="0"/>
           </a:p>
         </p:txBody>
       </p:sp>
@@ -2854,8 +2854,8 @@
         </p:nvSpPr>
         <p:spPr>
           <a:xfrm>
-            <a:off x="4690872" y="3017520"/>
-            <a:ext cx="2953512" cy="822960"/>
+            <a:off x="1828800" y="3547872"/>
+            <a:ext cx="9418320" cy="411480"/>
           </a:xfrm>
           <a:prstGeom prst="rect">
             <a:avLst/>
@@ -2893,8 +2893,8 @@
         </p:nvSpPr>
         <p:spPr>
           <a:xfrm>
-            <a:off x="4690872" y="3794760"/>
-            <a:ext cx="2953512" cy="1554480"/>
+            <a:off x="1828800" y="3968496"/>
+            <a:ext cx="9418320" cy="594360"/>
           </a:xfrm>
           <a:prstGeom prst="rect">
             <a:avLst/>
@@ -2935,12 +2935,12 @@
         </p:nvSpPr>
         <p:spPr>
           <a:xfrm>
-            <a:off x="8193024" y="1874520"/>
-            <a:ext cx="3502152" cy="3657600"/>
+            <a:off x="640080" y="4864608"/>
+            <a:ext cx="10881360" cy="1371600"/>
           </a:xfrm>
           <a:prstGeom prst="roundRect">
             <a:avLst>
-              <a:gd name="adj" fmla="val 2611"/>
+              <a:gd name="adj" fmla="val 6667"/>
             </a:avLst>
           </a:prstGeom>
           <a:solidFill>
@@ -2962,8 +2962,8 @@
         </p:nvSpPr>
         <p:spPr>
           <a:xfrm>
-            <a:off x="8467344" y="2194560"/>
-            <a:ext cx="640080" cy="640080"/>
+            <a:off x="960120" y="5239512"/>
+            <a:ext cx="621792" cy="621792"/>
           </a:xfrm>
           <a:prstGeom prst="ellipse">
             <a:avLst/>
@@ -2982,8 +2982,8 @@
         </p:nvSpPr>
         <p:spPr>
           <a:xfrm>
-            <a:off x="8467344" y="2194560"/>
-            <a:ext cx="640080" cy="640080"/>
+            <a:off x="960120" y="5239512"/>
+            <a:ext cx="621792" cy="621792"/>
           </a:xfrm>
           <a:prstGeom prst="rect">
             <a:avLst/>
@@ -2999,7 +2999,7 @@
               <a:buNone/>
             </a:pPr>
             <a:r>
-              <a:rPr lang="en-US" sz="2400" b="1" dirty="0">
+              <a:rPr lang="en-US" sz="2200" b="1" dirty="0">
                 <a:solidFill>
                   <a:srgbClr val="FFFFFF"/>
                 </a:solidFill>
@@ -3009,7 +3009,7 @@
               </a:rPr>
               <a:t>3</a:t>
             </a:r>
-            <a:endParaRPr lang="en-US" sz="2400" dirty="0"/>
+            <a:endParaRPr lang="en-US" sz="2200" dirty="0"/>
           </a:p>
         </p:txBody>
       </p:sp>
@@ -3021,8 +3021,8 @@
         </p:nvSpPr>
         <p:spPr>
           <a:xfrm>
-            <a:off x="8467344" y="3017520"/>
-            <a:ext cx="2953512" cy="822960"/>
+            <a:off x="1828800" y="5065776"/>
+            <a:ext cx="9418320" cy="411480"/>
           </a:xfrm>
           <a:prstGeom prst="rect">
             <a:avLst/>
@@ -3060,8 +3060,8 @@
         </p:nvSpPr>
         <p:spPr>
           <a:xfrm>
-            <a:off x="8467344" y="3794760"/>
-            <a:ext cx="2953512" cy="1554480"/>
+            <a:off x="1828800" y="5486400"/>
+            <a:ext cx="9418320" cy="594360"/>
           </a:xfrm>
           <a:prstGeom prst="rect">
             <a:avLst/>
@@ -3089,45 +3089,6 @@
                 <a:cs typeface="Calibri" pitchFamily="34" charset="-120"/>
               </a:rPr>
               <a:t>The stored-record count reads 590 and keeps rising as new windows land, so the board is reading live data, not a snapshot.</a:t>
-            </a:r>
-            <a:endParaRPr lang="en-US" sz="1300" dirty="0"/>
-          </a:p>
-        </p:txBody>
-      </p:sp>
-      <p:sp>
-        <p:nvSpPr>
-          <p:cNvPr id="19" name="Text 17"/>
-          <p:cNvSpPr/>
-          <p:nvPr/>
-        </p:nvSpPr>
-        <p:spPr>
-          <a:xfrm>
-            <a:off x="640080" y="6263640"/>
-            <a:ext cx="10972800" cy="365760"/>
-          </a:xfrm>
-          <a:prstGeom prst="rect">
-            <a:avLst/>
-          </a:prstGeom>
-          <a:noFill/>
-          <a:ln/>
-        </p:spPr>
-        <p:txBody>
-          <a:bodyPr wrap="square" rtlCol="0" anchor="ctr"/>
-          <a:lstStyle/>
-          <a:p>
-            <a:pPr indent="0" marL="0">
-              <a:buNone/>
-            </a:pPr>
-            <a:r>
-              <a:rPr lang="en-US" sz="1300" i="1" dirty="0">
-                <a:solidFill>
-                  <a:srgbClr val="4FB0A6"/>
-                </a:solidFill>
-                <a:latin typeface="Calibri" pitchFamily="34" charset="0"/>
-                <a:ea typeface="Calibri" pitchFamily="34" charset="-122"/>
-                <a:cs typeface="Calibri" pitchFamily="34" charset="-120"/>
-              </a:rPr>
-              <a:t>Switch to the live dashboard here — backup video ready.</a:t>
             </a:r>
             <a:endParaRPr lang="en-US" sz="1300" dirty="0"/>
           </a:p>
@@ -3212,12 +3173,12 @@
         </p:nvSpPr>
         <p:spPr>
           <a:xfrm>
-            <a:off x="731520" y="1920240"/>
-            <a:ext cx="10698480" cy="1965960"/>
+            <a:off x="640080" y="1874520"/>
+            <a:ext cx="4937760" cy="4160520"/>
           </a:xfrm>
           <a:prstGeom prst="roundRect">
             <a:avLst>
-              <a:gd name="adj" fmla="val 4651"/>
+              <a:gd name="adj" fmla="val 2198"/>
             </a:avLst>
           </a:prstGeom>
           <a:solidFill>
@@ -3239,7 +3200,7 @@
         </p:nvSpPr>
         <p:spPr>
           <a:xfrm>
-            <a:off x="1005840" y="2103120"/>
+            <a:off x="960120" y="2103120"/>
             <a:ext cx="3657600" cy="457200"/>
           </a:xfrm>
           <a:prstGeom prst="rect">
@@ -3278,8 +3239,8 @@
         </p:nvSpPr>
         <p:spPr>
           <a:xfrm>
-            <a:off x="1005840" y="2578608"/>
-            <a:ext cx="9966960" cy="1188720"/>
+            <a:off x="960120" y="2651760"/>
+            <a:ext cx="4343400" cy="3200400"/>
           </a:xfrm>
           <a:prstGeom prst="rect">
             <a:avLst/>
@@ -3293,12 +3254,12 @@
           <a:p>
             <a:pPr indent="0" marL="0">
               <a:lnSpc>
-                <a:spcPct val="105000"/>
+                <a:spcPct val="112000"/>
               </a:lnSpc>
               <a:buNone/>
             </a:pPr>
             <a:r>
-              <a:rPr lang="en-US" sz="1300" dirty="0">
+              <a:rPr lang="en-US" sz="1350" dirty="0">
                 <a:solidFill>
                   <a:srgbClr val="0F2E31"/>
                 </a:solidFill>
@@ -3308,7 +3269,7 @@
               </a:rPr>
               <a:t>The fog gateway buffers every reading in one shared in-memory map — ten streams writing at once while a ten-second flush retires it, deliberately with no lock. A 64-thread stress test failed once and readings silently vanished: one field in the accumulator was still mutable, so two simultaneous merges could each read it before either wrote back. Nothing crashed; data just disappeared.</a:t>
             </a:r>
-            <a:endParaRPr lang="en-US" sz="1300" dirty="0"/>
+            <a:endParaRPr lang="en-US" sz="1350" dirty="0"/>
           </a:p>
         </p:txBody>
       </p:sp>
@@ -3320,12 +3281,12 @@
         </p:nvSpPr>
         <p:spPr>
           <a:xfrm>
-            <a:off x="731520" y="4041648"/>
-            <a:ext cx="10698480" cy="1965960"/>
+            <a:off x="6611112" y="1874520"/>
+            <a:ext cx="4937760" cy="4160520"/>
           </a:xfrm>
           <a:prstGeom prst="roundRect">
             <a:avLst>
-              <a:gd name="adj" fmla="val 4651"/>
+              <a:gd name="adj" fmla="val 2198"/>
             </a:avLst>
           </a:prstGeom>
           <a:solidFill>
@@ -3347,7 +3308,7 @@
         </p:nvSpPr>
         <p:spPr>
           <a:xfrm>
-            <a:off x="1005840" y="4224528"/>
+            <a:off x="6931152" y="2103120"/>
             <a:ext cx="3657600" cy="457200"/>
           </a:xfrm>
           <a:prstGeom prst="rect">
@@ -3386,8 +3347,8 @@
         </p:nvSpPr>
         <p:spPr>
           <a:xfrm>
-            <a:off x="1005840" y="4700016"/>
-            <a:ext cx="9966960" cy="1188720"/>
+            <a:off x="6931152" y="2651760"/>
+            <a:ext cx="4343400" cy="3200400"/>
           </a:xfrm>
           <a:prstGeom prst="rect">
             <a:avLst/>
@@ -3401,12 +3362,12 @@
           <a:p>
             <a:pPr indent="0" marL="0">
               <a:lnSpc>
-                <a:spcPct val="105000"/>
+                <a:spcPct val="112000"/>
               </a:lnSpc>
               <a:buNone/>
             </a:pPr>
             <a:r>
-              <a:rPr lang="en-US" sz="1300" dirty="0">
+              <a:rPr lang="en-US" sz="1350" dirty="0">
                 <a:solidFill>
                   <a:srgbClr val="0F2E31"/>
                 </a:solidFill>
@@ -3416,9 +3377,29 @@
               </a:rPr>
               <a:t>Make the accumulator fully immutable, so every combine returns a fresh value instead of editing one in place — the map's atomic merge is only guaranteed when the merge function has no side effects, a narrower promise than "thread-safe" sounds. The suite replays the 64-thread collision, and after the fix not one reading is lost.</a:t>
             </a:r>
-            <a:endParaRPr lang="en-US" sz="1300" dirty="0"/>
-          </a:p>
-        </p:txBody>
+            <a:endParaRPr lang="en-US" sz="1350" dirty="0"/>
+          </a:p>
+        </p:txBody>
+      </p:sp>
+      <p:sp>
+        <p:nvSpPr>
+          <p:cNvPr id="9" name="Shape 7"/>
+          <p:cNvSpPr/>
+          <p:nvPr/>
+        </p:nvSpPr>
+        <p:spPr>
+          <a:xfrm>
+            <a:off x="5669280" y="3703320"/>
+            <a:ext cx="841248" cy="512064"/>
+          </a:xfrm>
+          <a:prstGeom prst="rightArrow">
+            <a:avLst/>
+          </a:prstGeom>
+          <a:solidFill>
+            <a:srgbClr val="0F6E6A"/>
+          </a:solidFill>
+          <a:ln/>
+        </p:spPr>
       </p:sp>
     </p:spTree>
   </p:cSld>

--- a/ppt/AnjaneyaReddyGurram_24288853_aquaculture-fish-farm.pptx
+++ b/ppt/AnjaneyaReddyGurram_24288853_aquaculture-fish-farm.pptx
@@ -1279,14 +1279,9 @@
             </a:avLst>
           </a:prstGeom>
           <a:solidFill>
-            <a:srgbClr val="123B3E"/>
-          </a:solidFill>
-          <a:ln w="12700">
-            <a:solidFill>
-              <a:srgbClr val="E7A93C"/>
-            </a:solidFill>
-            <a:prstDash val="solid"/>
-          </a:ln>
+            <a:srgbClr val="1E9188"/>
+          </a:solidFill>
+          <a:ln/>
         </p:spPr>
       </p:sp>
       <p:sp>
@@ -1316,7 +1311,7 @@
             <a:r>
               <a:rPr lang="en-US" sz="1350" b="1" dirty="0">
                 <a:solidFill>
-                  <a:srgbClr val="E7A93C"/>
+                  <a:srgbClr val="0C2E32"/>
                 </a:solidFill>
                 <a:latin typeface="Calibri" pitchFamily="34" charset="0"/>
                 <a:ea typeface="Calibri" pitchFamily="34" charset="-122"/>
@@ -1345,14 +1340,9 @@
             </a:avLst>
           </a:prstGeom>
           <a:solidFill>
-            <a:srgbClr val="123B3E"/>
-          </a:solidFill>
-          <a:ln w="12700">
-            <a:solidFill>
-              <a:srgbClr val="E7A93C"/>
-            </a:solidFill>
-            <a:prstDash val="solid"/>
-          </a:ln>
+            <a:srgbClr val="1E9188"/>
+          </a:solidFill>
+          <a:ln/>
         </p:spPr>
       </p:sp>
       <p:sp>
@@ -1382,7 +1372,7 @@
             <a:r>
               <a:rPr lang="en-US" sz="1350" b="1" dirty="0">
                 <a:solidFill>
-                  <a:srgbClr val="E7A93C"/>
+                  <a:srgbClr val="0C2E32"/>
                 </a:solidFill>
                 <a:latin typeface="Calibri" pitchFamily="34" charset="0"/>
                 <a:ea typeface="Calibri" pitchFamily="34" charset="-122"/>
@@ -1411,14 +1401,9 @@
             </a:avLst>
           </a:prstGeom>
           <a:solidFill>
-            <a:srgbClr val="123B3E"/>
-          </a:solidFill>
-          <a:ln w="12700">
-            <a:solidFill>
-              <a:srgbClr val="E7A93C"/>
-            </a:solidFill>
-            <a:prstDash val="solid"/>
-          </a:ln>
+            <a:srgbClr val="1E9188"/>
+          </a:solidFill>
+          <a:ln/>
         </p:spPr>
       </p:sp>
       <p:sp>
@@ -1448,7 +1433,7 @@
             <a:r>
               <a:rPr lang="en-US" sz="1350" b="1" dirty="0">
                 <a:solidFill>
-                  <a:srgbClr val="E7A93C"/>
+                  <a:srgbClr val="0C2E32"/>
                 </a:solidFill>
                 <a:latin typeface="Calibri" pitchFamily="34" charset="0"/>
                 <a:ea typeface="Calibri" pitchFamily="34" charset="-122"/>
@@ -1484,17 +1469,6 @@
             <a:pPr algn="ctr" indent="0" marL="0">
               <a:buNone/>
             </a:pPr>
-            <a:r>
-              <a:rPr lang="en-US" sz="1300" dirty="0">
-                <a:solidFill>
-                  <a:srgbClr val="557370"/>
-                </a:solidFill>
-                <a:latin typeface="Calibri" pitchFamily="34" charset="0"/>
-                <a:ea typeface="Calibri" pitchFamily="34" charset="-122"/>
-                <a:cs typeface="Calibri" pitchFamily="34" charset="-120"/>
-              </a:rPr>
-              <a:t>Fog &amp; Edge Computing (H9FECC)   ·   deployed live on AWS</a:t>
-            </a:r>
             <a:endParaRPr lang="en-US" sz="1300" dirty="0"/>
           </a:p>
         </p:txBody>

--- a/ppt/AnjaneyaReddyGurram_24288853_aquaculture-fish-farm.pptx
+++ b/ppt/AnjaneyaReddyGurram_24288853_aquaculture-fish-farm.pptx
@@ -1124,7 +1124,7 @@
     <p:bg>
       <p:bgPr>
         <a:solidFill>
-          <a:srgbClr val="0C2E32"/>
+          <a:srgbClr val="12333A"/>
         </a:solidFill>
       </p:bgPr>
     </p:bg>
@@ -1144,92 +1144,125 @@
       </p:grpSpPr>
       <p:sp>
         <p:nvSpPr>
-          <p:cNvPr id="2" name="Text 0"/>
-          <p:cNvSpPr/>
-          <p:nvPr/>
-        </p:nvSpPr>
-        <p:spPr>
-          <a:xfrm>
-            <a:off x="548640" y="1051560"/>
-            <a:ext cx="11064240" cy="1188720"/>
-          </a:xfrm>
-          <a:prstGeom prst="rect">
-            <a:avLst/>
-          </a:prstGeom>
-          <a:noFill/>
-          <a:ln/>
-        </p:spPr>
-        <p:txBody>
-          <a:bodyPr wrap="square" rtlCol="0" anchor="ctr"/>
-          <a:lstStyle/>
-          <a:p>
-            <a:pPr algn="ctr" indent="0" marL="0">
+          <p:cNvPr id="2" name="Shape 0"/>
+          <p:cNvSpPr/>
+          <p:nvPr/>
+        </p:nvSpPr>
+        <p:spPr>
+          <a:xfrm>
+            <a:off x="9722815" y="-274320"/>
+            <a:ext cx="2743200" cy="2743200"/>
+          </a:xfrm>
+          <a:prstGeom prst="ellipse">
+            <a:avLst/>
+          </a:prstGeom>
+          <a:ln w="12700">
+            <a:solidFill>
+              <a:srgbClr val="2FB6A8"/>
+            </a:solidFill>
+            <a:prstDash val="solid"/>
+          </a:ln>
+        </p:spPr>
+      </p:sp>
+      <p:sp>
+        <p:nvSpPr>
+          <p:cNvPr id="3" name="Shape 1"/>
+          <p:cNvSpPr/>
+          <p:nvPr/>
+        </p:nvSpPr>
+        <p:spPr>
+          <a:xfrm>
+            <a:off x="10180015" y="182880"/>
+            <a:ext cx="1828800" cy="1828800"/>
+          </a:xfrm>
+          <a:prstGeom prst="ellipse">
+            <a:avLst/>
+          </a:prstGeom>
+          <a:ln w="12700">
+            <a:solidFill>
+              <a:srgbClr val="2FB6A8"/>
+            </a:solidFill>
+            <a:prstDash val="solid"/>
+          </a:ln>
+        </p:spPr>
+      </p:sp>
+      <p:sp>
+        <p:nvSpPr>
+          <p:cNvPr id="4" name="Shape 2"/>
+          <p:cNvSpPr/>
+          <p:nvPr/>
+        </p:nvSpPr>
+        <p:spPr>
+          <a:xfrm>
+            <a:off x="10637215" y="640080"/>
+            <a:ext cx="914400" cy="914400"/>
+          </a:xfrm>
+          <a:prstGeom prst="ellipse">
+            <a:avLst/>
+          </a:prstGeom>
+          <a:solidFill>
+            <a:srgbClr val="2FB6A8"/>
+          </a:solidFill>
+          <a:ln w="12700">
+            <a:solidFill>
+              <a:srgbClr val="2FB6A8"/>
+            </a:solidFill>
+            <a:prstDash val="solid"/>
+          </a:ln>
+        </p:spPr>
+      </p:sp>
+      <p:sp>
+        <p:nvSpPr>
+          <p:cNvPr id="5" name="Text 3"/>
+          <p:cNvSpPr/>
+          <p:nvPr/>
+        </p:nvSpPr>
+        <p:spPr>
+          <a:xfrm>
+            <a:off x="758952" y="1645920"/>
+            <a:ext cx="10637215" cy="1645920"/>
+          </a:xfrm>
+          <a:prstGeom prst="rect">
+            <a:avLst/>
+          </a:prstGeom>
+          <a:noFill/>
+          <a:ln/>
+        </p:spPr>
+        <p:txBody>
+          <a:bodyPr wrap="square" rtlCol="0" anchor="t"/>
+          <a:lstStyle/>
+          <a:p>
+            <a:pPr indent="0" marL="0">
+              <a:lnSpc>
+                <a:spcPct val="98000"/>
+              </a:lnSpc>
               <a:buNone/>
             </a:pPr>
             <a:r>
               <a:rPr lang="en-US" sz="3800" b="1" dirty="0">
                 <a:solidFill>
-                  <a:srgbClr val="FFFFFF"/>
-                </a:solidFill>
-                <a:latin typeface="Cambria" pitchFamily="34" charset="0"/>
-                <a:ea typeface="Cambria" pitchFamily="34" charset="-122"/>
-                <a:cs typeface="Cambria" pitchFamily="34" charset="-120"/>
-              </a:rPr>
-              <a:t>Aquaculture Fish Farm Water Quality</a:t>
-            </a:r>
-            <a:endParaRPr lang="en-US" sz="3800" dirty="0"/>
-          </a:p>
-        </p:txBody>
-      </p:sp>
-      <p:sp>
-        <p:nvSpPr>
-          <p:cNvPr id="3" name="Text 1"/>
-          <p:cNvSpPr/>
-          <p:nvPr/>
-        </p:nvSpPr>
-        <p:spPr>
-          <a:xfrm>
-            <a:off x="548640" y="2286000"/>
-            <a:ext cx="11064240" cy="365760"/>
-          </a:xfrm>
-          <a:prstGeom prst="rect">
-            <a:avLst/>
-          </a:prstGeom>
-          <a:noFill/>
-          <a:ln/>
-        </p:spPr>
-        <p:txBody>
-          <a:bodyPr wrap="square" rtlCol="0" anchor="ctr"/>
-          <a:lstStyle/>
-          <a:p>
-            <a:pPr algn="ctr" indent="0" marL="0">
-              <a:buNone/>
-            </a:pPr>
-            <a:r>
-              <a:rPr lang="en-US" sz="1600" dirty="0">
-                <a:solidFill>
-                  <a:srgbClr val="4FB0A6"/>
+                  <a:srgbClr val="EDF3EF"/>
                 </a:solidFill>
                 <a:latin typeface="Calibri" pitchFamily="34" charset="0"/>
                 <a:ea typeface="Calibri" pitchFamily="34" charset="-122"/>
                 <a:cs typeface="Calibri" pitchFamily="34" charset="-120"/>
               </a:rPr>
-              <a:t>Anjaneya Reddy Gurram   ·   24288853</a:t>
-            </a:r>
-            <a:endParaRPr lang="en-US" sz="1600" dirty="0"/>
-          </a:p>
-        </p:txBody>
-      </p:sp>
-      <p:sp>
-        <p:nvSpPr>
-          <p:cNvPr id="4" name="Text 2"/>
-          <p:cNvSpPr/>
-          <p:nvPr/>
-        </p:nvSpPr>
-        <p:spPr>
-          <a:xfrm>
-            <a:off x="1463040" y="2926080"/>
-            <a:ext cx="9235440" cy="1371600"/>
+              <a:t>Aquaculture Fish Farm Water Quality</a:t>
+            </a:r>
+            <a:endParaRPr lang="en-US" sz="3800" dirty="0"/>
+          </a:p>
+        </p:txBody>
+      </p:sp>
+      <p:sp>
+        <p:nvSpPr>
+          <p:cNvPr id="6" name="Text 4"/>
+          <p:cNvSpPr/>
+          <p:nvPr/>
+        </p:nvSpPr>
+        <p:spPr>
+          <a:xfrm>
+            <a:off x="777240" y="3337560"/>
+            <a:ext cx="10637215" cy="365760"/>
           </a:xfrm>
           <a:prstGeom prst="rect">
             <a:avLst/>
@@ -1241,235 +1274,63 @@
           <a:bodyPr wrap="square" rtlCol="0" anchor="ctr"/>
           <a:lstStyle/>
           <a:p>
-            <a:pPr algn="ctr" indent="0" marL="0">
-              <a:lnSpc>
-                <a:spcPct val="110000"/>
-              </a:lnSpc>
-              <a:buNone/>
-            </a:pPr>
-            <a:r>
-              <a:rPr lang="en-US" sz="2000" dirty="0">
-                <a:solidFill>
-                  <a:srgbClr val="CDE7E4"/>
+            <a:pPr indent="0" marL="0">
+              <a:buNone/>
+            </a:pPr>
+            <a:r>
+              <a:rPr lang="en-US" sz="1450" dirty="0">
+                <a:solidFill>
+                  <a:srgbClr val="8B98A6"/>
                 </a:solidFill>
                 <a:latin typeface="Calibri" pitchFamily="34" charset="0"/>
                 <a:ea typeface="Calibri" pitchFamily="34" charset="-122"/>
                 <a:cs typeface="Calibri" pitchFamily="34" charset="-120"/>
               </a:rPr>
-              <a:t>A warm, still night can crash dissolved oxygen and push ammonia up over a few hours — entirely inside the gap between two once-a-day manual water checks.</a:t>
-            </a:r>
-            <a:endParaRPr lang="en-US" sz="2000" dirty="0"/>
-          </a:p>
-        </p:txBody>
-      </p:sp>
-      <p:sp>
-        <p:nvSpPr>
-          <p:cNvPr id="5" name="Shape 3"/>
-          <p:cNvSpPr/>
-          <p:nvPr/>
-        </p:nvSpPr>
-        <p:spPr>
-          <a:xfrm>
-            <a:off x="1889608" y="4526280"/>
-            <a:ext cx="2651760" cy="566928"/>
-          </a:xfrm>
-          <a:prstGeom prst="roundRect">
-            <a:avLst>
-              <a:gd name="adj" fmla="val 50000"/>
-            </a:avLst>
-          </a:prstGeom>
-          <a:solidFill>
-            <a:srgbClr val="1E9188"/>
-          </a:solidFill>
-          <a:ln/>
-        </p:spPr>
-      </p:sp>
-      <p:sp>
-        <p:nvSpPr>
-          <p:cNvPr id="6" name="Text 4"/>
-          <p:cNvSpPr/>
-          <p:nvPr/>
-        </p:nvSpPr>
-        <p:spPr>
-          <a:xfrm>
-            <a:off x="1889608" y="4526280"/>
-            <a:ext cx="2651760" cy="566928"/>
-          </a:xfrm>
-          <a:prstGeom prst="rect">
-            <a:avLst/>
-          </a:prstGeom>
-          <a:noFill/>
-          <a:ln/>
-        </p:spPr>
-        <p:txBody>
-          <a:bodyPr wrap="square" lIns="0" tIns="0" rIns="0" bIns="0" rtlCol="0" anchor="ctr"/>
-          <a:lstStyle/>
-          <a:p>
-            <a:pPr algn="ctr" indent="0" marL="0">
-              <a:buNone/>
-            </a:pPr>
-            <a:r>
-              <a:rPr lang="en-US" sz="1350" b="1" dirty="0">
-                <a:solidFill>
-                  <a:srgbClr val="0C2E32"/>
+              <a:t>Anjaneya Reddy Gurram   ·   24288853</a:t>
+            </a:r>
+            <a:endParaRPr lang="en-US" sz="1450" dirty="0"/>
+          </a:p>
+        </p:txBody>
+      </p:sp>
+      <p:sp>
+        <p:nvSpPr>
+          <p:cNvPr id="7" name="Text 5"/>
+          <p:cNvSpPr/>
+          <p:nvPr/>
+        </p:nvSpPr>
+        <p:spPr>
+          <a:xfrm>
+            <a:off x="777240" y="3931920"/>
+            <a:ext cx="8138160" cy="1325880"/>
+          </a:xfrm>
+          <a:prstGeom prst="rect">
+            <a:avLst/>
+          </a:prstGeom>
+          <a:noFill/>
+          <a:ln/>
+        </p:spPr>
+        <p:txBody>
+          <a:bodyPr wrap="square" rtlCol="0" anchor="t"/>
+          <a:lstStyle/>
+          <a:p>
+            <a:pPr indent="0" marL="0">
+              <a:lnSpc>
+                <a:spcPct val="130000"/>
+              </a:lnSpc>
+              <a:buNone/>
+            </a:pPr>
+            <a:r>
+              <a:rPr lang="en-US" sz="1400" dirty="0">
+                <a:solidFill>
+                  <a:srgbClr val="EDF3EF"/>
                 </a:solidFill>
                 <a:latin typeface="Calibri" pitchFamily="34" charset="0"/>
                 <a:ea typeface="Calibri" pitchFamily="34" charset="-122"/>
                 <a:cs typeface="Calibri" pitchFamily="34" charset="-120"/>
               </a:rPr>
-              <a:t>1–2 checks / day today</a:t>
-            </a:r>
-            <a:endParaRPr lang="en-US" sz="1350" dirty="0"/>
-          </a:p>
-        </p:txBody>
-      </p:sp>
-      <p:sp>
-        <p:nvSpPr>
-          <p:cNvPr id="7" name="Shape 5"/>
-          <p:cNvSpPr/>
-          <p:nvPr/>
-        </p:nvSpPr>
-        <p:spPr>
-          <a:xfrm>
-            <a:off x="4769968" y="4526280"/>
-            <a:ext cx="2651760" cy="566928"/>
-          </a:xfrm>
-          <a:prstGeom prst="roundRect">
-            <a:avLst>
-              <a:gd name="adj" fmla="val 50000"/>
-            </a:avLst>
-          </a:prstGeom>
-          <a:solidFill>
-            <a:srgbClr val="1E9188"/>
-          </a:solidFill>
-          <a:ln/>
-        </p:spPr>
-      </p:sp>
-      <p:sp>
-        <p:nvSpPr>
-          <p:cNvPr id="8" name="Text 6"/>
-          <p:cNvSpPr/>
-          <p:nvPr/>
-        </p:nvSpPr>
-        <p:spPr>
-          <a:xfrm>
-            <a:off x="4769968" y="4526280"/>
-            <a:ext cx="2651760" cy="566928"/>
-          </a:xfrm>
-          <a:prstGeom prst="rect">
-            <a:avLst/>
-          </a:prstGeom>
-          <a:noFill/>
-          <a:ln/>
-        </p:spPr>
-        <p:txBody>
-          <a:bodyPr wrap="square" lIns="0" tIns="0" rIns="0" bIns="0" rtlCol="0" anchor="ctr"/>
-          <a:lstStyle/>
-          <a:p>
-            <a:pPr algn="ctr" indent="0" marL="0">
-              <a:buNone/>
-            </a:pPr>
-            <a:r>
-              <a:rPr lang="en-US" sz="1350" b="1" dirty="0">
-                <a:solidFill>
-                  <a:srgbClr val="0C2E32"/>
-                </a:solidFill>
-                <a:latin typeface="Calibri" pitchFamily="34" charset="0"/>
-                <a:ea typeface="Calibri" pitchFamily="34" charset="-122"/>
-                <a:cs typeface="Calibri" pitchFamily="34" charset="-120"/>
-              </a:rPr>
-              <a:t>10 sensors · 2 ponds</a:t>
-            </a:r>
-            <a:endParaRPr lang="en-US" sz="1350" dirty="0"/>
-          </a:p>
-        </p:txBody>
-      </p:sp>
-      <p:sp>
-        <p:nvSpPr>
-          <p:cNvPr id="9" name="Shape 7"/>
-          <p:cNvSpPr/>
-          <p:nvPr/>
-        </p:nvSpPr>
-        <p:spPr>
-          <a:xfrm>
-            <a:off x="7650328" y="4526280"/>
-            <a:ext cx="2651760" cy="566928"/>
-          </a:xfrm>
-          <a:prstGeom prst="roundRect">
-            <a:avLst>
-              <a:gd name="adj" fmla="val 50000"/>
-            </a:avLst>
-          </a:prstGeom>
-          <a:solidFill>
-            <a:srgbClr val="1E9188"/>
-          </a:solidFill>
-          <a:ln/>
-        </p:spPr>
-      </p:sp>
-      <p:sp>
-        <p:nvSpPr>
-          <p:cNvPr id="10" name="Text 8"/>
-          <p:cNvSpPr/>
-          <p:nvPr/>
-        </p:nvSpPr>
-        <p:spPr>
-          <a:xfrm>
-            <a:off x="7650328" y="4526280"/>
-            <a:ext cx="2651760" cy="566928"/>
-          </a:xfrm>
-          <a:prstGeom prst="rect">
-            <a:avLst/>
-          </a:prstGeom>
-          <a:noFill/>
-          <a:ln/>
-        </p:spPr>
-        <p:txBody>
-          <a:bodyPr wrap="square" lIns="0" tIns="0" rIns="0" bIns="0" rtlCol="0" anchor="ctr"/>
-          <a:lstStyle/>
-          <a:p>
-            <a:pPr algn="ctr" indent="0" marL="0">
-              <a:buNone/>
-            </a:pPr>
-            <a:r>
-              <a:rPr lang="en-US" sz="1350" b="1" dirty="0">
-                <a:solidFill>
-                  <a:srgbClr val="0C2E32"/>
-                </a:solidFill>
-                <a:latin typeface="Calibri" pitchFamily="34" charset="0"/>
-                <a:ea typeface="Calibri" pitchFamily="34" charset="-122"/>
-                <a:cs typeface="Calibri" pitchFamily="34" charset="-120"/>
-              </a:rPr>
-              <a:t>10 s edge rules</a:t>
-            </a:r>
-            <a:endParaRPr lang="en-US" sz="1350" dirty="0"/>
-          </a:p>
-        </p:txBody>
-      </p:sp>
-      <p:sp>
-        <p:nvSpPr>
-          <p:cNvPr id="11" name="Text 9"/>
-          <p:cNvSpPr/>
-          <p:nvPr/>
-        </p:nvSpPr>
-        <p:spPr>
-          <a:xfrm>
-            <a:off x="548640" y="6126480"/>
-            <a:ext cx="11064240" cy="365760"/>
-          </a:xfrm>
-          <a:prstGeom prst="rect">
-            <a:avLst/>
-          </a:prstGeom>
-          <a:noFill/>
-          <a:ln/>
-        </p:spPr>
-        <p:txBody>
-          <a:bodyPr wrap="square" rtlCol="0" anchor="ctr"/>
-          <a:lstStyle/>
-          <a:p>
-            <a:pPr algn="ctr" indent="0" marL="0">
-              <a:buNone/>
-            </a:pPr>
-            <a:endParaRPr lang="en-US" sz="1300" dirty="0"/>
+              <a:t>A warm, still night can crash dissolved oxygen and push ammonia up over a few hours — entirely inside the gap between two once-a-day manual water checks.</a:t>
+            </a:r>
+            <a:endParaRPr lang="en-US" sz="1400" dirty="0"/>
           </a:p>
         </p:txBody>
       </p:sp>
@@ -1487,7 +1348,7 @@
     <p:bg>
       <p:bgPr>
         <a:solidFill>
-          <a:srgbClr val="FFFFFF"/>
+          <a:srgbClr val="12333A"/>
         </a:solidFill>
       </p:bgPr>
     </p:bg>
@@ -1507,65 +1368,21 @@
       </p:grpSpPr>
       <p:sp>
         <p:nvSpPr>
-          <p:cNvPr id="2" name="Text 0"/>
-          <p:cNvSpPr/>
-          <p:nvPr/>
-        </p:nvSpPr>
-        <p:spPr>
-          <a:xfrm>
-            <a:off x="640080" y="457200"/>
-            <a:ext cx="10972800" cy="640080"/>
-          </a:xfrm>
-          <a:prstGeom prst="rect">
-            <a:avLst/>
-          </a:prstGeom>
-          <a:noFill/>
-          <a:ln/>
-        </p:spPr>
-        <p:txBody>
-          <a:bodyPr wrap="square" rtlCol="0" anchor="ctr"/>
-          <a:lstStyle/>
-          <a:p>
-            <a:pPr indent="0" marL="0">
-              <a:buNone/>
-            </a:pPr>
-            <a:r>
-              <a:rPr lang="en-US" sz="3000" b="1" dirty="0">
-                <a:solidFill>
-                  <a:srgbClr val="0F2E31"/>
-                </a:solidFill>
-                <a:latin typeface="Cambria" pitchFamily="34" charset="0"/>
-                <a:ea typeface="Cambria" pitchFamily="34" charset="-122"/>
-                <a:cs typeface="Cambria" pitchFamily="34" charset="-120"/>
-              </a:rPr>
-              <a:t>What I Built — Pond to Cloud</a:t>
-            </a:r>
-            <a:endParaRPr lang="en-US" sz="3000" dirty="0"/>
-          </a:p>
-        </p:txBody>
-      </p:sp>
-      <p:sp>
-        <p:nvSpPr>
-          <p:cNvPr id="3" name="Shape 1"/>
-          <p:cNvSpPr/>
-          <p:nvPr/>
-        </p:nvSpPr>
-        <p:spPr>
-          <a:xfrm>
-            <a:off x="640080" y="1874520"/>
-            <a:ext cx="2286000" cy="1280160"/>
-          </a:xfrm>
-          <a:prstGeom prst="roundRect">
-            <a:avLst>
-              <a:gd name="adj" fmla="val 7143"/>
-            </a:avLst>
-          </a:prstGeom>
-          <a:solidFill>
-            <a:srgbClr val="EDF6F5"/>
-          </a:solidFill>
-          <a:ln w="19050">
+          <p:cNvPr id="2" name="Shape 0"/>
+          <p:cNvSpPr/>
+          <p:nvPr/>
+        </p:nvSpPr>
+        <p:spPr>
+          <a:xfrm>
+            <a:off x="9722815" y="-274320"/>
+            <a:ext cx="2743200" cy="2743200"/>
+          </a:xfrm>
+          <a:prstGeom prst="ellipse">
+            <a:avLst/>
+          </a:prstGeom>
+          <a:ln w="12700">
             <a:solidFill>
-              <a:srgbClr val="4FB0A6"/>
+              <a:srgbClr val="2FB6A8"/>
             </a:solidFill>
             <a:prstDash val="solid"/>
           </a:ln>
@@ -1573,22 +1390,49 @@
       </p:sp>
       <p:sp>
         <p:nvSpPr>
+          <p:cNvPr id="3" name="Shape 1"/>
+          <p:cNvSpPr/>
+          <p:nvPr/>
+        </p:nvSpPr>
+        <p:spPr>
+          <a:xfrm>
+            <a:off x="10180015" y="182880"/>
+            <a:ext cx="1828800" cy="1828800"/>
+          </a:xfrm>
+          <a:prstGeom prst="ellipse">
+            <a:avLst/>
+          </a:prstGeom>
+          <a:ln w="12700">
+            <a:solidFill>
+              <a:srgbClr val="2FB6A8"/>
+            </a:solidFill>
+            <a:prstDash val="solid"/>
+          </a:ln>
+        </p:spPr>
+      </p:sp>
+      <p:sp>
+        <p:nvSpPr>
           <p:cNvPr id="4" name="Shape 2"/>
           <p:cNvSpPr/>
           <p:nvPr/>
         </p:nvSpPr>
         <p:spPr>
           <a:xfrm>
-            <a:off x="1691640" y="2039112"/>
-            <a:ext cx="182880" cy="182880"/>
+            <a:off x="10637215" y="640080"/>
+            <a:ext cx="914400" cy="914400"/>
           </a:xfrm>
           <a:prstGeom prst="ellipse">
             <a:avLst/>
           </a:prstGeom>
           <a:solidFill>
-            <a:srgbClr val="4FB0A6"/>
-          </a:solidFill>
-          <a:ln/>
+            <a:srgbClr val="2FB6A8"/>
+          </a:solidFill>
+          <a:ln w="12700">
+            <a:solidFill>
+              <a:srgbClr val="2FB6A8"/>
+            </a:solidFill>
+            <a:prstDash val="solid"/>
+          </a:ln>
         </p:spPr>
       </p:sp>
       <p:sp>
@@ -1599,8 +1443,8 @@
         </p:nvSpPr>
         <p:spPr>
           <a:xfrm>
-            <a:off x="612648" y="2258568"/>
-            <a:ext cx="2340864" cy="365760"/>
+            <a:off x="777240" y="731520"/>
+            <a:ext cx="914400" cy="640080"/>
           </a:xfrm>
           <a:prstGeom prst="rect">
             <a:avLst/>
@@ -1612,21 +1456,21 @@
           <a:bodyPr wrap="square" lIns="0" tIns="0" rIns="0" bIns="0" rtlCol="0" anchor="ctr"/>
           <a:lstStyle/>
           <a:p>
-            <a:pPr algn="ctr" indent="0" marL="0">
-              <a:buNone/>
-            </a:pPr>
-            <a:r>
-              <a:rPr lang="en-US" sz="1450" b="1" dirty="0">
-                <a:solidFill>
-                  <a:srgbClr val="0F2E31"/>
+            <a:pPr indent="0" marL="0">
+              <a:buNone/>
+            </a:pPr>
+            <a:r>
+              <a:rPr lang="en-US" sz="3000" b="1" dirty="0">
+                <a:solidFill>
+                  <a:srgbClr val="2FB6A8"/>
                 </a:solidFill>
                 <a:latin typeface="Calibri" pitchFamily="34" charset="0"/>
                 <a:ea typeface="Calibri" pitchFamily="34" charset="-122"/>
                 <a:cs typeface="Calibri" pitchFamily="34" charset="-120"/>
               </a:rPr>
-              <a:t>Pond sensors</a:t>
-            </a:r>
-            <a:endParaRPr lang="en-US" sz="1450" dirty="0"/>
+              <a:t>01</a:t>
+            </a:r>
+            <a:endParaRPr lang="en-US" sz="3000" dirty="0"/>
           </a:p>
         </p:txBody>
       </p:sp>
@@ -1638,61 +1482,75 @@
         </p:nvSpPr>
         <p:spPr>
           <a:xfrm>
-            <a:off x="640080" y="2606040"/>
-            <a:ext cx="2286000" cy="411480"/>
-          </a:xfrm>
-          <a:prstGeom prst="rect">
-            <a:avLst/>
-          </a:prstGeom>
-          <a:noFill/>
-          <a:ln/>
-        </p:spPr>
-        <p:txBody>
-          <a:bodyPr wrap="square" lIns="0" tIns="0" rIns="0" bIns="0" rtlCol="0" anchor="t"/>
-          <a:lstStyle/>
-          <a:p>
-            <a:pPr algn="ctr" indent="0" marL="0">
-              <a:buNone/>
-            </a:pPr>
-            <a:r>
-              <a:rPr lang="en-US" sz="1050" dirty="0">
-                <a:solidFill>
-                  <a:srgbClr val="557370"/>
+            <a:off x="1645920" y="905256"/>
+            <a:ext cx="9768535" cy="274320"/>
+          </a:xfrm>
+          <a:prstGeom prst="rect">
+            <a:avLst/>
+          </a:prstGeom>
+          <a:noFill/>
+          <a:ln/>
+        </p:spPr>
+        <p:txBody>
+          <a:bodyPr wrap="square" lIns="0" tIns="0" rIns="0" bIns="0" rtlCol="0" anchor="ctr"/>
+          <a:lstStyle/>
+          <a:p>
+            <a:pPr indent="0" marL="0">
+              <a:buNone/>
+            </a:pPr>
+            <a:r>
+              <a:rPr lang="en-US" sz="1100" b="1" spc="200" kern="0" dirty="0">
+                <a:solidFill>
+                  <a:srgbClr val="8B98A6"/>
                 </a:solidFill>
                 <a:latin typeface="Calibri" pitchFamily="34" charset="0"/>
                 <a:ea typeface="Calibri" pitchFamily="34" charset="-122"/>
                 <a:cs typeface="Calibri" pitchFamily="34" charset="-120"/>
               </a:rPr>
-              <a:t>10 · 2 ponds · 5 metrics</a:t>
-            </a:r>
-            <a:endParaRPr lang="en-US" sz="1050" dirty="0"/>
-          </a:p>
-        </p:txBody>
-      </p:sp>
-      <p:sp>
-        <p:nvSpPr>
-          <p:cNvPr id="7" name="Shape 5"/>
-          <p:cNvSpPr/>
-          <p:nvPr/>
-        </p:nvSpPr>
-        <p:spPr>
-          <a:xfrm>
-            <a:off x="2944368" y="2514600"/>
-            <a:ext cx="1975104" cy="0"/>
-          </a:xfrm>
-          <a:prstGeom prst="line">
-            <a:avLst/>
-          </a:prstGeom>
-          <a:noFill/>
-          <a:ln w="25400">
-            <a:solidFill>
-              <a:srgbClr val="4FB0A6"/>
-            </a:solidFill>
-            <a:prstDash val="solid"/>
-            <a:headEnd type="none"/>
-            <a:tailEnd type="triangle"/>
-          </a:ln>
-        </p:spPr>
+              <a:t>ARCHITECTURE</a:t>
+            </a:r>
+            <a:endParaRPr lang="en-US" sz="1100" dirty="0"/>
+          </a:p>
+        </p:txBody>
+      </p:sp>
+      <p:sp>
+        <p:nvSpPr>
+          <p:cNvPr id="7" name="Text 5"/>
+          <p:cNvSpPr/>
+          <p:nvPr/>
+        </p:nvSpPr>
+        <p:spPr>
+          <a:xfrm>
+            <a:off x="777240" y="1380744"/>
+            <a:ext cx="10637215" cy="640080"/>
+          </a:xfrm>
+          <a:prstGeom prst="rect">
+            <a:avLst/>
+          </a:prstGeom>
+          <a:noFill/>
+          <a:ln/>
+        </p:spPr>
+        <p:txBody>
+          <a:bodyPr wrap="square" lIns="0" tIns="0" rIns="0" bIns="0" rtlCol="0" anchor="ctr"/>
+          <a:lstStyle/>
+          <a:p>
+            <a:pPr indent="0" marL="0">
+              <a:buNone/>
+            </a:pPr>
+            <a:r>
+              <a:rPr lang="en-US" sz="2300" b="1" dirty="0">
+                <a:solidFill>
+                  <a:srgbClr val="EDF3EF"/>
+                </a:solidFill>
+                <a:latin typeface="Calibri" pitchFamily="34" charset="0"/>
+                <a:ea typeface="Calibri" pitchFamily="34" charset="-122"/>
+                <a:cs typeface="Calibri" pitchFamily="34" charset="-120"/>
+              </a:rPr>
+              <a:t>What I Built — Pond to Cloud</a:t>
+            </a:r>
+            <a:endParaRPr lang="en-US" sz="2300" dirty="0"/>
+          </a:p>
+        </p:txBody>
       </p:sp>
       <p:sp>
         <p:nvSpPr>
@@ -1702,20 +1560,20 @@
         </p:nvSpPr>
         <p:spPr>
           <a:xfrm>
-            <a:off x="4937760" y="1874520"/>
-            <a:ext cx="2286000" cy="1280160"/>
+            <a:off x="777240" y="2971800"/>
+            <a:ext cx="1391869" cy="1965960"/>
           </a:xfrm>
           <a:prstGeom prst="roundRect">
             <a:avLst>
-              <a:gd name="adj" fmla="val 7143"/>
+              <a:gd name="adj" fmla="val 7884"/>
             </a:avLst>
           </a:prstGeom>
           <a:solidFill>
-            <a:srgbClr val="EDF6F5"/>
-          </a:solidFill>
-          <a:ln w="19050">
+            <a:srgbClr val="2FB6A8"/>
+          </a:solidFill>
+          <a:ln w="12700">
             <a:solidFill>
-              <a:srgbClr val="4FB0A6"/>
+              <a:srgbClr val="2FB6A8"/>
             </a:solidFill>
             <a:prstDash val="solid"/>
           </a:ln>
@@ -1723,23 +1581,42 @@
       </p:sp>
       <p:sp>
         <p:nvSpPr>
-          <p:cNvPr id="9" name="Shape 7"/>
-          <p:cNvSpPr/>
-          <p:nvPr/>
-        </p:nvSpPr>
-        <p:spPr>
-          <a:xfrm>
-            <a:off x="5989320" y="2039112"/>
-            <a:ext cx="182880" cy="182880"/>
-          </a:xfrm>
-          <a:prstGeom prst="ellipse">
-            <a:avLst/>
-          </a:prstGeom>
-          <a:solidFill>
-            <a:srgbClr val="4FB0A6"/>
-          </a:solidFill>
-          <a:ln/>
-        </p:spPr>
+          <p:cNvPr id="9" name="Text 7"/>
+          <p:cNvSpPr/>
+          <p:nvPr/>
+        </p:nvSpPr>
+        <p:spPr>
+          <a:xfrm>
+            <a:off x="923544" y="3154680"/>
+            <a:ext cx="1099261" cy="320040"/>
+          </a:xfrm>
+          <a:prstGeom prst="rect">
+            <a:avLst/>
+          </a:prstGeom>
+          <a:noFill/>
+          <a:ln/>
+        </p:spPr>
+        <p:txBody>
+          <a:bodyPr wrap="square" lIns="0" tIns="0" rIns="0" bIns="0" rtlCol="0" anchor="ctr"/>
+          <a:lstStyle/>
+          <a:p>
+            <a:pPr indent="0" marL="0">
+              <a:buNone/>
+            </a:pPr>
+            <a:r>
+              <a:rPr lang="en-US" sz="1100" dirty="0">
+                <a:solidFill>
+                  <a:srgbClr val="FFFFFF"/>
+                </a:solidFill>
+                <a:latin typeface="Consolas" pitchFamily="34" charset="0"/>
+                <a:ea typeface="Consolas" pitchFamily="34" charset="-122"/>
+                <a:cs typeface="Consolas" pitchFamily="34" charset="-120"/>
+              </a:rPr>
+              <a:t>01</a:t>
+            </a:r>
+            <a:endParaRPr lang="en-US" sz="1100" dirty="0"/>
+          </a:p>
+        </p:txBody>
       </p:sp>
       <p:sp>
         <p:nvSpPr>
@@ -1749,34 +1626,37 @@
         </p:nvSpPr>
         <p:spPr>
           <a:xfrm>
-            <a:off x="4910328" y="2258568"/>
-            <a:ext cx="2340864" cy="365760"/>
-          </a:xfrm>
-          <a:prstGeom prst="rect">
-            <a:avLst/>
-          </a:prstGeom>
-          <a:noFill/>
-          <a:ln/>
-        </p:spPr>
-        <p:txBody>
-          <a:bodyPr wrap="square" lIns="0" tIns="0" rIns="0" bIns="0" rtlCol="0" anchor="ctr"/>
-          <a:lstStyle/>
-          <a:p>
-            <a:pPr algn="ctr" indent="0" marL="0">
-              <a:buNone/>
-            </a:pPr>
-            <a:r>
-              <a:rPr lang="en-US" sz="1450" b="1" dirty="0">
-                <a:solidFill>
-                  <a:srgbClr val="0F2E31"/>
+            <a:off x="923544" y="3593592"/>
+            <a:ext cx="1099261" cy="868680"/>
+          </a:xfrm>
+          <a:prstGeom prst="rect">
+            <a:avLst/>
+          </a:prstGeom>
+          <a:noFill/>
+          <a:ln/>
+        </p:spPr>
+        <p:txBody>
+          <a:bodyPr wrap="square" lIns="0" tIns="0" rIns="0" bIns="0" rtlCol="0" anchor="t"/>
+          <a:lstStyle/>
+          <a:p>
+            <a:pPr indent="0" marL="0">
+              <a:lnSpc>
+                <a:spcPct val="96000"/>
+              </a:lnSpc>
+              <a:buNone/>
+            </a:pPr>
+            <a:r>
+              <a:rPr lang="en-US" sz="1300" b="1" dirty="0">
+                <a:solidFill>
+                  <a:srgbClr val="FFFFFF"/>
                 </a:solidFill>
                 <a:latin typeface="Calibri" pitchFamily="34" charset="0"/>
                 <a:ea typeface="Calibri" pitchFamily="34" charset="-122"/>
                 <a:cs typeface="Calibri" pitchFamily="34" charset="-120"/>
               </a:rPr>
-              <a:t>Fog gateway</a:t>
-            </a:r>
-            <a:endParaRPr lang="en-US" sz="1450" dirty="0"/>
+              <a:t>Pond sensors</a:t>
+            </a:r>
+            <a:endParaRPr lang="en-US" sz="1300" dirty="0"/>
           </a:p>
         </p:txBody>
       </p:sp>
@@ -1788,34 +1668,34 @@
         </p:nvSpPr>
         <p:spPr>
           <a:xfrm>
-            <a:off x="4937760" y="2606040"/>
-            <a:ext cx="2286000" cy="411480"/>
-          </a:xfrm>
-          <a:prstGeom prst="rect">
-            <a:avLst/>
-          </a:prstGeom>
-          <a:noFill/>
-          <a:ln/>
-        </p:spPr>
-        <p:txBody>
-          <a:bodyPr wrap="square" lIns="0" tIns="0" rIns="0" bIns="0" rtlCol="0" anchor="t"/>
-          <a:lstStyle/>
-          <a:p>
-            <a:pPr algn="ctr" indent="0" marL="0">
-              <a:buNone/>
-            </a:pPr>
-            <a:r>
-              <a:rPr lang="en-US" sz="1050" dirty="0">
-                <a:solidFill>
-                  <a:srgbClr val="557370"/>
+            <a:off x="923544" y="4453128"/>
+            <a:ext cx="1099261" cy="365760"/>
+          </a:xfrm>
+          <a:prstGeom prst="rect">
+            <a:avLst/>
+          </a:prstGeom>
+          <a:noFill/>
+          <a:ln/>
+        </p:spPr>
+        <p:txBody>
+          <a:bodyPr wrap="square" lIns="0" tIns="0" rIns="0" bIns="0" rtlCol="0" anchor="ctr"/>
+          <a:lstStyle/>
+          <a:p>
+            <a:pPr indent="0" marL="0">
+              <a:buNone/>
+            </a:pPr>
+            <a:r>
+              <a:rPr lang="en-US" sz="900" dirty="0">
+                <a:solidFill>
+                  <a:srgbClr val="FFFFFF"/>
                 </a:solidFill>
                 <a:latin typeface="Calibri" pitchFamily="34" charset="0"/>
                 <a:ea typeface="Calibri" pitchFamily="34" charset="-122"/>
                 <a:cs typeface="Calibri" pitchFamily="34" charset="-120"/>
               </a:rPr>
-              <a:t>10 s windows · rules</a:t>
-            </a:r>
-            <a:endParaRPr lang="en-US" sz="1050" dirty="0"/>
+              <a:t>10 · 2 ponds · 5 metrics</a:t>
+            </a:r>
+            <a:endParaRPr lang="en-US" sz="900" dirty="0"/>
           </a:p>
         </p:txBody>
       </p:sp>
@@ -1827,21 +1707,16 @@
         </p:nvSpPr>
         <p:spPr>
           <a:xfrm>
-            <a:off x="7242048" y="2514600"/>
-            <a:ext cx="1975104" cy="0"/>
-          </a:xfrm>
-          <a:prstGeom prst="line">
-            <a:avLst/>
-          </a:prstGeom>
-          <a:noFill/>
-          <a:ln w="25400">
-            <a:solidFill>
-              <a:srgbClr val="4FB0A6"/>
-            </a:solidFill>
-            <a:prstDash val="solid"/>
-            <a:headEnd type="none"/>
-            <a:tailEnd type="triangle"/>
-          </a:ln>
+            <a:off x="2242261" y="3845052"/>
+            <a:ext cx="310896" cy="219456"/>
+          </a:xfrm>
+          <a:prstGeom prst="rightArrow">
+            <a:avLst/>
+          </a:prstGeom>
+          <a:solidFill>
+            <a:srgbClr val="8B98A6"/>
+          </a:solidFill>
+          <a:ln/>
         </p:spPr>
       </p:sp>
       <p:sp>
@@ -1852,20 +1727,20 @@
         </p:nvSpPr>
         <p:spPr>
           <a:xfrm>
-            <a:off x="9235440" y="1874520"/>
-            <a:ext cx="2286000" cy="1280160"/>
+            <a:off x="2626309" y="2971800"/>
+            <a:ext cx="1391869" cy="1965960"/>
           </a:xfrm>
           <a:prstGeom prst="roundRect">
             <a:avLst>
-              <a:gd name="adj" fmla="val 7143"/>
+              <a:gd name="adj" fmla="val 7884"/>
             </a:avLst>
           </a:prstGeom>
           <a:solidFill>
-            <a:srgbClr val="EDF6F5"/>
-          </a:solidFill>
-          <a:ln w="19050">
+            <a:srgbClr val="2FB6A8"/>
+          </a:solidFill>
+          <a:ln w="12700">
             <a:solidFill>
-              <a:srgbClr val="0F6E6A"/>
+              <a:srgbClr val="2FB6A8"/>
             </a:solidFill>
             <a:prstDash val="solid"/>
           </a:ln>
@@ -1873,23 +1748,42 @@
       </p:sp>
       <p:sp>
         <p:nvSpPr>
-          <p:cNvPr id="14" name="Shape 12"/>
-          <p:cNvSpPr/>
-          <p:nvPr/>
-        </p:nvSpPr>
-        <p:spPr>
-          <a:xfrm>
-            <a:off x="10287000" y="2039112"/>
-            <a:ext cx="182880" cy="182880"/>
-          </a:xfrm>
-          <a:prstGeom prst="ellipse">
-            <a:avLst/>
-          </a:prstGeom>
-          <a:solidFill>
-            <a:srgbClr val="0F6E6A"/>
-          </a:solidFill>
-          <a:ln/>
-        </p:spPr>
+          <p:cNvPr id="14" name="Text 12"/>
+          <p:cNvSpPr/>
+          <p:nvPr/>
+        </p:nvSpPr>
+        <p:spPr>
+          <a:xfrm>
+            <a:off x="2772613" y="3154680"/>
+            <a:ext cx="1099261" cy="320040"/>
+          </a:xfrm>
+          <a:prstGeom prst="rect">
+            <a:avLst/>
+          </a:prstGeom>
+          <a:noFill/>
+          <a:ln/>
+        </p:spPr>
+        <p:txBody>
+          <a:bodyPr wrap="square" lIns="0" tIns="0" rIns="0" bIns="0" rtlCol="0" anchor="ctr"/>
+          <a:lstStyle/>
+          <a:p>
+            <a:pPr indent="0" marL="0">
+              <a:buNone/>
+            </a:pPr>
+            <a:r>
+              <a:rPr lang="en-US" sz="1100" dirty="0">
+                <a:solidFill>
+                  <a:srgbClr val="FFFFFF"/>
+                </a:solidFill>
+                <a:latin typeface="Consolas" pitchFamily="34" charset="0"/>
+                <a:ea typeface="Consolas" pitchFamily="34" charset="-122"/>
+                <a:cs typeface="Consolas" pitchFamily="34" charset="-120"/>
+              </a:rPr>
+              <a:t>02</a:t>
+            </a:r>
+            <a:endParaRPr lang="en-US" sz="1100" dirty="0"/>
+          </a:p>
+        </p:txBody>
       </p:sp>
       <p:sp>
         <p:nvSpPr>
@@ -1899,34 +1793,37 @@
         </p:nvSpPr>
         <p:spPr>
           <a:xfrm>
-            <a:off x="9208008" y="2258568"/>
-            <a:ext cx="2340864" cy="365760"/>
-          </a:xfrm>
-          <a:prstGeom prst="rect">
-            <a:avLst/>
-          </a:prstGeom>
-          <a:noFill/>
-          <a:ln/>
-        </p:spPr>
-        <p:txBody>
-          <a:bodyPr wrap="square" lIns="0" tIns="0" rIns="0" bIns="0" rtlCol="0" anchor="ctr"/>
-          <a:lstStyle/>
-          <a:p>
-            <a:pPr algn="ctr" indent="0" marL="0">
-              <a:buNone/>
-            </a:pPr>
-            <a:r>
-              <a:rPr lang="en-US" sz="1450" b="1" dirty="0">
-                <a:solidFill>
-                  <a:srgbClr val="0F2E31"/>
+            <a:off x="2772613" y="3593592"/>
+            <a:ext cx="1099261" cy="868680"/>
+          </a:xfrm>
+          <a:prstGeom prst="rect">
+            <a:avLst/>
+          </a:prstGeom>
+          <a:noFill/>
+          <a:ln/>
+        </p:spPr>
+        <p:txBody>
+          <a:bodyPr wrap="square" lIns="0" tIns="0" rIns="0" bIns="0" rtlCol="0" anchor="t"/>
+          <a:lstStyle/>
+          <a:p>
+            <a:pPr indent="0" marL="0">
+              <a:lnSpc>
+                <a:spcPct val="96000"/>
+              </a:lnSpc>
+              <a:buNone/>
+            </a:pPr>
+            <a:r>
+              <a:rPr lang="en-US" sz="1300" b="1" dirty="0">
+                <a:solidFill>
+                  <a:srgbClr val="FFFFFF"/>
                 </a:solidFill>
                 <a:latin typeface="Calibri" pitchFamily="34" charset="0"/>
                 <a:ea typeface="Calibri" pitchFamily="34" charset="-122"/>
                 <a:cs typeface="Calibri" pitchFamily="34" charset="-120"/>
               </a:rPr>
-              <a:t>Amazon SQS</a:t>
-            </a:r>
-            <a:endParaRPr lang="en-US" sz="1450" dirty="0"/>
+              <a:t>Fog gateway</a:t>
+            </a:r>
+            <a:endParaRPr lang="en-US" sz="1300" dirty="0"/>
           </a:p>
         </p:txBody>
       </p:sp>
@@ -1938,34 +1835,34 @@
         </p:nvSpPr>
         <p:spPr>
           <a:xfrm>
-            <a:off x="9235440" y="2606040"/>
-            <a:ext cx="2286000" cy="411480"/>
-          </a:xfrm>
-          <a:prstGeom prst="rect">
-            <a:avLst/>
-          </a:prstGeom>
-          <a:noFill/>
-          <a:ln/>
-        </p:spPr>
-        <p:txBody>
-          <a:bodyPr wrap="square" lIns="0" tIns="0" rIns="0" bIns="0" rtlCol="0" anchor="t"/>
-          <a:lstStyle/>
-          <a:p>
-            <a:pPr algn="ctr" indent="0" marL="0">
-              <a:buNone/>
-            </a:pPr>
-            <a:r>
-              <a:rPr lang="en-US" sz="1050" dirty="0">
-                <a:solidFill>
-                  <a:srgbClr val="557370"/>
+            <a:off x="2772613" y="4453128"/>
+            <a:ext cx="1099261" cy="365760"/>
+          </a:xfrm>
+          <a:prstGeom prst="rect">
+            <a:avLst/>
+          </a:prstGeom>
+          <a:noFill/>
+          <a:ln/>
+        </p:spPr>
+        <p:txBody>
+          <a:bodyPr wrap="square" lIns="0" tIns="0" rIns="0" bIns="0" rtlCol="0" anchor="ctr"/>
+          <a:lstStyle/>
+          <a:p>
+            <a:pPr indent="0" marL="0">
+              <a:buNone/>
+            </a:pPr>
+            <a:r>
+              <a:rPr lang="en-US" sz="900" dirty="0">
+                <a:solidFill>
+                  <a:srgbClr val="FFFFFF"/>
                 </a:solidFill>
                 <a:latin typeface="Calibri" pitchFamily="34" charset="0"/>
                 <a:ea typeface="Calibri" pitchFamily="34" charset="-122"/>
                 <a:cs typeface="Calibri" pitchFamily="34" charset="-120"/>
               </a:rPr>
-              <a:t>1 batched send / cycle</a:t>
-            </a:r>
-            <a:endParaRPr lang="en-US" sz="1050" dirty="0"/>
+              <a:t>10 s windows · rules</a:t>
+            </a:r>
+            <a:endParaRPr lang="en-US" sz="900" dirty="0"/>
           </a:p>
         </p:txBody>
       </p:sp>
@@ -1977,20 +1874,40 @@
         </p:nvSpPr>
         <p:spPr>
           <a:xfrm>
-            <a:off x="9235440" y="3520440"/>
-            <a:ext cx="2286000" cy="1280160"/>
+            <a:off x="4091330" y="3845052"/>
+            <a:ext cx="310896" cy="219456"/>
+          </a:xfrm>
+          <a:prstGeom prst="rightArrow">
+            <a:avLst/>
+          </a:prstGeom>
+          <a:solidFill>
+            <a:srgbClr val="8B98A6"/>
+          </a:solidFill>
+          <a:ln/>
+        </p:spPr>
+      </p:sp>
+      <p:sp>
+        <p:nvSpPr>
+          <p:cNvPr id="18" name="Shape 16"/>
+          <p:cNvSpPr/>
+          <p:nvPr/>
+        </p:nvSpPr>
+        <p:spPr>
+          <a:xfrm>
+            <a:off x="4475378" y="2971800"/>
+            <a:ext cx="1391869" cy="1965960"/>
           </a:xfrm>
           <a:prstGeom prst="roundRect">
             <a:avLst>
-              <a:gd name="adj" fmla="val 7143"/>
+              <a:gd name="adj" fmla="val 7884"/>
             </a:avLst>
           </a:prstGeom>
           <a:solidFill>
-            <a:srgbClr val="EDF6F5"/>
-          </a:solidFill>
-          <a:ln w="19050">
+            <a:srgbClr val="1A4249"/>
+          </a:solidFill>
+          <a:ln w="12700">
             <a:solidFill>
-              <a:srgbClr val="0F6E6A"/>
+              <a:srgbClr val="2E565D"/>
             </a:solidFill>
             <a:prstDash val="solid"/>
           </a:ln>
@@ -1998,34 +1915,14 @@
       </p:sp>
       <p:sp>
         <p:nvSpPr>
-          <p:cNvPr id="18" name="Shape 16"/>
-          <p:cNvSpPr/>
-          <p:nvPr/>
-        </p:nvSpPr>
-        <p:spPr>
-          <a:xfrm>
-            <a:off x="10287000" y="3685032"/>
-            <a:ext cx="182880" cy="182880"/>
-          </a:xfrm>
-          <a:prstGeom prst="ellipse">
-            <a:avLst/>
-          </a:prstGeom>
-          <a:solidFill>
-            <a:srgbClr val="0F6E6A"/>
-          </a:solidFill>
-          <a:ln/>
-        </p:spPr>
-      </p:sp>
-      <p:sp>
-        <p:nvSpPr>
           <p:cNvPr id="19" name="Text 17"/>
           <p:cNvSpPr/>
           <p:nvPr/>
         </p:nvSpPr>
         <p:spPr>
           <a:xfrm>
-            <a:off x="9208008" y="3904488"/>
-            <a:ext cx="2340864" cy="365760"/>
+            <a:off x="4621682" y="3154680"/>
+            <a:ext cx="1099261" cy="320040"/>
           </a:xfrm>
           <a:prstGeom prst="rect">
             <a:avLst/>
@@ -2037,87 +1934,104 @@
           <a:bodyPr wrap="square" lIns="0" tIns="0" rIns="0" bIns="0" rtlCol="0" anchor="ctr"/>
           <a:lstStyle/>
           <a:p>
-            <a:pPr algn="ctr" indent="0" marL="0">
-              <a:buNone/>
-            </a:pPr>
-            <a:r>
-              <a:rPr lang="en-US" sz="1450" b="1" dirty="0">
-                <a:solidFill>
-                  <a:srgbClr val="0F2E31"/>
+            <a:pPr indent="0" marL="0">
+              <a:buNone/>
+            </a:pPr>
+            <a:r>
+              <a:rPr lang="en-US" sz="1100" dirty="0">
+                <a:solidFill>
+                  <a:srgbClr val="2FB6A8"/>
+                </a:solidFill>
+                <a:latin typeface="Consolas" pitchFamily="34" charset="0"/>
+                <a:ea typeface="Consolas" pitchFamily="34" charset="-122"/>
+                <a:cs typeface="Consolas" pitchFamily="34" charset="-120"/>
+              </a:rPr>
+              <a:t>03</a:t>
+            </a:r>
+            <a:endParaRPr lang="en-US" sz="1100" dirty="0"/>
+          </a:p>
+        </p:txBody>
+      </p:sp>
+      <p:sp>
+        <p:nvSpPr>
+          <p:cNvPr id="20" name="Text 18"/>
+          <p:cNvSpPr/>
+          <p:nvPr/>
+        </p:nvSpPr>
+        <p:spPr>
+          <a:xfrm>
+            <a:off x="4621682" y="3593592"/>
+            <a:ext cx="1099261" cy="868680"/>
+          </a:xfrm>
+          <a:prstGeom prst="rect">
+            <a:avLst/>
+          </a:prstGeom>
+          <a:noFill/>
+          <a:ln/>
+        </p:spPr>
+        <p:txBody>
+          <a:bodyPr wrap="square" lIns="0" tIns="0" rIns="0" bIns="0" rtlCol="0" anchor="t"/>
+          <a:lstStyle/>
+          <a:p>
+            <a:pPr indent="0" marL="0">
+              <a:lnSpc>
+                <a:spcPct val="96000"/>
+              </a:lnSpc>
+              <a:buNone/>
+            </a:pPr>
+            <a:r>
+              <a:rPr lang="en-US" sz="1300" b="1" dirty="0">
+                <a:solidFill>
+                  <a:srgbClr val="EDF3EF"/>
                 </a:solidFill>
                 <a:latin typeface="Calibri" pitchFamily="34" charset="0"/>
                 <a:ea typeface="Calibri" pitchFamily="34" charset="-122"/>
                 <a:cs typeface="Calibri" pitchFamily="34" charset="-120"/>
               </a:rPr>
-              <a:t>AWS Lambda</a:t>
-            </a:r>
-            <a:endParaRPr lang="en-US" sz="1450" dirty="0"/>
-          </a:p>
-        </p:txBody>
-      </p:sp>
-      <p:sp>
-        <p:nvSpPr>
-          <p:cNvPr id="20" name="Text 18"/>
-          <p:cNvSpPr/>
-          <p:nvPr/>
-        </p:nvSpPr>
-        <p:spPr>
-          <a:xfrm>
-            <a:off x="9235440" y="4251960"/>
-            <a:ext cx="2286000" cy="411480"/>
-          </a:xfrm>
-          <a:prstGeom prst="rect">
-            <a:avLst/>
-          </a:prstGeom>
-          <a:noFill/>
-          <a:ln/>
-        </p:spPr>
-        <p:txBody>
-          <a:bodyPr wrap="square" lIns="0" tIns="0" rIns="0" bIns="0" rtlCol="0" anchor="t"/>
-          <a:lstStyle/>
-          <a:p>
-            <a:pPr algn="ctr" indent="0" marL="0">
-              <a:buNone/>
-            </a:pPr>
-            <a:r>
-              <a:rPr lang="en-US" sz="1050" dirty="0">
-                <a:solidFill>
-                  <a:srgbClr val="557370"/>
+              <a:t>Amazon SQS</a:t>
+            </a:r>
+            <a:endParaRPr lang="en-US" sz="1300" dirty="0"/>
+          </a:p>
+        </p:txBody>
+      </p:sp>
+      <p:sp>
+        <p:nvSpPr>
+          <p:cNvPr id="21" name="Text 19"/>
+          <p:cNvSpPr/>
+          <p:nvPr/>
+        </p:nvSpPr>
+        <p:spPr>
+          <a:xfrm>
+            <a:off x="4621682" y="4453128"/>
+            <a:ext cx="1099261" cy="365760"/>
+          </a:xfrm>
+          <a:prstGeom prst="rect">
+            <a:avLst/>
+          </a:prstGeom>
+          <a:noFill/>
+          <a:ln/>
+        </p:spPr>
+        <p:txBody>
+          <a:bodyPr wrap="square" lIns="0" tIns="0" rIns="0" bIns="0" rtlCol="0" anchor="ctr"/>
+          <a:lstStyle/>
+          <a:p>
+            <a:pPr indent="0" marL="0">
+              <a:buNone/>
+            </a:pPr>
+            <a:r>
+              <a:rPr lang="en-US" sz="900" dirty="0">
+                <a:solidFill>
+                  <a:srgbClr val="8B98A6"/>
                 </a:solidFill>
                 <a:latin typeface="Calibri" pitchFamily="34" charset="0"/>
                 <a:ea typeface="Calibri" pitchFamily="34" charset="-122"/>
                 <a:cs typeface="Calibri" pitchFamily="34" charset="-120"/>
               </a:rPr>
-              <a:t>java17 ingest</a:t>
-            </a:r>
-            <a:endParaRPr lang="en-US" sz="1050" dirty="0"/>
-          </a:p>
-        </p:txBody>
-      </p:sp>
-      <p:sp>
-        <p:nvSpPr>
-          <p:cNvPr id="21" name="Shape 19"/>
-          <p:cNvSpPr/>
-          <p:nvPr/>
-        </p:nvSpPr>
-        <p:spPr>
-          <a:xfrm>
-            <a:off x="7242048" y="4160520"/>
-            <a:ext cx="1975104" cy="0"/>
-          </a:xfrm>
-          <a:prstGeom prst="line">
-            <a:avLst/>
-          </a:prstGeom>
-          <a:noFill/>
-          <a:ln w="25400">
-            <a:solidFill>
-              <a:srgbClr val="4FB0A6"/>
-            </a:solidFill>
-            <a:prstDash val="solid"/>
-            <a:headEnd type="triangle"/>
-            <a:tailEnd type="oval"/>
-          </a:ln>
-        </p:spPr>
+              <a:t>1 batched send / cycle</a:t>
+            </a:r>
+            <a:endParaRPr lang="en-US" sz="900" dirty="0"/>
+          </a:p>
+        </p:txBody>
       </p:sp>
       <p:sp>
         <p:nvSpPr>
@@ -2127,20 +2041,40 @@
         </p:nvSpPr>
         <p:spPr>
           <a:xfrm>
-            <a:off x="4937760" y="3520440"/>
-            <a:ext cx="2286000" cy="1280160"/>
+            <a:off x="5940400" y="3845052"/>
+            <a:ext cx="310896" cy="219456"/>
+          </a:xfrm>
+          <a:prstGeom prst="rightArrow">
+            <a:avLst/>
+          </a:prstGeom>
+          <a:solidFill>
+            <a:srgbClr val="8B98A6"/>
+          </a:solidFill>
+          <a:ln/>
+        </p:spPr>
+      </p:sp>
+      <p:sp>
+        <p:nvSpPr>
+          <p:cNvPr id="23" name="Shape 21"/>
+          <p:cNvSpPr/>
+          <p:nvPr/>
+        </p:nvSpPr>
+        <p:spPr>
+          <a:xfrm>
+            <a:off x="6324448" y="2971800"/>
+            <a:ext cx="1391869" cy="1965960"/>
           </a:xfrm>
           <a:prstGeom prst="roundRect">
             <a:avLst>
-              <a:gd name="adj" fmla="val 7143"/>
+              <a:gd name="adj" fmla="val 7884"/>
             </a:avLst>
           </a:prstGeom>
           <a:solidFill>
-            <a:srgbClr val="EDF6F5"/>
-          </a:solidFill>
-          <a:ln w="19050">
+            <a:srgbClr val="1A4249"/>
+          </a:solidFill>
+          <a:ln w="12700">
             <a:solidFill>
-              <a:srgbClr val="0F6E6A"/>
+              <a:srgbClr val="2E565D"/>
             </a:solidFill>
             <a:prstDash val="solid"/>
           </a:ln>
@@ -2148,34 +2082,14 @@
       </p:sp>
       <p:sp>
         <p:nvSpPr>
-          <p:cNvPr id="23" name="Shape 21"/>
-          <p:cNvSpPr/>
-          <p:nvPr/>
-        </p:nvSpPr>
-        <p:spPr>
-          <a:xfrm>
-            <a:off x="5989320" y="3685032"/>
-            <a:ext cx="182880" cy="182880"/>
-          </a:xfrm>
-          <a:prstGeom prst="ellipse">
-            <a:avLst/>
-          </a:prstGeom>
-          <a:solidFill>
-            <a:srgbClr val="0F6E6A"/>
-          </a:solidFill>
-          <a:ln/>
-        </p:spPr>
-      </p:sp>
-      <p:sp>
-        <p:nvSpPr>
           <p:cNvPr id="24" name="Text 22"/>
           <p:cNvSpPr/>
           <p:nvPr/>
         </p:nvSpPr>
         <p:spPr>
           <a:xfrm>
-            <a:off x="4910328" y="3904488"/>
-            <a:ext cx="2340864" cy="365760"/>
+            <a:off x="6470752" y="3154680"/>
+            <a:ext cx="1099261" cy="320040"/>
           </a:xfrm>
           <a:prstGeom prst="rect">
             <a:avLst/>
@@ -2187,87 +2101,104 @@
           <a:bodyPr wrap="square" lIns="0" tIns="0" rIns="0" bIns="0" rtlCol="0" anchor="ctr"/>
           <a:lstStyle/>
           <a:p>
-            <a:pPr algn="ctr" indent="0" marL="0">
-              <a:buNone/>
-            </a:pPr>
-            <a:r>
-              <a:rPr lang="en-US" sz="1450" b="1" dirty="0">
-                <a:solidFill>
-                  <a:srgbClr val="0F2E31"/>
+            <a:pPr indent="0" marL="0">
+              <a:buNone/>
+            </a:pPr>
+            <a:r>
+              <a:rPr lang="en-US" sz="1100" dirty="0">
+                <a:solidFill>
+                  <a:srgbClr val="2FB6A8"/>
+                </a:solidFill>
+                <a:latin typeface="Consolas" pitchFamily="34" charset="0"/>
+                <a:ea typeface="Consolas" pitchFamily="34" charset="-122"/>
+                <a:cs typeface="Consolas" pitchFamily="34" charset="-120"/>
+              </a:rPr>
+              <a:t>04</a:t>
+            </a:r>
+            <a:endParaRPr lang="en-US" sz="1100" dirty="0"/>
+          </a:p>
+        </p:txBody>
+      </p:sp>
+      <p:sp>
+        <p:nvSpPr>
+          <p:cNvPr id="25" name="Text 23"/>
+          <p:cNvSpPr/>
+          <p:nvPr/>
+        </p:nvSpPr>
+        <p:spPr>
+          <a:xfrm>
+            <a:off x="6470752" y="3593592"/>
+            <a:ext cx="1099261" cy="868680"/>
+          </a:xfrm>
+          <a:prstGeom prst="rect">
+            <a:avLst/>
+          </a:prstGeom>
+          <a:noFill/>
+          <a:ln/>
+        </p:spPr>
+        <p:txBody>
+          <a:bodyPr wrap="square" lIns="0" tIns="0" rIns="0" bIns="0" rtlCol="0" anchor="t"/>
+          <a:lstStyle/>
+          <a:p>
+            <a:pPr indent="0" marL="0">
+              <a:lnSpc>
+                <a:spcPct val="96000"/>
+              </a:lnSpc>
+              <a:buNone/>
+            </a:pPr>
+            <a:r>
+              <a:rPr lang="en-US" sz="1300" b="1" dirty="0">
+                <a:solidFill>
+                  <a:srgbClr val="EDF3EF"/>
                 </a:solidFill>
                 <a:latin typeface="Calibri" pitchFamily="34" charset="0"/>
                 <a:ea typeface="Calibri" pitchFamily="34" charset="-122"/>
                 <a:cs typeface="Calibri" pitchFamily="34" charset="-120"/>
               </a:rPr>
-              <a:t>DynamoDB</a:t>
-            </a:r>
-            <a:endParaRPr lang="en-US" sz="1450" dirty="0"/>
-          </a:p>
-        </p:txBody>
-      </p:sp>
-      <p:sp>
-        <p:nvSpPr>
-          <p:cNvPr id="25" name="Text 23"/>
-          <p:cNvSpPr/>
-          <p:nvPr/>
-        </p:nvSpPr>
-        <p:spPr>
-          <a:xfrm>
-            <a:off x="4937760" y="4251960"/>
-            <a:ext cx="2286000" cy="411480"/>
-          </a:xfrm>
-          <a:prstGeom prst="rect">
-            <a:avLst/>
-          </a:prstGeom>
-          <a:noFill/>
-          <a:ln/>
-        </p:spPr>
-        <p:txBody>
-          <a:bodyPr wrap="square" lIns="0" tIns="0" rIns="0" bIns="0" rtlCol="0" anchor="t"/>
-          <a:lstStyle/>
-          <a:p>
-            <a:pPr algn="ctr" indent="0" marL="0">
-              <a:buNone/>
-            </a:pPr>
-            <a:r>
-              <a:rPr lang="en-US" sz="1050" dirty="0">
-                <a:solidFill>
-                  <a:srgbClr val="557370"/>
+              <a:t>AWS Lambda</a:t>
+            </a:r>
+            <a:endParaRPr lang="en-US" sz="1300" dirty="0"/>
+          </a:p>
+        </p:txBody>
+      </p:sp>
+      <p:sp>
+        <p:nvSpPr>
+          <p:cNvPr id="26" name="Text 24"/>
+          <p:cNvSpPr/>
+          <p:nvPr/>
+        </p:nvSpPr>
+        <p:spPr>
+          <a:xfrm>
+            <a:off x="6470752" y="4453128"/>
+            <a:ext cx="1099261" cy="365760"/>
+          </a:xfrm>
+          <a:prstGeom prst="rect">
+            <a:avLst/>
+          </a:prstGeom>
+          <a:noFill/>
+          <a:ln/>
+        </p:spPr>
+        <p:txBody>
+          <a:bodyPr wrap="square" lIns="0" tIns="0" rIns="0" bIns="0" rtlCol="0" anchor="ctr"/>
+          <a:lstStyle/>
+          <a:p>
+            <a:pPr indent="0" marL="0">
+              <a:buNone/>
+            </a:pPr>
+            <a:r>
+              <a:rPr lang="en-US" sz="900" dirty="0">
+                <a:solidFill>
+                  <a:srgbClr val="8B98A6"/>
                 </a:solidFill>
                 <a:latin typeface="Calibri" pitchFamily="34" charset="0"/>
                 <a:ea typeface="Calibri" pitchFamily="34" charset="-122"/>
                 <a:cs typeface="Calibri" pitchFamily="34" charset="-120"/>
               </a:rPr>
-              <a:t>by type · time</a:t>
-            </a:r>
-            <a:endParaRPr lang="en-US" sz="1050" dirty="0"/>
-          </a:p>
-        </p:txBody>
-      </p:sp>
-      <p:sp>
-        <p:nvSpPr>
-          <p:cNvPr id="26" name="Shape 24"/>
-          <p:cNvSpPr/>
-          <p:nvPr/>
-        </p:nvSpPr>
-        <p:spPr>
-          <a:xfrm>
-            <a:off x="2944368" y="4160520"/>
-            <a:ext cx="1975104" cy="0"/>
-          </a:xfrm>
-          <a:prstGeom prst="line">
-            <a:avLst/>
-          </a:prstGeom>
-          <a:noFill/>
-          <a:ln w="25400">
-            <a:solidFill>
-              <a:srgbClr val="4FB0A6"/>
-            </a:solidFill>
-            <a:prstDash val="solid"/>
-            <a:headEnd type="triangle"/>
-            <a:tailEnd type="oval"/>
-          </a:ln>
-        </p:spPr>
+              <a:t>java17 ingest</a:t>
+            </a:r>
+            <a:endParaRPr lang="en-US" sz="900" dirty="0"/>
+          </a:p>
+        </p:txBody>
       </p:sp>
       <p:sp>
         <p:nvSpPr>
@@ -2277,20 +2208,40 @@
         </p:nvSpPr>
         <p:spPr>
           <a:xfrm>
-            <a:off x="640080" y="3520440"/>
-            <a:ext cx="2286000" cy="1280160"/>
+            <a:off x="7789469" y="3845052"/>
+            <a:ext cx="310896" cy="219456"/>
+          </a:xfrm>
+          <a:prstGeom prst="rightArrow">
+            <a:avLst/>
+          </a:prstGeom>
+          <a:solidFill>
+            <a:srgbClr val="8B98A6"/>
+          </a:solidFill>
+          <a:ln/>
+        </p:spPr>
+      </p:sp>
+      <p:sp>
+        <p:nvSpPr>
+          <p:cNvPr id="28" name="Shape 26"/>
+          <p:cNvSpPr/>
+          <p:nvPr/>
+        </p:nvSpPr>
+        <p:spPr>
+          <a:xfrm>
+            <a:off x="8173517" y="2971800"/>
+            <a:ext cx="1391869" cy="1965960"/>
           </a:xfrm>
           <a:prstGeom prst="roundRect">
             <a:avLst>
-              <a:gd name="adj" fmla="val 7143"/>
+              <a:gd name="adj" fmla="val 7884"/>
             </a:avLst>
           </a:prstGeom>
           <a:solidFill>
-            <a:srgbClr val="EDF6F5"/>
-          </a:solidFill>
-          <a:ln w="19050">
+            <a:srgbClr val="1A4249"/>
+          </a:solidFill>
+          <a:ln w="12700">
             <a:solidFill>
-              <a:srgbClr val="1E9188"/>
+              <a:srgbClr val="2E565D"/>
             </a:solidFill>
             <a:prstDash val="solid"/>
           </a:ln>
@@ -2298,34 +2249,14 @@
       </p:sp>
       <p:sp>
         <p:nvSpPr>
-          <p:cNvPr id="28" name="Shape 26"/>
-          <p:cNvSpPr/>
-          <p:nvPr/>
-        </p:nvSpPr>
-        <p:spPr>
-          <a:xfrm>
-            <a:off x="1691640" y="3685032"/>
-            <a:ext cx="182880" cy="182880"/>
-          </a:xfrm>
-          <a:prstGeom prst="ellipse">
-            <a:avLst/>
-          </a:prstGeom>
-          <a:solidFill>
-            <a:srgbClr val="1E9188"/>
-          </a:solidFill>
-          <a:ln/>
-        </p:spPr>
-      </p:sp>
-      <p:sp>
-        <p:nvSpPr>
           <p:cNvPr id="29" name="Text 27"/>
           <p:cNvSpPr/>
           <p:nvPr/>
         </p:nvSpPr>
         <p:spPr>
           <a:xfrm>
-            <a:off x="612648" y="3904488"/>
-            <a:ext cx="2340864" cy="365760"/>
+            <a:off x="8319821" y="3154680"/>
+            <a:ext cx="1099261" cy="320040"/>
           </a:xfrm>
           <a:prstGeom prst="rect">
             <a:avLst/>
@@ -2337,123 +2268,269 @@
           <a:bodyPr wrap="square" lIns="0" tIns="0" rIns="0" bIns="0" rtlCol="0" anchor="ctr"/>
           <a:lstStyle/>
           <a:p>
-            <a:pPr algn="ctr" indent="0" marL="0">
-              <a:buNone/>
-            </a:pPr>
-            <a:r>
-              <a:rPr lang="en-US" sz="1450" b="1" dirty="0">
-                <a:solidFill>
-                  <a:srgbClr val="0F2E31"/>
+            <a:pPr indent="0" marL="0">
+              <a:buNone/>
+            </a:pPr>
+            <a:r>
+              <a:rPr lang="en-US" sz="1100" dirty="0">
+                <a:solidFill>
+                  <a:srgbClr val="2FB6A8"/>
+                </a:solidFill>
+                <a:latin typeface="Consolas" pitchFamily="34" charset="0"/>
+                <a:ea typeface="Consolas" pitchFamily="34" charset="-122"/>
+                <a:cs typeface="Consolas" pitchFamily="34" charset="-120"/>
+              </a:rPr>
+              <a:t>05</a:t>
+            </a:r>
+            <a:endParaRPr lang="en-US" sz="1100" dirty="0"/>
+          </a:p>
+        </p:txBody>
+      </p:sp>
+      <p:sp>
+        <p:nvSpPr>
+          <p:cNvPr id="30" name="Text 28"/>
+          <p:cNvSpPr/>
+          <p:nvPr/>
+        </p:nvSpPr>
+        <p:spPr>
+          <a:xfrm>
+            <a:off x="8319821" y="3593592"/>
+            <a:ext cx="1099261" cy="868680"/>
+          </a:xfrm>
+          <a:prstGeom prst="rect">
+            <a:avLst/>
+          </a:prstGeom>
+          <a:noFill/>
+          <a:ln/>
+        </p:spPr>
+        <p:txBody>
+          <a:bodyPr wrap="square" lIns="0" tIns="0" rIns="0" bIns="0" rtlCol="0" anchor="t"/>
+          <a:lstStyle/>
+          <a:p>
+            <a:pPr indent="0" marL="0">
+              <a:lnSpc>
+                <a:spcPct val="96000"/>
+              </a:lnSpc>
+              <a:buNone/>
+            </a:pPr>
+            <a:r>
+              <a:rPr lang="en-US" sz="1300" b="1" dirty="0">
+                <a:solidFill>
+                  <a:srgbClr val="EDF3EF"/>
                 </a:solidFill>
                 <a:latin typeface="Calibri" pitchFamily="34" charset="0"/>
                 <a:ea typeface="Calibri" pitchFamily="34" charset="-122"/>
                 <a:cs typeface="Calibri" pitchFamily="34" charset="-120"/>
               </a:rPr>
-              <a:t>API GW + S3</a:t>
-            </a:r>
-            <a:endParaRPr lang="en-US" sz="1450" dirty="0"/>
-          </a:p>
-        </p:txBody>
-      </p:sp>
-      <p:sp>
-        <p:nvSpPr>
-          <p:cNvPr id="30" name="Text 28"/>
-          <p:cNvSpPr/>
-          <p:nvPr/>
-        </p:nvSpPr>
-        <p:spPr>
-          <a:xfrm>
-            <a:off x="640080" y="4251960"/>
-            <a:ext cx="2286000" cy="411480"/>
-          </a:xfrm>
-          <a:prstGeom prst="rect">
-            <a:avLst/>
-          </a:prstGeom>
-          <a:noFill/>
-          <a:ln/>
-        </p:spPr>
-        <p:txBody>
-          <a:bodyPr wrap="square" lIns="0" tIns="0" rIns="0" bIns="0" rtlCol="0" anchor="t"/>
-          <a:lstStyle/>
-          <a:p>
-            <a:pPr algn="ctr" indent="0" marL="0">
-              <a:buNone/>
-            </a:pPr>
-            <a:r>
-              <a:rPr lang="en-US" sz="1050" dirty="0">
-                <a:solidFill>
-                  <a:srgbClr val="557370"/>
+              <a:t>DynamoDB</a:t>
+            </a:r>
+            <a:endParaRPr lang="en-US" sz="1300" dirty="0"/>
+          </a:p>
+        </p:txBody>
+      </p:sp>
+      <p:sp>
+        <p:nvSpPr>
+          <p:cNvPr id="31" name="Text 29"/>
+          <p:cNvSpPr/>
+          <p:nvPr/>
+        </p:nvSpPr>
+        <p:spPr>
+          <a:xfrm>
+            <a:off x="8319821" y="4453128"/>
+            <a:ext cx="1099261" cy="365760"/>
+          </a:xfrm>
+          <a:prstGeom prst="rect">
+            <a:avLst/>
+          </a:prstGeom>
+          <a:noFill/>
+          <a:ln/>
+        </p:spPr>
+        <p:txBody>
+          <a:bodyPr wrap="square" lIns="0" tIns="0" rIns="0" bIns="0" rtlCol="0" anchor="ctr"/>
+          <a:lstStyle/>
+          <a:p>
+            <a:pPr indent="0" marL="0">
+              <a:buNone/>
+            </a:pPr>
+            <a:r>
+              <a:rPr lang="en-US" sz="900" dirty="0">
+                <a:solidFill>
+                  <a:srgbClr val="8B98A6"/>
                 </a:solidFill>
                 <a:latin typeface="Calibri" pitchFamily="34" charset="0"/>
                 <a:ea typeface="Calibri" pitchFamily="34" charset="-122"/>
                 <a:cs typeface="Calibri" pitchFamily="34" charset="-120"/>
               </a:rPr>
-              <a:t>live dashboard</a:t>
-            </a:r>
-            <a:endParaRPr lang="en-US" sz="1050" dirty="0"/>
-          </a:p>
-        </p:txBody>
-      </p:sp>
-      <p:sp>
-        <p:nvSpPr>
-          <p:cNvPr id="31" name="Shape 29"/>
-          <p:cNvSpPr/>
-          <p:nvPr/>
-        </p:nvSpPr>
-        <p:spPr>
-          <a:xfrm>
-            <a:off x="10378440" y="3154680"/>
-            <a:ext cx="0" cy="365760"/>
-          </a:xfrm>
-          <a:prstGeom prst="line">
-            <a:avLst/>
-          </a:prstGeom>
-          <a:noFill/>
-          <a:ln w="25400">
+              <a:t>by type · time</a:t>
+            </a:r>
+            <a:endParaRPr lang="en-US" sz="900" dirty="0"/>
+          </a:p>
+        </p:txBody>
+      </p:sp>
+      <p:sp>
+        <p:nvSpPr>
+          <p:cNvPr id="32" name="Shape 30"/>
+          <p:cNvSpPr/>
+          <p:nvPr/>
+        </p:nvSpPr>
+        <p:spPr>
+          <a:xfrm>
+            <a:off x="9638538" y="3845052"/>
+            <a:ext cx="310896" cy="219456"/>
+          </a:xfrm>
+          <a:prstGeom prst="rightArrow">
+            <a:avLst/>
+          </a:prstGeom>
+          <a:solidFill>
+            <a:srgbClr val="8B98A6"/>
+          </a:solidFill>
+          <a:ln/>
+        </p:spPr>
+      </p:sp>
+      <p:sp>
+        <p:nvSpPr>
+          <p:cNvPr id="33" name="Shape 31"/>
+          <p:cNvSpPr/>
+          <p:nvPr/>
+        </p:nvSpPr>
+        <p:spPr>
+          <a:xfrm>
+            <a:off x="10022586" y="2971800"/>
+            <a:ext cx="1391869" cy="1965960"/>
+          </a:xfrm>
+          <a:prstGeom prst="roundRect">
+            <a:avLst>
+              <a:gd name="adj" fmla="val 7884"/>
+            </a:avLst>
+          </a:prstGeom>
+          <a:solidFill>
+            <a:srgbClr val="1A4249"/>
+          </a:solidFill>
+          <a:ln w="12700">
             <a:solidFill>
-              <a:srgbClr val="4FB0A6"/>
+              <a:srgbClr val="2E565D"/>
             </a:solidFill>
             <a:prstDash val="solid"/>
-            <a:tailEnd type="triangle"/>
           </a:ln>
         </p:spPr>
       </p:sp>
       <p:sp>
         <p:nvSpPr>
-          <p:cNvPr id="32" name="Text 30"/>
-          <p:cNvSpPr/>
-          <p:nvPr/>
-        </p:nvSpPr>
-        <p:spPr>
-          <a:xfrm>
-            <a:off x="640080" y="5257800"/>
-            <a:ext cx="10972800" cy="731520"/>
-          </a:xfrm>
-          <a:prstGeom prst="rect">
-            <a:avLst/>
-          </a:prstGeom>
-          <a:noFill/>
-          <a:ln/>
-        </p:spPr>
-        <p:txBody>
-          <a:bodyPr wrap="square" rtlCol="0" anchor="ctr"/>
-          <a:lstStyle/>
-          <a:p>
-            <a:pPr algn="ctr" indent="0" marL="0">
-              <a:buNone/>
-            </a:pPr>
-            <a:r>
-              <a:rPr lang="en-US" sz="1500" i="1" dirty="0">
-                <a:solidFill>
-                  <a:srgbClr val="0F6E6A"/>
+          <p:cNvPr id="34" name="Text 32"/>
+          <p:cNvSpPr/>
+          <p:nvPr/>
+        </p:nvSpPr>
+        <p:spPr>
+          <a:xfrm>
+            <a:off x="10168890" y="3154680"/>
+            <a:ext cx="1099261" cy="320040"/>
+          </a:xfrm>
+          <a:prstGeom prst="rect">
+            <a:avLst/>
+          </a:prstGeom>
+          <a:noFill/>
+          <a:ln/>
+        </p:spPr>
+        <p:txBody>
+          <a:bodyPr wrap="square" lIns="0" tIns="0" rIns="0" bIns="0" rtlCol="0" anchor="ctr"/>
+          <a:lstStyle/>
+          <a:p>
+            <a:pPr indent="0" marL="0">
+              <a:buNone/>
+            </a:pPr>
+            <a:r>
+              <a:rPr lang="en-US" sz="1100" dirty="0">
+                <a:solidFill>
+                  <a:srgbClr val="2FB6A8"/>
+                </a:solidFill>
+                <a:latin typeface="Consolas" pitchFamily="34" charset="0"/>
+                <a:ea typeface="Consolas" pitchFamily="34" charset="-122"/>
+                <a:cs typeface="Consolas" pitchFamily="34" charset="-120"/>
+              </a:rPr>
+              <a:t>06</a:t>
+            </a:r>
+            <a:endParaRPr lang="en-US" sz="1100" dirty="0"/>
+          </a:p>
+        </p:txBody>
+      </p:sp>
+      <p:sp>
+        <p:nvSpPr>
+          <p:cNvPr id="35" name="Text 33"/>
+          <p:cNvSpPr/>
+          <p:nvPr/>
+        </p:nvSpPr>
+        <p:spPr>
+          <a:xfrm>
+            <a:off x="10168890" y="3593592"/>
+            <a:ext cx="1099261" cy="868680"/>
+          </a:xfrm>
+          <a:prstGeom prst="rect">
+            <a:avLst/>
+          </a:prstGeom>
+          <a:noFill/>
+          <a:ln/>
+        </p:spPr>
+        <p:txBody>
+          <a:bodyPr wrap="square" lIns="0" tIns="0" rIns="0" bIns="0" rtlCol="0" anchor="t"/>
+          <a:lstStyle/>
+          <a:p>
+            <a:pPr indent="0" marL="0">
+              <a:lnSpc>
+                <a:spcPct val="96000"/>
+              </a:lnSpc>
+              <a:buNone/>
+            </a:pPr>
+            <a:r>
+              <a:rPr lang="en-US" sz="1300" b="1" dirty="0">
+                <a:solidFill>
+                  <a:srgbClr val="EDF3EF"/>
                 </a:solidFill>
                 <a:latin typeface="Calibri" pitchFamily="34" charset="0"/>
                 <a:ea typeface="Calibri" pitchFamily="34" charset="-122"/>
                 <a:cs typeface="Calibri" pitchFamily="34" charset="-120"/>
               </a:rPr>
-              <a:t>Only compact window summaries ever leave the pond; raw readings stay at the edge and alert rules fire on site, next to the fish.</a:t>
-            </a:r>
-            <a:endParaRPr lang="en-US" sz="1500" dirty="0"/>
+              <a:t>API GW + S3</a:t>
+            </a:r>
+            <a:endParaRPr lang="en-US" sz="1300" dirty="0"/>
+          </a:p>
+        </p:txBody>
+      </p:sp>
+      <p:sp>
+        <p:nvSpPr>
+          <p:cNvPr id="36" name="Text 34"/>
+          <p:cNvSpPr/>
+          <p:nvPr/>
+        </p:nvSpPr>
+        <p:spPr>
+          <a:xfrm>
+            <a:off x="10168890" y="4453128"/>
+            <a:ext cx="1099261" cy="365760"/>
+          </a:xfrm>
+          <a:prstGeom prst="rect">
+            <a:avLst/>
+          </a:prstGeom>
+          <a:noFill/>
+          <a:ln/>
+        </p:spPr>
+        <p:txBody>
+          <a:bodyPr wrap="square" lIns="0" tIns="0" rIns="0" bIns="0" rtlCol="0" anchor="ctr"/>
+          <a:lstStyle/>
+          <a:p>
+            <a:pPr indent="0" marL="0">
+              <a:buNone/>
+            </a:pPr>
+            <a:r>
+              <a:rPr lang="en-US" sz="900" dirty="0">
+                <a:solidFill>
+                  <a:srgbClr val="8B98A6"/>
+                </a:solidFill>
+                <a:latin typeface="Calibri" pitchFamily="34" charset="0"/>
+                <a:ea typeface="Calibri" pitchFamily="34" charset="-122"/>
+                <a:cs typeface="Calibri" pitchFamily="34" charset="-120"/>
+              </a:rPr>
+              <a:t>live dashboard</a:t>
+            </a:r>
+            <a:endParaRPr lang="en-US" sz="900" dirty="0"/>
           </a:p>
         </p:txBody>
       </p:sp>
@@ -2471,7 +2548,7 @@
     <p:bg>
       <p:bgPr>
         <a:solidFill>
-          <a:srgbClr val="FFFFFF"/>
+          <a:srgbClr val="12333A"/>
         </a:solidFill>
       </p:bgPr>
     </p:bg>
@@ -2491,14 +2568,200 @@
       </p:grpSpPr>
       <p:sp>
         <p:nvSpPr>
-          <p:cNvPr id="2" name="Text 0"/>
-          <p:cNvSpPr/>
-          <p:nvPr/>
-        </p:nvSpPr>
-        <p:spPr>
-          <a:xfrm>
-            <a:off x="640080" y="457200"/>
-            <a:ext cx="7315200" cy="640080"/>
+          <p:cNvPr id="2" name="Shape 0"/>
+          <p:cNvSpPr/>
+          <p:nvPr/>
+        </p:nvSpPr>
+        <p:spPr>
+          <a:xfrm>
+            <a:off x="9722815" y="-274320"/>
+            <a:ext cx="2743200" cy="2743200"/>
+          </a:xfrm>
+          <a:prstGeom prst="ellipse">
+            <a:avLst/>
+          </a:prstGeom>
+          <a:ln w="12700">
+            <a:solidFill>
+              <a:srgbClr val="2FB6A8"/>
+            </a:solidFill>
+            <a:prstDash val="solid"/>
+          </a:ln>
+        </p:spPr>
+      </p:sp>
+      <p:sp>
+        <p:nvSpPr>
+          <p:cNvPr id="3" name="Shape 1"/>
+          <p:cNvSpPr/>
+          <p:nvPr/>
+        </p:nvSpPr>
+        <p:spPr>
+          <a:xfrm>
+            <a:off x="10180015" y="182880"/>
+            <a:ext cx="1828800" cy="1828800"/>
+          </a:xfrm>
+          <a:prstGeom prst="ellipse">
+            <a:avLst/>
+          </a:prstGeom>
+          <a:ln w="12700">
+            <a:solidFill>
+              <a:srgbClr val="2FB6A8"/>
+            </a:solidFill>
+            <a:prstDash val="solid"/>
+          </a:ln>
+        </p:spPr>
+      </p:sp>
+      <p:sp>
+        <p:nvSpPr>
+          <p:cNvPr id="4" name="Shape 2"/>
+          <p:cNvSpPr/>
+          <p:nvPr/>
+        </p:nvSpPr>
+        <p:spPr>
+          <a:xfrm>
+            <a:off x="10637215" y="640080"/>
+            <a:ext cx="914400" cy="914400"/>
+          </a:xfrm>
+          <a:prstGeom prst="ellipse">
+            <a:avLst/>
+          </a:prstGeom>
+          <a:solidFill>
+            <a:srgbClr val="2FB6A8"/>
+          </a:solidFill>
+          <a:ln w="12700">
+            <a:solidFill>
+              <a:srgbClr val="2FB6A8"/>
+            </a:solidFill>
+            <a:prstDash val="solid"/>
+          </a:ln>
+        </p:spPr>
+      </p:sp>
+      <p:sp>
+        <p:nvSpPr>
+          <p:cNvPr id="5" name="Text 3"/>
+          <p:cNvSpPr/>
+          <p:nvPr/>
+        </p:nvSpPr>
+        <p:spPr>
+          <a:xfrm>
+            <a:off x="777240" y="731520"/>
+            <a:ext cx="914400" cy="640080"/>
+          </a:xfrm>
+          <a:prstGeom prst="rect">
+            <a:avLst/>
+          </a:prstGeom>
+          <a:noFill/>
+          <a:ln/>
+        </p:spPr>
+        <p:txBody>
+          <a:bodyPr wrap="square" lIns="0" tIns="0" rIns="0" bIns="0" rtlCol="0" anchor="ctr"/>
+          <a:lstStyle/>
+          <a:p>
+            <a:pPr indent="0" marL="0">
+              <a:buNone/>
+            </a:pPr>
+            <a:r>
+              <a:rPr lang="en-US" sz="3000" b="1" dirty="0">
+                <a:solidFill>
+                  <a:srgbClr val="2FB6A8"/>
+                </a:solidFill>
+                <a:latin typeface="Calibri" pitchFamily="34" charset="0"/>
+                <a:ea typeface="Calibri" pitchFamily="34" charset="-122"/>
+                <a:cs typeface="Calibri" pitchFamily="34" charset="-120"/>
+              </a:rPr>
+              <a:t>02</a:t>
+            </a:r>
+            <a:endParaRPr lang="en-US" sz="3000" dirty="0"/>
+          </a:p>
+        </p:txBody>
+      </p:sp>
+      <p:sp>
+        <p:nvSpPr>
+          <p:cNvPr id="6" name="Text 4"/>
+          <p:cNvSpPr/>
+          <p:nvPr/>
+        </p:nvSpPr>
+        <p:spPr>
+          <a:xfrm>
+            <a:off x="1645920" y="905256"/>
+            <a:ext cx="9768535" cy="274320"/>
+          </a:xfrm>
+          <a:prstGeom prst="rect">
+            <a:avLst/>
+          </a:prstGeom>
+          <a:noFill/>
+          <a:ln/>
+        </p:spPr>
+        <p:txBody>
+          <a:bodyPr wrap="square" lIns="0" tIns="0" rIns="0" bIns="0" rtlCol="0" anchor="ctr"/>
+          <a:lstStyle/>
+          <a:p>
+            <a:pPr indent="0" marL="0">
+              <a:buNone/>
+            </a:pPr>
+            <a:r>
+              <a:rPr lang="en-US" sz="1100" b="1" spc="200" kern="0" dirty="0">
+                <a:solidFill>
+                  <a:srgbClr val="8B98A6"/>
+                </a:solidFill>
+                <a:latin typeface="Calibri" pitchFamily="34" charset="0"/>
+                <a:ea typeface="Calibri" pitchFamily="34" charset="-122"/>
+                <a:cs typeface="Calibri" pitchFamily="34" charset="-120"/>
+              </a:rPr>
+              <a:t>LIVE DEMO</a:t>
+            </a:r>
+            <a:endParaRPr lang="en-US" sz="1100" dirty="0"/>
+          </a:p>
+        </p:txBody>
+      </p:sp>
+      <p:sp>
+        <p:nvSpPr>
+          <p:cNvPr id="7" name="Text 5"/>
+          <p:cNvSpPr/>
+          <p:nvPr/>
+        </p:nvSpPr>
+        <p:spPr>
+          <a:xfrm>
+            <a:off x="777240" y="1380744"/>
+            <a:ext cx="10637215" cy="640080"/>
+          </a:xfrm>
+          <a:prstGeom prst="rect">
+            <a:avLst/>
+          </a:prstGeom>
+          <a:noFill/>
+          <a:ln/>
+        </p:spPr>
+        <p:txBody>
+          <a:bodyPr wrap="square" lIns="0" tIns="0" rIns="0" bIns="0" rtlCol="0" anchor="ctr"/>
+          <a:lstStyle/>
+          <a:p>
+            <a:pPr indent="0" marL="0">
+              <a:buNone/>
+            </a:pPr>
+            <a:r>
+              <a:rPr lang="en-US" sz="2300" b="1" dirty="0">
+                <a:solidFill>
+                  <a:srgbClr val="EDF3EF"/>
+                </a:solidFill>
+                <a:latin typeface="Calibri" pitchFamily="34" charset="0"/>
+                <a:ea typeface="Calibri" pitchFamily="34" charset="-122"/>
+                <a:cs typeface="Calibri" pitchFamily="34" charset="-120"/>
+              </a:rPr>
+              <a:t>See it running on AWS</a:t>
+            </a:r>
+            <a:endParaRPr lang="en-US" sz="2300" dirty="0"/>
+          </a:p>
+        </p:txBody>
+      </p:sp>
+      <p:sp>
+        <p:nvSpPr>
+          <p:cNvPr id="8" name="Text 6"/>
+          <p:cNvSpPr/>
+          <p:nvPr/>
+        </p:nvSpPr>
+        <p:spPr>
+          <a:xfrm>
+            <a:off x="777240" y="1901952"/>
+            <a:ext cx="10637215" cy="274320"/>
           </a:xfrm>
           <a:prstGeom prst="rect">
             <a:avLst/>
@@ -2514,48 +2777,9 @@
               <a:buNone/>
             </a:pPr>
             <a:r>
-              <a:rPr lang="en-US" sz="3000" b="1" dirty="0">
-                <a:solidFill>
-                  <a:srgbClr val="0F2E31"/>
-                </a:solidFill>
-                <a:latin typeface="Cambria" pitchFamily="34" charset="0"/>
-                <a:ea typeface="Cambria" pitchFamily="34" charset="-122"/>
-                <a:cs typeface="Cambria" pitchFamily="34" charset="-120"/>
-              </a:rPr>
-              <a:t>Live Demo</a:t>
-            </a:r>
-            <a:endParaRPr lang="en-US" sz="3000" dirty="0"/>
-          </a:p>
-        </p:txBody>
-      </p:sp>
-      <p:sp>
-        <p:nvSpPr>
-          <p:cNvPr id="3" name="Text 1"/>
-          <p:cNvSpPr/>
-          <p:nvPr/>
-        </p:nvSpPr>
-        <p:spPr>
-          <a:xfrm>
-            <a:off x="658368" y="1143000"/>
-            <a:ext cx="10972800" cy="365760"/>
-          </a:xfrm>
-          <a:prstGeom prst="rect">
-            <a:avLst/>
-          </a:prstGeom>
-          <a:noFill/>
-          <a:ln/>
-        </p:spPr>
-        <p:txBody>
-          <a:bodyPr wrap="square" rtlCol="0" anchor="ctr"/>
-          <a:lstStyle/>
-          <a:p>
-            <a:pPr indent="0" marL="0">
-              <a:buNone/>
-            </a:pPr>
-            <a:r>
-              <a:rPr lang="en-US" sz="1400" dirty="0">
-                <a:solidFill>
-                  <a:srgbClr val="1E9188"/>
+              <a:rPr lang="en-US" sz="1100" dirty="0">
+                <a:solidFill>
+                  <a:srgbClr val="2FB6A8"/>
                 </a:solidFill>
                 <a:latin typeface="Consolas" pitchFamily="34" charset="0"/>
                 <a:ea typeface="Consolas" pitchFamily="34" charset="-122"/>
@@ -2563,32 +2787,32 @@
               </a:rPr>
               <a:t>aff-frontend-713939620116.s3.us-east-1.amazonaws.com</a:t>
             </a:r>
-            <a:endParaRPr lang="en-US" sz="1400" dirty="0"/>
-          </a:p>
-        </p:txBody>
-      </p:sp>
-      <p:sp>
-        <p:nvSpPr>
-          <p:cNvPr id="4" name="Shape 2"/>
-          <p:cNvSpPr/>
-          <p:nvPr/>
-        </p:nvSpPr>
-        <p:spPr>
-          <a:xfrm>
-            <a:off x="640080" y="1828800"/>
-            <a:ext cx="10881360" cy="1371600"/>
+            <a:endParaRPr lang="en-US" sz="1100" dirty="0"/>
+          </a:p>
+        </p:txBody>
+      </p:sp>
+      <p:sp>
+        <p:nvSpPr>
+          <p:cNvPr id="9" name="Shape 7"/>
+          <p:cNvSpPr/>
+          <p:nvPr/>
+        </p:nvSpPr>
+        <p:spPr>
+          <a:xfrm>
+            <a:off x="777240" y="2514600"/>
+            <a:ext cx="3301898" cy="3566160"/>
           </a:xfrm>
           <a:prstGeom prst="roundRect">
             <a:avLst>
-              <a:gd name="adj" fmla="val 6667"/>
+              <a:gd name="adj" fmla="val 3323"/>
             </a:avLst>
           </a:prstGeom>
           <a:solidFill>
-            <a:srgbClr val="EDF6F5"/>
-          </a:solidFill>
-          <a:ln w="15240">
+            <a:srgbClr val="1A4249"/>
+          </a:solidFill>
+          <a:ln w="12700">
             <a:solidFill>
-              <a:srgbClr val="1E9188"/>
+              <a:srgbClr val="2E565D"/>
             </a:solidFill>
             <a:prstDash val="solid"/>
           </a:ln>
@@ -2596,34 +2820,14 @@
       </p:sp>
       <p:sp>
         <p:nvSpPr>
-          <p:cNvPr id="5" name="Shape 3"/>
-          <p:cNvSpPr/>
-          <p:nvPr/>
-        </p:nvSpPr>
-        <p:spPr>
-          <a:xfrm>
-            <a:off x="960120" y="2203704"/>
-            <a:ext cx="621792" cy="621792"/>
-          </a:xfrm>
-          <a:prstGeom prst="ellipse">
-            <a:avLst/>
-          </a:prstGeom>
-          <a:solidFill>
-            <a:srgbClr val="0F6E6A"/>
-          </a:solidFill>
-          <a:ln/>
-        </p:spPr>
-      </p:sp>
-      <p:sp>
-        <p:nvSpPr>
-          <p:cNvPr id="6" name="Text 4"/>
-          <p:cNvSpPr/>
-          <p:nvPr/>
-        </p:nvSpPr>
-        <p:spPr>
-          <a:xfrm>
-            <a:off x="960120" y="2203704"/>
-            <a:ext cx="621792" cy="621792"/>
+          <p:cNvPr id="10" name="Text 8"/>
+          <p:cNvSpPr/>
+          <p:nvPr/>
+        </p:nvSpPr>
+        <p:spPr>
+          <a:xfrm>
+            <a:off x="1051560" y="2752344"/>
+            <a:ext cx="1828800" cy="777240"/>
           </a:xfrm>
           <a:prstGeom prst="rect">
             <a:avLst/>
@@ -2635,127 +2839,130 @@
           <a:bodyPr wrap="square" lIns="0" tIns="0" rIns="0" bIns="0" rtlCol="0" anchor="ctr"/>
           <a:lstStyle/>
           <a:p>
-            <a:pPr algn="ctr" indent="0" marL="0">
-              <a:buNone/>
-            </a:pPr>
-            <a:r>
-              <a:rPr lang="en-US" sz="2200" b="1" dirty="0">
-                <a:solidFill>
-                  <a:srgbClr val="FFFFFF"/>
-                </a:solidFill>
-                <a:latin typeface="Cambria" pitchFamily="34" charset="0"/>
-                <a:ea typeface="Cambria" pitchFamily="34" charset="-122"/>
-                <a:cs typeface="Cambria" pitchFamily="34" charset="-120"/>
-              </a:rPr>
-              <a:t>1</a:t>
-            </a:r>
-            <a:endParaRPr lang="en-US" sz="2200" dirty="0"/>
-          </a:p>
-        </p:txBody>
-      </p:sp>
-      <p:sp>
-        <p:nvSpPr>
-          <p:cNvPr id="7" name="Text 5"/>
-          <p:cNvSpPr/>
-          <p:nvPr/>
-        </p:nvSpPr>
-        <p:spPr>
-          <a:xfrm>
-            <a:off x="1828800" y="2029968"/>
-            <a:ext cx="9418320" cy="411480"/>
-          </a:xfrm>
-          <a:prstGeom prst="rect">
-            <a:avLst/>
-          </a:prstGeom>
-          <a:noFill/>
-          <a:ln/>
-        </p:spPr>
-        <p:txBody>
-          <a:bodyPr wrap="square" lIns="0" tIns="0" rIns="0" bIns="0" rtlCol="0" anchor="ctr"/>
-          <a:lstStyle/>
-          <a:p>
-            <a:pPr indent="0" marL="0">
-              <a:buNone/>
-            </a:pPr>
-            <a:r>
-              <a:rPr lang="en-US" sz="1700" b="1" dirty="0">
-                <a:solidFill>
-                  <a:srgbClr val="0F2E31"/>
+            <a:pPr indent="0" marL="0">
+              <a:buNone/>
+            </a:pPr>
+            <a:r>
+              <a:rPr lang="en-US" sz="3800" b="1" dirty="0">
+                <a:solidFill>
+                  <a:srgbClr val="2FB6A8"/>
                 </a:solidFill>
                 <a:latin typeface="Calibri" pitchFamily="34" charset="0"/>
                 <a:ea typeface="Calibri" pitchFamily="34" charset="-122"/>
                 <a:cs typeface="Calibri" pitchFamily="34" charset="-120"/>
               </a:rPr>
-              <a:t>Two ponds, five water metrics</a:t>
-            </a:r>
-            <a:endParaRPr lang="en-US" sz="1700" dirty="0"/>
-          </a:p>
-        </p:txBody>
-      </p:sp>
-      <p:sp>
-        <p:nvSpPr>
-          <p:cNvPr id="8" name="Text 6"/>
-          <p:cNvSpPr/>
-          <p:nvPr/>
-        </p:nvSpPr>
-        <p:spPr>
-          <a:xfrm>
-            <a:off x="1828800" y="2450592"/>
-            <a:ext cx="9418320" cy="594360"/>
-          </a:xfrm>
-          <a:prstGeom prst="rect">
-            <a:avLst/>
-          </a:prstGeom>
-          <a:noFill/>
-          <a:ln/>
-        </p:spPr>
-        <p:txBody>
-          <a:bodyPr wrap="square" lIns="0" tIns="0" rIns="0" bIns="0" rtlCol="0" anchor="ctr"/>
+              <a:t>01</a:t>
+            </a:r>
+            <a:endParaRPr lang="en-US" sz="3800" dirty="0"/>
+          </a:p>
+        </p:txBody>
+      </p:sp>
+      <p:sp>
+        <p:nvSpPr>
+          <p:cNvPr id="11" name="Text 9"/>
+          <p:cNvSpPr/>
+          <p:nvPr/>
+        </p:nvSpPr>
+        <p:spPr>
+          <a:xfrm>
+            <a:off x="1069848" y="3566160"/>
+            <a:ext cx="2753258" cy="868680"/>
+          </a:xfrm>
+          <a:prstGeom prst="rect">
+            <a:avLst/>
+          </a:prstGeom>
+          <a:noFill/>
+          <a:ln/>
+        </p:spPr>
+        <p:txBody>
+          <a:bodyPr wrap="square" lIns="0" tIns="0" rIns="0" bIns="0" rtlCol="0" anchor="t"/>
           <a:lstStyle/>
           <a:p>
             <a:pPr indent="0" marL="0">
               <a:lnSpc>
-                <a:spcPct val="105000"/>
+                <a:spcPct val="100000"/>
               </a:lnSpc>
               <a:buNone/>
             </a:pPr>
             <a:r>
-              <a:rPr lang="en-US" sz="1300" dirty="0">
-                <a:solidFill>
-                  <a:srgbClr val="557370"/>
+              <a:rPr lang="en-US" sz="1550" b="1" dirty="0">
+                <a:solidFill>
+                  <a:srgbClr val="EDF3EF"/>
                 </a:solidFill>
                 <a:latin typeface="Calibri" pitchFamily="34" charset="0"/>
                 <a:ea typeface="Calibri" pitchFamily="34" charset="-122"/>
                 <a:cs typeface="Calibri" pitchFamily="34" charset="-120"/>
               </a:rPr>
+              <a:t>Two ponds, five water metrics</a:t>
+            </a:r>
+            <a:endParaRPr lang="en-US" sz="1550" dirty="0"/>
+          </a:p>
+        </p:txBody>
+      </p:sp>
+      <p:sp>
+        <p:nvSpPr>
+          <p:cNvPr id="12" name="Text 10"/>
+          <p:cNvSpPr/>
+          <p:nvPr/>
+        </p:nvSpPr>
+        <p:spPr>
+          <a:xfrm>
+            <a:off x="1069848" y="4434840"/>
+            <a:ext cx="2753258" cy="1463040"/>
+          </a:xfrm>
+          <a:prstGeom prst="rect">
+            <a:avLst/>
+          </a:prstGeom>
+          <a:noFill/>
+          <a:ln/>
+        </p:spPr>
+        <p:txBody>
+          <a:bodyPr wrap="square" lIns="0" tIns="0" rIns="0" bIns="0" rtlCol="0" anchor="ctr"/>
+          <a:lstStyle/>
+          <a:p>
+            <a:pPr indent="0" marL="0">
+              <a:lnSpc>
+                <a:spcPct val="120000"/>
+              </a:lnSpc>
+              <a:buNone/>
+            </a:pPr>
+            <a:r>
+              <a:rPr lang="en-US" sz="1200" dirty="0">
+                <a:solidFill>
+                  <a:srgbClr val="8B98A6"/>
+                </a:solidFill>
+                <a:latin typeface="Calibri" pitchFamily="34" charset="0"/>
+                <a:ea typeface="Calibri" pitchFamily="34" charset="-122"/>
+                <a:cs typeface="Calibri" pitchFamily="34" charset="-120"/>
+              </a:rPr>
               <a:t>Temperature, dissolved oxygen, pH, ammonia and feed live for both ponds, freshest reading under two seconds old.</a:t>
             </a:r>
-            <a:endParaRPr lang="en-US" sz="1300" dirty="0"/>
-          </a:p>
-        </p:txBody>
-      </p:sp>
-      <p:sp>
-        <p:nvSpPr>
-          <p:cNvPr id="9" name="Shape 7"/>
-          <p:cNvSpPr/>
-          <p:nvPr/>
-        </p:nvSpPr>
-        <p:spPr>
-          <a:xfrm>
-            <a:off x="640080" y="3346704"/>
-            <a:ext cx="10881360" cy="1371600"/>
+            <a:endParaRPr lang="en-US" sz="1200" dirty="0"/>
+          </a:p>
+        </p:txBody>
+      </p:sp>
+      <p:sp>
+        <p:nvSpPr>
+          <p:cNvPr id="13" name="Shape 11"/>
+          <p:cNvSpPr/>
+          <p:nvPr/>
+        </p:nvSpPr>
+        <p:spPr>
+          <a:xfrm>
+            <a:off x="4444898" y="2514600"/>
+            <a:ext cx="3301898" cy="3566160"/>
           </a:xfrm>
           <a:prstGeom prst="roundRect">
             <a:avLst>
-              <a:gd name="adj" fmla="val 6667"/>
+              <a:gd name="adj" fmla="val 3323"/>
             </a:avLst>
           </a:prstGeom>
           <a:solidFill>
-            <a:srgbClr val="EDF6F5"/>
-          </a:solidFill>
-          <a:ln w="15240">
+            <a:srgbClr val="1A4249"/>
+          </a:solidFill>
+          <a:ln w="12700">
             <a:solidFill>
-              <a:srgbClr val="1E9188"/>
+              <a:srgbClr val="2E565D"/>
             </a:solidFill>
             <a:prstDash val="solid"/>
           </a:ln>
@@ -2763,34 +2970,14 @@
       </p:sp>
       <p:sp>
         <p:nvSpPr>
-          <p:cNvPr id="10" name="Shape 8"/>
-          <p:cNvSpPr/>
-          <p:nvPr/>
-        </p:nvSpPr>
-        <p:spPr>
-          <a:xfrm>
-            <a:off x="960120" y="3721608"/>
-            <a:ext cx="621792" cy="621792"/>
-          </a:xfrm>
-          <a:prstGeom prst="ellipse">
-            <a:avLst/>
-          </a:prstGeom>
-          <a:solidFill>
-            <a:srgbClr val="0F6E6A"/>
-          </a:solidFill>
-          <a:ln/>
-        </p:spPr>
-      </p:sp>
-      <p:sp>
-        <p:nvSpPr>
-          <p:cNvPr id="11" name="Text 9"/>
-          <p:cNvSpPr/>
-          <p:nvPr/>
-        </p:nvSpPr>
-        <p:spPr>
-          <a:xfrm>
-            <a:off x="960120" y="3721608"/>
-            <a:ext cx="621792" cy="621792"/>
+          <p:cNvPr id="14" name="Text 12"/>
+          <p:cNvSpPr/>
+          <p:nvPr/>
+        </p:nvSpPr>
+        <p:spPr>
+          <a:xfrm>
+            <a:off x="4719218" y="2752344"/>
+            <a:ext cx="1828800" cy="777240"/>
           </a:xfrm>
           <a:prstGeom prst="rect">
             <a:avLst/>
@@ -2802,127 +2989,130 @@
           <a:bodyPr wrap="square" lIns="0" tIns="0" rIns="0" bIns="0" rtlCol="0" anchor="ctr"/>
           <a:lstStyle/>
           <a:p>
-            <a:pPr algn="ctr" indent="0" marL="0">
-              <a:buNone/>
-            </a:pPr>
-            <a:r>
-              <a:rPr lang="en-US" sz="2200" b="1" dirty="0">
-                <a:solidFill>
-                  <a:srgbClr val="FFFFFF"/>
-                </a:solidFill>
-                <a:latin typeface="Cambria" pitchFamily="34" charset="0"/>
-                <a:ea typeface="Cambria" pitchFamily="34" charset="-122"/>
-                <a:cs typeface="Cambria" pitchFamily="34" charset="-120"/>
-              </a:rPr>
-              <a:t>2</a:t>
-            </a:r>
-            <a:endParaRPr lang="en-US" sz="2200" dirty="0"/>
-          </a:p>
-        </p:txBody>
-      </p:sp>
-      <p:sp>
-        <p:nvSpPr>
-          <p:cNvPr id="12" name="Text 10"/>
-          <p:cNvSpPr/>
-          <p:nvPr/>
-        </p:nvSpPr>
-        <p:spPr>
-          <a:xfrm>
-            <a:off x="1828800" y="3547872"/>
-            <a:ext cx="9418320" cy="411480"/>
-          </a:xfrm>
-          <a:prstGeom prst="rect">
-            <a:avLst/>
-          </a:prstGeom>
-          <a:noFill/>
-          <a:ln/>
-        </p:spPr>
-        <p:txBody>
-          <a:bodyPr wrap="square" lIns="0" tIns="0" rIns="0" bIns="0" rtlCol="0" anchor="ctr"/>
-          <a:lstStyle/>
-          <a:p>
-            <a:pPr indent="0" marL="0">
-              <a:buNone/>
-            </a:pPr>
-            <a:r>
-              <a:rPr lang="en-US" sz="1700" b="1" dirty="0">
-                <a:solidFill>
-                  <a:srgbClr val="0F2E31"/>
+            <a:pPr indent="0" marL="0">
+              <a:buNone/>
+            </a:pPr>
+            <a:r>
+              <a:rPr lang="en-US" sz="3800" b="1" dirty="0">
+                <a:solidFill>
+                  <a:srgbClr val="2FB6A8"/>
                 </a:solidFill>
                 <a:latin typeface="Calibri" pitchFamily="34" charset="0"/>
                 <a:ea typeface="Calibri" pitchFamily="34" charset="-122"/>
                 <a:cs typeface="Calibri" pitchFamily="34" charset="-120"/>
               </a:rPr>
-              <a:t>Four alerts firing at once</a:t>
-            </a:r>
-            <a:endParaRPr lang="en-US" sz="1700" dirty="0"/>
-          </a:p>
-        </p:txBody>
-      </p:sp>
-      <p:sp>
-        <p:nvSpPr>
-          <p:cNvPr id="13" name="Text 11"/>
-          <p:cNvSpPr/>
-          <p:nvPr/>
-        </p:nvSpPr>
-        <p:spPr>
-          <a:xfrm>
-            <a:off x="1828800" y="3968496"/>
-            <a:ext cx="9418320" cy="594360"/>
-          </a:xfrm>
-          <a:prstGeom prst="rect">
-            <a:avLst/>
-          </a:prstGeom>
-          <a:noFill/>
-          <a:ln/>
-        </p:spPr>
-        <p:txBody>
-          <a:bodyPr wrap="square" lIns="0" tIns="0" rIns="0" bIns="0" rtlCol="0" anchor="ctr"/>
+              <a:t>02</a:t>
+            </a:r>
+            <a:endParaRPr lang="en-US" sz="3800" dirty="0"/>
+          </a:p>
+        </p:txBody>
+      </p:sp>
+      <p:sp>
+        <p:nvSpPr>
+          <p:cNvPr id="15" name="Text 13"/>
+          <p:cNvSpPr/>
+          <p:nvPr/>
+        </p:nvSpPr>
+        <p:spPr>
+          <a:xfrm>
+            <a:off x="4737506" y="3566160"/>
+            <a:ext cx="2753258" cy="868680"/>
+          </a:xfrm>
+          <a:prstGeom prst="rect">
+            <a:avLst/>
+          </a:prstGeom>
+          <a:noFill/>
+          <a:ln/>
+        </p:spPr>
+        <p:txBody>
+          <a:bodyPr wrap="square" lIns="0" tIns="0" rIns="0" bIns="0" rtlCol="0" anchor="t"/>
           <a:lstStyle/>
           <a:p>
             <a:pPr indent="0" marL="0">
               <a:lnSpc>
-                <a:spcPct val="105000"/>
+                <a:spcPct val="100000"/>
               </a:lnSpc>
               <a:buNone/>
             </a:pPr>
             <a:r>
-              <a:rPr lang="en-US" sz="1300" dirty="0">
-                <a:solidFill>
-                  <a:srgbClr val="557370"/>
+              <a:rPr lang="en-US" sz="1550" b="1" dirty="0">
+                <a:solidFill>
+                  <a:srgbClr val="EDF3EF"/>
                 </a:solidFill>
                 <a:latin typeface="Calibri" pitchFamily="34" charset="0"/>
                 <a:ea typeface="Calibri" pitchFamily="34" charset="-122"/>
                 <a:cs typeface="Calibri" pitchFamily="34" charset="-120"/>
               </a:rPr>
+              <a:t>Four alerts firing at once</a:t>
+            </a:r>
+            <a:endParaRPr lang="en-US" sz="1550" dirty="0"/>
+          </a:p>
+        </p:txBody>
+      </p:sp>
+      <p:sp>
+        <p:nvSpPr>
+          <p:cNvPr id="16" name="Text 14"/>
+          <p:cNvSpPr/>
+          <p:nvPr/>
+        </p:nvSpPr>
+        <p:spPr>
+          <a:xfrm>
+            <a:off x="4737506" y="4434840"/>
+            <a:ext cx="2753258" cy="1463040"/>
+          </a:xfrm>
+          <a:prstGeom prst="rect">
+            <a:avLst/>
+          </a:prstGeom>
+          <a:noFill/>
+          <a:ln/>
+        </p:spPr>
+        <p:txBody>
+          <a:bodyPr wrap="square" lIns="0" tIns="0" rIns="0" bIns="0" rtlCol="0" anchor="ctr"/>
+          <a:lstStyle/>
+          <a:p>
+            <a:pPr indent="0" marL="0">
+              <a:lnSpc>
+                <a:spcPct val="120000"/>
+              </a:lnSpc>
+              <a:buNone/>
+            </a:pPr>
+            <a:r>
+              <a:rPr lang="en-US" sz="1200" dirty="0">
+                <a:solidFill>
+                  <a:srgbClr val="8B98A6"/>
+                </a:solidFill>
+                <a:latin typeface="Calibri" pitchFamily="34" charset="0"/>
+                <a:ea typeface="Calibri" pitchFamily="34" charset="-122"/>
+                <a:cs typeface="Calibri" pitchFamily="34" charset="-120"/>
+              </a:rPr>
               <a:t>Heat stress, hypoxia and acidic risk on pond-1 and alkaline risk on pond-2 are all live on the board right now.</a:t>
             </a:r>
-            <a:endParaRPr lang="en-US" sz="1300" dirty="0"/>
-          </a:p>
-        </p:txBody>
-      </p:sp>
-      <p:sp>
-        <p:nvSpPr>
-          <p:cNvPr id="14" name="Shape 12"/>
-          <p:cNvSpPr/>
-          <p:nvPr/>
-        </p:nvSpPr>
-        <p:spPr>
-          <a:xfrm>
-            <a:off x="640080" y="4864608"/>
-            <a:ext cx="10881360" cy="1371600"/>
+            <a:endParaRPr lang="en-US" sz="1200" dirty="0"/>
+          </a:p>
+        </p:txBody>
+      </p:sp>
+      <p:sp>
+        <p:nvSpPr>
+          <p:cNvPr id="17" name="Shape 15"/>
+          <p:cNvSpPr/>
+          <p:nvPr/>
+        </p:nvSpPr>
+        <p:spPr>
+          <a:xfrm>
+            <a:off x="8112557" y="2514600"/>
+            <a:ext cx="3301898" cy="3566160"/>
           </a:xfrm>
           <a:prstGeom prst="roundRect">
             <a:avLst>
-              <a:gd name="adj" fmla="val 6667"/>
+              <a:gd name="adj" fmla="val 3323"/>
             </a:avLst>
           </a:prstGeom>
           <a:solidFill>
-            <a:srgbClr val="EDF6F5"/>
-          </a:solidFill>
-          <a:ln w="15240">
+            <a:srgbClr val="1A4249"/>
+          </a:solidFill>
+          <a:ln w="12700">
             <a:solidFill>
-              <a:srgbClr val="1E9188"/>
+              <a:srgbClr val="2E565D"/>
             </a:solidFill>
             <a:prstDash val="solid"/>
           </a:ln>
@@ -2930,34 +3120,14 @@
       </p:sp>
       <p:sp>
         <p:nvSpPr>
-          <p:cNvPr id="15" name="Shape 13"/>
-          <p:cNvSpPr/>
-          <p:nvPr/>
-        </p:nvSpPr>
-        <p:spPr>
-          <a:xfrm>
-            <a:off x="960120" y="5239512"/>
-            <a:ext cx="621792" cy="621792"/>
-          </a:xfrm>
-          <a:prstGeom prst="ellipse">
-            <a:avLst/>
-          </a:prstGeom>
-          <a:solidFill>
-            <a:srgbClr val="0F6E6A"/>
-          </a:solidFill>
-          <a:ln/>
-        </p:spPr>
-      </p:sp>
-      <p:sp>
-        <p:nvSpPr>
-          <p:cNvPr id="16" name="Text 14"/>
-          <p:cNvSpPr/>
-          <p:nvPr/>
-        </p:nvSpPr>
-        <p:spPr>
-          <a:xfrm>
-            <a:off x="960120" y="5239512"/>
-            <a:ext cx="621792" cy="621792"/>
+          <p:cNvPr id="18" name="Text 16"/>
+          <p:cNvSpPr/>
+          <p:nvPr/>
+        </p:nvSpPr>
+        <p:spPr>
+          <a:xfrm>
+            <a:off x="8386877" y="2752344"/>
+            <a:ext cx="1828800" cy="777240"/>
           </a:xfrm>
           <a:prstGeom prst="rect">
             <a:avLst/>
@@ -2969,102 +3139,105 @@
           <a:bodyPr wrap="square" lIns="0" tIns="0" rIns="0" bIns="0" rtlCol="0" anchor="ctr"/>
           <a:lstStyle/>
           <a:p>
-            <a:pPr algn="ctr" indent="0" marL="0">
-              <a:buNone/>
-            </a:pPr>
-            <a:r>
-              <a:rPr lang="en-US" sz="2200" b="1" dirty="0">
-                <a:solidFill>
-                  <a:srgbClr val="FFFFFF"/>
-                </a:solidFill>
-                <a:latin typeface="Cambria" pitchFamily="34" charset="0"/>
-                <a:ea typeface="Cambria" pitchFamily="34" charset="-122"/>
-                <a:cs typeface="Cambria" pitchFamily="34" charset="-120"/>
-              </a:rPr>
-              <a:t>3</a:t>
-            </a:r>
-            <a:endParaRPr lang="en-US" sz="2200" dirty="0"/>
-          </a:p>
-        </p:txBody>
-      </p:sp>
-      <p:sp>
-        <p:nvSpPr>
-          <p:cNvPr id="17" name="Text 15"/>
-          <p:cNvSpPr/>
-          <p:nvPr/>
-        </p:nvSpPr>
-        <p:spPr>
-          <a:xfrm>
-            <a:off x="1828800" y="5065776"/>
-            <a:ext cx="9418320" cy="411480"/>
-          </a:xfrm>
-          <a:prstGeom prst="rect">
-            <a:avLst/>
-          </a:prstGeom>
-          <a:noFill/>
-          <a:ln/>
-        </p:spPr>
-        <p:txBody>
-          <a:bodyPr wrap="square" lIns="0" tIns="0" rIns="0" bIns="0" rtlCol="0" anchor="ctr"/>
-          <a:lstStyle/>
-          <a:p>
-            <a:pPr indent="0" marL="0">
-              <a:buNone/>
-            </a:pPr>
-            <a:r>
-              <a:rPr lang="en-US" sz="1700" b="1" dirty="0">
-                <a:solidFill>
-                  <a:srgbClr val="0F2E31"/>
+            <a:pPr indent="0" marL="0">
+              <a:buNone/>
+            </a:pPr>
+            <a:r>
+              <a:rPr lang="en-US" sz="3800" b="1" dirty="0">
+                <a:solidFill>
+                  <a:srgbClr val="2FB6A8"/>
                 </a:solidFill>
                 <a:latin typeface="Calibri" pitchFamily="34" charset="0"/>
                 <a:ea typeface="Calibri" pitchFamily="34" charset="-122"/>
                 <a:cs typeface="Calibri" pitchFamily="34" charset="-120"/>
               </a:rPr>
-              <a:t>Real data, climbing</a:t>
-            </a:r>
-            <a:endParaRPr lang="en-US" sz="1700" dirty="0"/>
-          </a:p>
-        </p:txBody>
-      </p:sp>
-      <p:sp>
-        <p:nvSpPr>
-          <p:cNvPr id="18" name="Text 16"/>
-          <p:cNvSpPr/>
-          <p:nvPr/>
-        </p:nvSpPr>
-        <p:spPr>
-          <a:xfrm>
-            <a:off x="1828800" y="5486400"/>
-            <a:ext cx="9418320" cy="594360"/>
-          </a:xfrm>
-          <a:prstGeom prst="rect">
-            <a:avLst/>
-          </a:prstGeom>
-          <a:noFill/>
-          <a:ln/>
-        </p:spPr>
-        <p:txBody>
-          <a:bodyPr wrap="square" lIns="0" tIns="0" rIns="0" bIns="0" rtlCol="0" anchor="ctr"/>
+              <a:t>03</a:t>
+            </a:r>
+            <a:endParaRPr lang="en-US" sz="3800" dirty="0"/>
+          </a:p>
+        </p:txBody>
+      </p:sp>
+      <p:sp>
+        <p:nvSpPr>
+          <p:cNvPr id="19" name="Text 17"/>
+          <p:cNvSpPr/>
+          <p:nvPr/>
+        </p:nvSpPr>
+        <p:spPr>
+          <a:xfrm>
+            <a:off x="8405165" y="3566160"/>
+            <a:ext cx="2753258" cy="868680"/>
+          </a:xfrm>
+          <a:prstGeom prst="rect">
+            <a:avLst/>
+          </a:prstGeom>
+          <a:noFill/>
+          <a:ln/>
+        </p:spPr>
+        <p:txBody>
+          <a:bodyPr wrap="square" lIns="0" tIns="0" rIns="0" bIns="0" rtlCol="0" anchor="t"/>
           <a:lstStyle/>
           <a:p>
             <a:pPr indent="0" marL="0">
               <a:lnSpc>
-                <a:spcPct val="105000"/>
+                <a:spcPct val="100000"/>
               </a:lnSpc>
               <a:buNone/>
             </a:pPr>
             <a:r>
-              <a:rPr lang="en-US" sz="1300" dirty="0">
-                <a:solidFill>
-                  <a:srgbClr val="557370"/>
+              <a:rPr lang="en-US" sz="1550" b="1" dirty="0">
+                <a:solidFill>
+                  <a:srgbClr val="EDF3EF"/>
                 </a:solidFill>
                 <a:latin typeface="Calibri" pitchFamily="34" charset="0"/>
                 <a:ea typeface="Calibri" pitchFamily="34" charset="-122"/>
                 <a:cs typeface="Calibri" pitchFamily="34" charset="-120"/>
               </a:rPr>
+              <a:t>Real data, climbing</a:t>
+            </a:r>
+            <a:endParaRPr lang="en-US" sz="1550" dirty="0"/>
+          </a:p>
+        </p:txBody>
+      </p:sp>
+      <p:sp>
+        <p:nvSpPr>
+          <p:cNvPr id="20" name="Text 18"/>
+          <p:cNvSpPr/>
+          <p:nvPr/>
+        </p:nvSpPr>
+        <p:spPr>
+          <a:xfrm>
+            <a:off x="8405165" y="4434840"/>
+            <a:ext cx="2753258" cy="1463040"/>
+          </a:xfrm>
+          <a:prstGeom prst="rect">
+            <a:avLst/>
+          </a:prstGeom>
+          <a:noFill/>
+          <a:ln/>
+        </p:spPr>
+        <p:txBody>
+          <a:bodyPr wrap="square" lIns="0" tIns="0" rIns="0" bIns="0" rtlCol="0" anchor="ctr"/>
+          <a:lstStyle/>
+          <a:p>
+            <a:pPr indent="0" marL="0">
+              <a:lnSpc>
+                <a:spcPct val="120000"/>
+              </a:lnSpc>
+              <a:buNone/>
+            </a:pPr>
+            <a:r>
+              <a:rPr lang="en-US" sz="1200" dirty="0">
+                <a:solidFill>
+                  <a:srgbClr val="8B98A6"/>
+                </a:solidFill>
+                <a:latin typeface="Calibri" pitchFamily="34" charset="0"/>
+                <a:ea typeface="Calibri" pitchFamily="34" charset="-122"/>
+                <a:cs typeface="Calibri" pitchFamily="34" charset="-120"/>
+              </a:rPr>
               <a:t>The stored-record count reads 590 and keeps rising as new windows land, so the board is reading live data, not a snapshot.</a:t>
             </a:r>
-            <a:endParaRPr lang="en-US" sz="1300" dirty="0"/>
+            <a:endParaRPr lang="en-US" sz="1200" dirty="0"/>
           </a:p>
         </p:txBody>
       </p:sp>
@@ -3082,7 +3255,7 @@
     <p:bg>
       <p:bgPr>
         <a:solidFill>
-          <a:srgbClr val="FFFFFF"/>
+          <a:srgbClr val="12333A"/>
         </a:solidFill>
       </p:bgPr>
     </p:bg>
@@ -3102,65 +3275,21 @@
       </p:grpSpPr>
       <p:sp>
         <p:nvSpPr>
-          <p:cNvPr id="2" name="Text 0"/>
-          <p:cNvSpPr/>
-          <p:nvPr/>
-        </p:nvSpPr>
-        <p:spPr>
-          <a:xfrm>
-            <a:off x="640080" y="502920"/>
-            <a:ext cx="10972800" cy="822960"/>
-          </a:xfrm>
-          <a:prstGeom prst="rect">
-            <a:avLst/>
-          </a:prstGeom>
-          <a:noFill/>
-          <a:ln/>
-        </p:spPr>
-        <p:txBody>
-          <a:bodyPr wrap="square" rtlCol="0" anchor="t"/>
-          <a:lstStyle/>
-          <a:p>
-            <a:pPr indent="0" marL="0">
-              <a:buNone/>
-            </a:pPr>
-            <a:r>
-              <a:rPr lang="en-US" sz="2800" b="1" dirty="0">
-                <a:solidFill>
-                  <a:srgbClr val="0F2E31"/>
-                </a:solidFill>
-                <a:latin typeface="Cambria" pitchFamily="34" charset="0"/>
-                <a:ea typeface="Cambria" pitchFamily="34" charset="-122"/>
-                <a:cs typeface="Cambria" pitchFamily="34" charset="-120"/>
-              </a:rPr>
-              <a:t>Hardest Part — a hidden concurrency race</a:t>
-            </a:r>
-            <a:endParaRPr lang="en-US" sz="2800" dirty="0"/>
-          </a:p>
-        </p:txBody>
-      </p:sp>
-      <p:sp>
-        <p:nvSpPr>
-          <p:cNvPr id="3" name="Shape 1"/>
-          <p:cNvSpPr/>
-          <p:nvPr/>
-        </p:nvSpPr>
-        <p:spPr>
-          <a:xfrm>
-            <a:off x="640080" y="1874520"/>
-            <a:ext cx="4937760" cy="4160520"/>
-          </a:xfrm>
-          <a:prstGeom prst="roundRect">
-            <a:avLst>
-              <a:gd name="adj" fmla="val 2198"/>
-            </a:avLst>
-          </a:prstGeom>
-          <a:solidFill>
-            <a:srgbClr val="EDF6F5"/>
-          </a:solidFill>
-          <a:ln w="19050">
+          <p:cNvPr id="2" name="Shape 0"/>
+          <p:cNvSpPr/>
+          <p:nvPr/>
+        </p:nvSpPr>
+        <p:spPr>
+          <a:xfrm>
+            <a:off x="9722815" y="-274320"/>
+            <a:ext cx="2743200" cy="2743200"/>
+          </a:xfrm>
+          <a:prstGeom prst="ellipse">
+            <a:avLst/>
+          </a:prstGeom>
+          <a:ln w="12700">
             <a:solidFill>
-              <a:srgbClr val="E7A93C"/>
+              <a:srgbClr val="2FB6A8"/>
             </a:solidFill>
             <a:prstDash val="solid"/>
           </a:ln>
@@ -3168,14 +3297,61 @@
       </p:sp>
       <p:sp>
         <p:nvSpPr>
-          <p:cNvPr id="4" name="Text 2"/>
-          <p:cNvSpPr/>
-          <p:nvPr/>
-        </p:nvSpPr>
-        <p:spPr>
-          <a:xfrm>
-            <a:off x="960120" y="2103120"/>
-            <a:ext cx="3657600" cy="457200"/>
+          <p:cNvPr id="3" name="Shape 1"/>
+          <p:cNvSpPr/>
+          <p:nvPr/>
+        </p:nvSpPr>
+        <p:spPr>
+          <a:xfrm>
+            <a:off x="10180015" y="182880"/>
+            <a:ext cx="1828800" cy="1828800"/>
+          </a:xfrm>
+          <a:prstGeom prst="ellipse">
+            <a:avLst/>
+          </a:prstGeom>
+          <a:ln w="12700">
+            <a:solidFill>
+              <a:srgbClr val="2FB6A8"/>
+            </a:solidFill>
+            <a:prstDash val="solid"/>
+          </a:ln>
+        </p:spPr>
+      </p:sp>
+      <p:sp>
+        <p:nvSpPr>
+          <p:cNvPr id="4" name="Shape 2"/>
+          <p:cNvSpPr/>
+          <p:nvPr/>
+        </p:nvSpPr>
+        <p:spPr>
+          <a:xfrm>
+            <a:off x="10637215" y="640080"/>
+            <a:ext cx="914400" cy="914400"/>
+          </a:xfrm>
+          <a:prstGeom prst="ellipse">
+            <a:avLst/>
+          </a:prstGeom>
+          <a:solidFill>
+            <a:srgbClr val="2FB6A8"/>
+          </a:solidFill>
+          <a:ln w="12700">
+            <a:solidFill>
+              <a:srgbClr val="2FB6A8"/>
+            </a:solidFill>
+            <a:prstDash val="solid"/>
+          </a:ln>
+        </p:spPr>
+      </p:sp>
+      <p:sp>
+        <p:nvSpPr>
+          <p:cNvPr id="5" name="Text 3"/>
+          <p:cNvSpPr/>
+          <p:nvPr/>
+        </p:nvSpPr>
+        <p:spPr>
+          <a:xfrm>
+            <a:off x="777240" y="731520"/>
+            <a:ext cx="914400" cy="640080"/>
           </a:xfrm>
           <a:prstGeom prst="rect">
             <a:avLst/>
@@ -3191,84 +3367,120 @@
               <a:buNone/>
             </a:pPr>
             <a:r>
-              <a:rPr lang="en-US" sz="1900" b="1" dirty="0">
-                <a:solidFill>
-                  <a:srgbClr val="E7A93C"/>
-                </a:solidFill>
-                <a:latin typeface="Cambria" pitchFamily="34" charset="0"/>
-                <a:ea typeface="Cambria" pitchFamily="34" charset="-122"/>
-                <a:cs typeface="Cambria" pitchFamily="34" charset="-120"/>
-              </a:rPr>
-              <a:t>Problem</a:t>
-            </a:r>
-            <a:endParaRPr lang="en-US" sz="1900" dirty="0"/>
-          </a:p>
-        </p:txBody>
-      </p:sp>
-      <p:sp>
-        <p:nvSpPr>
-          <p:cNvPr id="5" name="Text 3"/>
-          <p:cNvSpPr/>
-          <p:nvPr/>
-        </p:nvSpPr>
-        <p:spPr>
-          <a:xfrm>
-            <a:off x="960120" y="2651760"/>
-            <a:ext cx="4343400" cy="3200400"/>
-          </a:xfrm>
-          <a:prstGeom prst="rect">
-            <a:avLst/>
-          </a:prstGeom>
-          <a:noFill/>
-          <a:ln/>
-        </p:spPr>
-        <p:txBody>
-          <a:bodyPr wrap="square" lIns="0" tIns="0" rIns="0" bIns="0" rtlCol="0" anchor="ctr"/>
-          <a:lstStyle/>
-          <a:p>
-            <a:pPr indent="0" marL="0">
-              <a:lnSpc>
-                <a:spcPct val="112000"/>
-              </a:lnSpc>
-              <a:buNone/>
-            </a:pPr>
-            <a:r>
-              <a:rPr lang="en-US" sz="1350" dirty="0">
-                <a:solidFill>
-                  <a:srgbClr val="0F2E31"/>
+              <a:rPr lang="en-US" sz="3000" b="1" dirty="0">
+                <a:solidFill>
+                  <a:srgbClr val="2FB6A8"/>
                 </a:solidFill>
                 <a:latin typeface="Calibri" pitchFamily="34" charset="0"/>
                 <a:ea typeface="Calibri" pitchFamily="34" charset="-122"/>
                 <a:cs typeface="Calibri" pitchFamily="34" charset="-120"/>
               </a:rPr>
-              <a:t>The fog gateway buffers every reading in one shared in-memory map — ten streams writing at once while a ten-second flush retires it, deliberately with no lock. A 64-thread stress test failed once and readings silently vanished: one field in the accumulator was still mutable, so two simultaneous merges could each read it before either wrote back. Nothing crashed; data just disappeared.</a:t>
-            </a:r>
-            <a:endParaRPr lang="en-US" sz="1350" dirty="0"/>
-          </a:p>
-        </p:txBody>
-      </p:sp>
-      <p:sp>
-        <p:nvSpPr>
-          <p:cNvPr id="6" name="Shape 4"/>
-          <p:cNvSpPr/>
-          <p:nvPr/>
-        </p:nvSpPr>
-        <p:spPr>
-          <a:xfrm>
-            <a:off x="6611112" y="1874520"/>
-            <a:ext cx="4937760" cy="4160520"/>
+              <a:t>03</a:t>
+            </a:r>
+            <a:endParaRPr lang="en-US" sz="3000" dirty="0"/>
+          </a:p>
+        </p:txBody>
+      </p:sp>
+      <p:sp>
+        <p:nvSpPr>
+          <p:cNvPr id="6" name="Text 4"/>
+          <p:cNvSpPr/>
+          <p:nvPr/>
+        </p:nvSpPr>
+        <p:spPr>
+          <a:xfrm>
+            <a:off x="1645920" y="905256"/>
+            <a:ext cx="9768535" cy="274320"/>
+          </a:xfrm>
+          <a:prstGeom prst="rect">
+            <a:avLst/>
+          </a:prstGeom>
+          <a:noFill/>
+          <a:ln/>
+        </p:spPr>
+        <p:txBody>
+          <a:bodyPr wrap="square" lIns="0" tIns="0" rIns="0" bIns="0" rtlCol="0" anchor="ctr"/>
+          <a:lstStyle/>
+          <a:p>
+            <a:pPr indent="0" marL="0">
+              <a:buNone/>
+            </a:pPr>
+            <a:r>
+              <a:rPr lang="en-US" sz="1100" b="1" spc="200" kern="0" dirty="0">
+                <a:solidFill>
+                  <a:srgbClr val="8B98A6"/>
+                </a:solidFill>
+                <a:latin typeface="Calibri" pitchFamily="34" charset="0"/>
+                <a:ea typeface="Calibri" pitchFamily="34" charset="-122"/>
+                <a:cs typeface="Calibri" pitchFamily="34" charset="-120"/>
+              </a:rPr>
+              <a:t>CHALLENGE</a:t>
+            </a:r>
+            <a:endParaRPr lang="en-US" sz="1100" dirty="0"/>
+          </a:p>
+        </p:txBody>
+      </p:sp>
+      <p:sp>
+        <p:nvSpPr>
+          <p:cNvPr id="7" name="Text 5"/>
+          <p:cNvSpPr/>
+          <p:nvPr/>
+        </p:nvSpPr>
+        <p:spPr>
+          <a:xfrm>
+            <a:off x="777240" y="1380744"/>
+            <a:ext cx="10637215" cy="640080"/>
+          </a:xfrm>
+          <a:prstGeom prst="rect">
+            <a:avLst/>
+          </a:prstGeom>
+          <a:noFill/>
+          <a:ln/>
+        </p:spPr>
+        <p:txBody>
+          <a:bodyPr wrap="square" lIns="0" tIns="0" rIns="0" bIns="0" rtlCol="0" anchor="ctr"/>
+          <a:lstStyle/>
+          <a:p>
+            <a:pPr indent="0" marL="0">
+              <a:buNone/>
+            </a:pPr>
+            <a:r>
+              <a:rPr lang="en-US" sz="2300" b="1" dirty="0">
+                <a:solidFill>
+                  <a:srgbClr val="EDF3EF"/>
+                </a:solidFill>
+                <a:latin typeface="Calibri" pitchFamily="34" charset="0"/>
+                <a:ea typeface="Calibri" pitchFamily="34" charset="-122"/>
+                <a:cs typeface="Calibri" pitchFamily="34" charset="-120"/>
+              </a:rPr>
+              <a:t>two clocks in one thread</a:t>
+            </a:r>
+            <a:endParaRPr lang="en-US" sz="2300" dirty="0"/>
+          </a:p>
+        </p:txBody>
+      </p:sp>
+      <p:sp>
+        <p:nvSpPr>
+          <p:cNvPr id="8" name="Shape 6"/>
+          <p:cNvSpPr/>
+          <p:nvPr/>
+        </p:nvSpPr>
+        <p:spPr>
+          <a:xfrm>
+            <a:off x="777240" y="2423160"/>
+            <a:ext cx="5090008" cy="3657600"/>
           </a:xfrm>
           <a:prstGeom prst="roundRect">
             <a:avLst>
-              <a:gd name="adj" fmla="val 2198"/>
+              <a:gd name="adj" fmla="val 3000"/>
             </a:avLst>
           </a:prstGeom>
           <a:solidFill>
-            <a:srgbClr val="EDF6F5"/>
-          </a:solidFill>
-          <a:ln w="19050">
+            <a:srgbClr val="1A4249"/>
+          </a:solidFill>
+          <a:ln w="12700">
             <a:solidFill>
-              <a:srgbClr val="1E9188"/>
+              <a:srgbClr val="2E565D"/>
             </a:solidFill>
             <a:prstDash val="solid"/>
           </a:ln>
@@ -3276,14 +3488,14 @@
       </p:sp>
       <p:sp>
         <p:nvSpPr>
-          <p:cNvPr id="7" name="Text 5"/>
-          <p:cNvSpPr/>
-          <p:nvPr/>
-        </p:nvSpPr>
-        <p:spPr>
-          <a:xfrm>
-            <a:off x="6931152" y="2103120"/>
-            <a:ext cx="3657600" cy="457200"/>
+          <p:cNvPr id="9" name="Text 7"/>
+          <p:cNvSpPr/>
+          <p:nvPr/>
+        </p:nvSpPr>
+        <p:spPr>
+          <a:xfrm>
+            <a:off x="1097280" y="2697480"/>
+            <a:ext cx="4449928" cy="320040"/>
           </a:xfrm>
           <a:prstGeom prst="rect">
             <a:avLst/>
@@ -3299,57 +3511,80 @@
               <a:buNone/>
             </a:pPr>
             <a:r>
-              <a:rPr lang="en-US" sz="1900" b="1" dirty="0">
-                <a:solidFill>
-                  <a:srgbClr val="1E9188"/>
-                </a:solidFill>
-                <a:latin typeface="Cambria" pitchFamily="34" charset="0"/>
-                <a:ea typeface="Cambria" pitchFamily="34" charset="-122"/>
-                <a:cs typeface="Cambria" pitchFamily="34" charset="-120"/>
-              </a:rPr>
-              <a:t>Solution</a:t>
-            </a:r>
-            <a:endParaRPr lang="en-US" sz="1900" dirty="0"/>
-          </a:p>
-        </p:txBody>
-      </p:sp>
-      <p:sp>
-        <p:nvSpPr>
-          <p:cNvPr id="8" name="Text 6"/>
-          <p:cNvSpPr/>
-          <p:nvPr/>
-        </p:nvSpPr>
-        <p:spPr>
-          <a:xfrm>
-            <a:off x="6931152" y="2651760"/>
-            <a:ext cx="4343400" cy="3200400"/>
-          </a:xfrm>
-          <a:prstGeom prst="rect">
-            <a:avLst/>
-          </a:prstGeom>
-          <a:noFill/>
-          <a:ln/>
-        </p:spPr>
-        <p:txBody>
-          <a:bodyPr wrap="square" lIns="0" tIns="0" rIns="0" bIns="0" rtlCol="0" anchor="ctr"/>
-          <a:lstStyle/>
-          <a:p>
-            <a:pPr indent="0" marL="0">
-              <a:lnSpc>
-                <a:spcPct val="112000"/>
-              </a:lnSpc>
-              <a:buNone/>
-            </a:pPr>
-            <a:r>
-              <a:rPr lang="en-US" sz="1350" dirty="0">
-                <a:solidFill>
-                  <a:srgbClr val="0F2E31"/>
+              <a:rPr lang="en-US" sz="1200" b="1" spc="200" kern="0" dirty="0">
+                <a:solidFill>
+                  <a:srgbClr val="D1584E"/>
                 </a:solidFill>
                 <a:latin typeface="Calibri" pitchFamily="34" charset="0"/>
                 <a:ea typeface="Calibri" pitchFamily="34" charset="-122"/>
                 <a:cs typeface="Calibri" pitchFamily="34" charset="-120"/>
               </a:rPr>
-              <a:t>Make the accumulator fully immutable, so every combine returns a fresh value instead of editing one in place — the map's atomic merge is only guaranteed when the merge function has no side effects, a narrower promise than "thread-safe" sounds. The suite replays the 64-thread collision, and after the fix not one reading is lost.</a:t>
+              <a:t>PROBLEM</a:t>
+            </a:r>
+            <a:endParaRPr lang="en-US" sz="1200" dirty="0"/>
+          </a:p>
+        </p:txBody>
+      </p:sp>
+      <p:sp>
+        <p:nvSpPr>
+          <p:cNvPr id="10" name="Shape 8"/>
+          <p:cNvSpPr/>
+          <p:nvPr/>
+        </p:nvSpPr>
+        <p:spPr>
+          <a:xfrm>
+            <a:off x="1097280" y="3081528"/>
+            <a:ext cx="4449928" cy="0"/>
+          </a:xfrm>
+          <a:prstGeom prst="line">
+            <a:avLst/>
+          </a:prstGeom>
+          <a:noFill/>
+          <a:ln w="19050">
+            <a:solidFill>
+              <a:srgbClr val="D1584E"/>
+            </a:solidFill>
+            <a:prstDash val="solid"/>
+          </a:ln>
+        </p:spPr>
+      </p:sp>
+      <p:sp>
+        <p:nvSpPr>
+          <p:cNvPr id="11" name="Text 9"/>
+          <p:cNvSpPr/>
+          <p:nvPr/>
+        </p:nvSpPr>
+        <p:spPr>
+          <a:xfrm>
+            <a:off x="1097280" y="3246120"/>
+            <a:ext cx="4449928" cy="2651760"/>
+          </a:xfrm>
+          <a:prstGeom prst="rect">
+            <a:avLst/>
+          </a:prstGeom>
+          <a:noFill/>
+          <a:ln/>
+        </p:spPr>
+        <p:txBody>
+          <a:bodyPr wrap="square" lIns="0" tIns="0" rIns="0" bIns="0" rtlCol="0" anchor="t"/>
+          <a:lstStyle/>
+          <a:p>
+            <a:pPr indent="0" marL="0">
+              <a:lnSpc>
+                <a:spcPct val="128000"/>
+              </a:lnSpc>
+              <a:buNone/>
+            </a:pPr>
+            <a:r>
+              <a:rPr lang="en-US" sz="1350" dirty="0">
+                <a:solidFill>
+                  <a:srgbClr val="EDF3EF"/>
+                </a:solidFill>
+                <a:latin typeface="Calibri" pitchFamily="34" charset="0"/>
+                <a:ea typeface="Calibri" pitchFamily="34" charset="-122"/>
+                <a:cs typeface="Calibri" pitchFamily="34" charset="-120"/>
+              </a:rPr>
+              <a:t>Each sensor should sample often enough to trace a real signal but send rarely enough to spare the network, and dissolved oxygen, pH and ammonia each want a different balance. Splitting sampling and dispatch across separate threads or processes for ten sensor-and-pond pairs would multiply the moving parts and the ways they can race.</a:t>
             </a:r>
             <a:endParaRPr lang="en-US" sz="1350" dirty="0"/>
           </a:p>
@@ -3357,23 +3592,134 @@
       </p:sp>
       <p:sp>
         <p:nvSpPr>
-          <p:cNvPr id="9" name="Shape 7"/>
-          <p:cNvSpPr/>
-          <p:nvPr/>
-        </p:nvSpPr>
-        <p:spPr>
-          <a:xfrm>
-            <a:off x="5669280" y="3703320"/>
-            <a:ext cx="841248" cy="512064"/>
-          </a:xfrm>
-          <a:prstGeom prst="rightArrow">
-            <a:avLst/>
-          </a:prstGeom>
-          <a:solidFill>
-            <a:srgbClr val="0F6E6A"/>
-          </a:solidFill>
-          <a:ln/>
-        </p:spPr>
+          <p:cNvPr id="12" name="Shape 10"/>
+          <p:cNvSpPr/>
+          <p:nvPr/>
+        </p:nvSpPr>
+        <p:spPr>
+          <a:xfrm>
+            <a:off x="6324448" y="2423160"/>
+            <a:ext cx="5090008" cy="3657600"/>
+          </a:xfrm>
+          <a:prstGeom prst="roundRect">
+            <a:avLst>
+              <a:gd name="adj" fmla="val 3000"/>
+            </a:avLst>
+          </a:prstGeom>
+          <a:solidFill>
+            <a:srgbClr val="1A4249"/>
+          </a:solidFill>
+          <a:ln w="12700">
+            <a:solidFill>
+              <a:srgbClr val="2E565D"/>
+            </a:solidFill>
+            <a:prstDash val="solid"/>
+          </a:ln>
+        </p:spPr>
+      </p:sp>
+      <p:sp>
+        <p:nvSpPr>
+          <p:cNvPr id="13" name="Text 11"/>
+          <p:cNvSpPr/>
+          <p:nvPr/>
+        </p:nvSpPr>
+        <p:spPr>
+          <a:xfrm>
+            <a:off x="6644488" y="2697480"/>
+            <a:ext cx="4449928" cy="320040"/>
+          </a:xfrm>
+          <a:prstGeom prst="rect">
+            <a:avLst/>
+          </a:prstGeom>
+          <a:noFill/>
+          <a:ln/>
+        </p:spPr>
+        <p:txBody>
+          <a:bodyPr wrap="square" lIns="0" tIns="0" rIns="0" bIns="0" rtlCol="0" anchor="ctr"/>
+          <a:lstStyle/>
+          <a:p>
+            <a:pPr indent="0" marL="0">
+              <a:buNone/>
+            </a:pPr>
+            <a:r>
+              <a:rPr lang="en-US" sz="1200" b="1" spc="200" kern="0" dirty="0">
+                <a:solidFill>
+                  <a:srgbClr val="6FBD93"/>
+                </a:solidFill>
+                <a:latin typeface="Calibri" pitchFamily="34" charset="0"/>
+                <a:ea typeface="Calibri" pitchFamily="34" charset="-122"/>
+                <a:cs typeface="Calibri" pitchFamily="34" charset="-120"/>
+              </a:rPr>
+              <a:t>SOLUTION</a:t>
+            </a:r>
+            <a:endParaRPr lang="en-US" sz="1200" dirty="0"/>
+          </a:p>
+        </p:txBody>
+      </p:sp>
+      <p:sp>
+        <p:nvSpPr>
+          <p:cNvPr id="14" name="Shape 12"/>
+          <p:cNvSpPr/>
+          <p:nvPr/>
+        </p:nvSpPr>
+        <p:spPr>
+          <a:xfrm>
+            <a:off x="6644488" y="3081528"/>
+            <a:ext cx="4449928" cy="0"/>
+          </a:xfrm>
+          <a:prstGeom prst="line">
+            <a:avLst/>
+          </a:prstGeom>
+          <a:noFill/>
+          <a:ln w="19050">
+            <a:solidFill>
+              <a:srgbClr val="6FBD93"/>
+            </a:solidFill>
+            <a:prstDash val="solid"/>
+          </a:ln>
+        </p:spPr>
+      </p:sp>
+      <p:sp>
+        <p:nvSpPr>
+          <p:cNvPr id="15" name="Text 13"/>
+          <p:cNvSpPr/>
+          <p:nvPr/>
+        </p:nvSpPr>
+        <p:spPr>
+          <a:xfrm>
+            <a:off x="6644488" y="3246120"/>
+            <a:ext cx="4449928" cy="2651760"/>
+          </a:xfrm>
+          <a:prstGeom prst="rect">
+            <a:avLst/>
+          </a:prstGeom>
+          <a:noFill/>
+          <a:ln/>
+        </p:spPr>
+        <p:txBody>
+          <a:bodyPr wrap="square" lIns="0" tIns="0" rIns="0" bIns="0" rtlCol="0" anchor="t"/>
+          <a:lstStyle/>
+          <a:p>
+            <a:pPr indent="0" marL="0">
+              <a:lnSpc>
+                <a:spcPct val="128000"/>
+              </a:lnSpc>
+              <a:buNone/>
+            </a:pPr>
+            <a:r>
+              <a:rPr lang="en-US" sz="1350" dirty="0">
+                <a:solidFill>
+                  <a:srgbClr val="EDF3EF"/>
+                </a:solidFill>
+                <a:latin typeface="Calibri" pitchFamily="34" charset="0"/>
+                <a:ea typeface="Calibri" pitchFamily="34" charset="-122"/>
+                <a:cs typeface="Calibri" pitchFamily="34" charset="-120"/>
+              </a:rPr>
+              <a:t>Each process holds two independent deadlines inside one thread: a tight loop compares the clock against a next-sample time and a next-dispatch time, advances the reading when the first passes, flushes the batch when the second passes, and sleeps until whichever is nearer. Both intervals are configurable per container, so several readings accumulate into one network round with no locks and no second thread.</a:t>
+            </a:r>
+            <a:endParaRPr lang="en-US" sz="1350" dirty="0"/>
+          </a:p>
+        </p:txBody>
       </p:sp>
     </p:spTree>
   </p:cSld>
